--- a/slides/JRC/CS253L01.pptx
+++ b/slides/JRC/CS253L01.pptx
@@ -12,10 +12,16 @@
     <p:sldId id="259" r:id="rId6"/>
     <p:sldId id="261" r:id="rId7"/>
     <p:sldId id="262" r:id="rId8"/>
-    <p:sldId id="263" r:id="rId9"/>
-    <p:sldId id="264" r:id="rId10"/>
-    <p:sldId id="265" r:id="rId11"/>
-    <p:sldId id="266" r:id="rId12"/>
+    <p:sldId id="269" r:id="rId9"/>
+    <p:sldId id="263" r:id="rId10"/>
+    <p:sldId id="264" r:id="rId11"/>
+    <p:sldId id="265" r:id="rId12"/>
+    <p:sldId id="266" r:id="rId13"/>
+    <p:sldId id="267" r:id="rId14"/>
+    <p:sldId id="272" r:id="rId15"/>
+    <p:sldId id="270" r:id="rId16"/>
+    <p:sldId id="271" r:id="rId17"/>
+    <p:sldId id="273" r:id="rId18"/>
   </p:sldIdLst>
   <p:sldSz cx="9144000" cy="6858000" type="screen4x3"/>
   <p:notesSz cx="6858000" cy="9144000"/>
@@ -133,6 +139,3918 @@
 </p:presentation>
 </file>
 
+<file path=ppt/diagrams/colors1.xml><?xml version="1.0" encoding="utf-8"?>
+<dgm:colorsDef xmlns:dgm="http://schemas.openxmlformats.org/drawingml/2006/diagram" xmlns:a="http://schemas.openxmlformats.org/drawingml/2006/main" uniqueId="urn:microsoft.com/office/officeart/2005/8/colors/accent1_2">
+  <dgm:title val=""/>
+  <dgm:desc val=""/>
+  <dgm:catLst>
+    <dgm:cat type="accent1" pri="11200"/>
+  </dgm:catLst>
+  <dgm:styleLbl name="node0">
+    <dgm:fillClrLst meth="repeat">
+      <a:schemeClr val="accent1"/>
+    </dgm:fillClrLst>
+    <dgm:linClrLst meth="repeat">
+      <a:schemeClr val="lt1"/>
+    </dgm:linClrLst>
+    <dgm:effectClrLst/>
+    <dgm:txLinClrLst/>
+    <dgm:txFillClrLst/>
+    <dgm:txEffectClrLst/>
+  </dgm:styleLbl>
+  <dgm:styleLbl name="alignNode1">
+    <dgm:fillClrLst meth="repeat">
+      <a:schemeClr val="accent1"/>
+    </dgm:fillClrLst>
+    <dgm:linClrLst meth="repeat">
+      <a:schemeClr val="accent1"/>
+    </dgm:linClrLst>
+    <dgm:effectClrLst/>
+    <dgm:txLinClrLst/>
+    <dgm:txFillClrLst/>
+    <dgm:txEffectClrLst/>
+  </dgm:styleLbl>
+  <dgm:styleLbl name="node1">
+    <dgm:fillClrLst meth="repeat">
+      <a:schemeClr val="accent1"/>
+    </dgm:fillClrLst>
+    <dgm:linClrLst meth="repeat">
+      <a:schemeClr val="lt1"/>
+    </dgm:linClrLst>
+    <dgm:effectClrLst/>
+    <dgm:txLinClrLst/>
+    <dgm:txFillClrLst/>
+    <dgm:txEffectClrLst/>
+  </dgm:styleLbl>
+  <dgm:styleLbl name="lnNode1">
+    <dgm:fillClrLst meth="repeat">
+      <a:schemeClr val="accent1"/>
+    </dgm:fillClrLst>
+    <dgm:linClrLst meth="repeat">
+      <a:schemeClr val="lt1"/>
+    </dgm:linClrLst>
+    <dgm:effectClrLst/>
+    <dgm:txLinClrLst/>
+    <dgm:txFillClrLst/>
+    <dgm:txEffectClrLst/>
+  </dgm:styleLbl>
+  <dgm:styleLbl name="vennNode1">
+    <dgm:fillClrLst meth="repeat">
+      <a:schemeClr val="accent1">
+        <a:alpha val="50000"/>
+      </a:schemeClr>
+    </dgm:fillClrLst>
+    <dgm:linClrLst meth="repeat">
+      <a:schemeClr val="lt1"/>
+    </dgm:linClrLst>
+    <dgm:effectClrLst/>
+    <dgm:txLinClrLst/>
+    <dgm:txFillClrLst/>
+    <dgm:txEffectClrLst/>
+  </dgm:styleLbl>
+  <dgm:styleLbl name="node2">
+    <dgm:fillClrLst meth="repeat">
+      <a:schemeClr val="accent1"/>
+    </dgm:fillClrLst>
+    <dgm:linClrLst meth="repeat">
+      <a:schemeClr val="lt1"/>
+    </dgm:linClrLst>
+    <dgm:effectClrLst/>
+    <dgm:txLinClrLst/>
+    <dgm:txFillClrLst/>
+    <dgm:txEffectClrLst/>
+  </dgm:styleLbl>
+  <dgm:styleLbl name="node3">
+    <dgm:fillClrLst meth="repeat">
+      <a:schemeClr val="accent1"/>
+    </dgm:fillClrLst>
+    <dgm:linClrLst meth="repeat">
+      <a:schemeClr val="lt1"/>
+    </dgm:linClrLst>
+    <dgm:effectClrLst/>
+    <dgm:txLinClrLst/>
+    <dgm:txFillClrLst/>
+    <dgm:txEffectClrLst/>
+  </dgm:styleLbl>
+  <dgm:styleLbl name="node4">
+    <dgm:fillClrLst meth="repeat">
+      <a:schemeClr val="accent1"/>
+    </dgm:fillClrLst>
+    <dgm:linClrLst meth="repeat">
+      <a:schemeClr val="lt1"/>
+    </dgm:linClrLst>
+    <dgm:effectClrLst/>
+    <dgm:txLinClrLst/>
+    <dgm:txFillClrLst/>
+    <dgm:txEffectClrLst/>
+  </dgm:styleLbl>
+  <dgm:styleLbl name="fgImgPlace1">
+    <dgm:fillClrLst meth="repeat">
+      <a:schemeClr val="accent1">
+        <a:tint val="50000"/>
+      </a:schemeClr>
+    </dgm:fillClrLst>
+    <dgm:linClrLst meth="repeat">
+      <a:schemeClr val="lt1"/>
+    </dgm:linClrLst>
+    <dgm:effectClrLst/>
+    <dgm:txLinClrLst/>
+    <dgm:txFillClrLst meth="repeat">
+      <a:schemeClr val="lt1"/>
+    </dgm:txFillClrLst>
+    <dgm:txEffectClrLst/>
+  </dgm:styleLbl>
+  <dgm:styleLbl name="alignImgPlace1">
+    <dgm:fillClrLst meth="repeat">
+      <a:schemeClr val="accent1">
+        <a:tint val="50000"/>
+      </a:schemeClr>
+    </dgm:fillClrLst>
+    <dgm:linClrLst meth="repeat">
+      <a:schemeClr val="lt1"/>
+    </dgm:linClrLst>
+    <dgm:effectClrLst/>
+    <dgm:txLinClrLst/>
+    <dgm:txFillClrLst meth="repeat">
+      <a:schemeClr val="lt1"/>
+    </dgm:txFillClrLst>
+    <dgm:txEffectClrLst/>
+  </dgm:styleLbl>
+  <dgm:styleLbl name="bgImgPlace1">
+    <dgm:fillClrLst meth="repeat">
+      <a:schemeClr val="accent1">
+        <a:tint val="50000"/>
+      </a:schemeClr>
+    </dgm:fillClrLst>
+    <dgm:linClrLst meth="repeat">
+      <a:schemeClr val="lt1"/>
+    </dgm:linClrLst>
+    <dgm:effectClrLst/>
+    <dgm:txLinClrLst/>
+    <dgm:txFillClrLst meth="repeat">
+      <a:schemeClr val="lt1"/>
+    </dgm:txFillClrLst>
+    <dgm:txEffectClrLst/>
+  </dgm:styleLbl>
+  <dgm:styleLbl name="sibTrans2D1">
+    <dgm:fillClrLst meth="repeat">
+      <a:schemeClr val="accent1">
+        <a:tint val="60000"/>
+      </a:schemeClr>
+    </dgm:fillClrLst>
+    <dgm:linClrLst meth="repeat">
+      <a:schemeClr val="accent1">
+        <a:tint val="60000"/>
+      </a:schemeClr>
+    </dgm:linClrLst>
+    <dgm:effectClrLst/>
+    <dgm:txLinClrLst/>
+    <dgm:txFillClrLst/>
+    <dgm:txEffectClrLst/>
+  </dgm:styleLbl>
+  <dgm:styleLbl name="fgSibTrans2D1">
+    <dgm:fillClrLst meth="repeat">
+      <a:schemeClr val="accent1">
+        <a:tint val="60000"/>
+      </a:schemeClr>
+    </dgm:fillClrLst>
+    <dgm:linClrLst meth="repeat">
+      <a:schemeClr val="accent1">
+        <a:tint val="60000"/>
+      </a:schemeClr>
+    </dgm:linClrLst>
+    <dgm:effectClrLst/>
+    <dgm:txLinClrLst/>
+    <dgm:txFillClrLst/>
+    <dgm:txEffectClrLst/>
+  </dgm:styleLbl>
+  <dgm:styleLbl name="bgSibTrans2D1">
+    <dgm:fillClrLst meth="repeat">
+      <a:schemeClr val="accent1">
+        <a:tint val="60000"/>
+      </a:schemeClr>
+    </dgm:fillClrLst>
+    <dgm:linClrLst meth="repeat">
+      <a:schemeClr val="accent1">
+        <a:tint val="60000"/>
+      </a:schemeClr>
+    </dgm:linClrLst>
+    <dgm:effectClrLst/>
+    <dgm:txLinClrLst/>
+    <dgm:txFillClrLst/>
+    <dgm:txEffectClrLst/>
+  </dgm:styleLbl>
+  <dgm:styleLbl name="sibTrans1D1">
+    <dgm:fillClrLst meth="repeat">
+      <a:schemeClr val="accent1"/>
+    </dgm:fillClrLst>
+    <dgm:linClrLst meth="repeat">
+      <a:schemeClr val="accent1"/>
+    </dgm:linClrLst>
+    <dgm:effectClrLst/>
+    <dgm:txLinClrLst/>
+    <dgm:txFillClrLst meth="repeat">
+      <a:schemeClr val="tx1"/>
+    </dgm:txFillClrLst>
+    <dgm:txEffectClrLst/>
+  </dgm:styleLbl>
+  <dgm:styleLbl name="callout">
+    <dgm:fillClrLst meth="repeat">
+      <a:schemeClr val="accent1"/>
+    </dgm:fillClrLst>
+    <dgm:linClrLst meth="repeat">
+      <a:schemeClr val="accent1">
+        <a:tint val="50000"/>
+      </a:schemeClr>
+    </dgm:linClrLst>
+    <dgm:effectClrLst/>
+    <dgm:txLinClrLst/>
+    <dgm:txFillClrLst meth="repeat">
+      <a:schemeClr val="tx1"/>
+    </dgm:txFillClrLst>
+    <dgm:txEffectClrLst/>
+  </dgm:styleLbl>
+  <dgm:styleLbl name="asst0">
+    <dgm:fillClrLst meth="repeat">
+      <a:schemeClr val="accent1"/>
+    </dgm:fillClrLst>
+    <dgm:linClrLst meth="repeat">
+      <a:schemeClr val="lt1"/>
+    </dgm:linClrLst>
+    <dgm:effectClrLst/>
+    <dgm:txLinClrLst/>
+    <dgm:txFillClrLst/>
+    <dgm:txEffectClrLst/>
+  </dgm:styleLbl>
+  <dgm:styleLbl name="asst1">
+    <dgm:fillClrLst meth="repeat">
+      <a:schemeClr val="accent1"/>
+    </dgm:fillClrLst>
+    <dgm:linClrLst meth="repeat">
+      <a:schemeClr val="lt1"/>
+    </dgm:linClrLst>
+    <dgm:effectClrLst/>
+    <dgm:txLinClrLst/>
+    <dgm:txFillClrLst/>
+    <dgm:txEffectClrLst/>
+  </dgm:styleLbl>
+  <dgm:styleLbl name="asst2">
+    <dgm:fillClrLst meth="repeat">
+      <a:schemeClr val="accent1"/>
+    </dgm:fillClrLst>
+    <dgm:linClrLst meth="repeat">
+      <a:schemeClr val="lt1"/>
+    </dgm:linClrLst>
+    <dgm:effectClrLst/>
+    <dgm:txLinClrLst/>
+    <dgm:txFillClrLst/>
+    <dgm:txEffectClrLst/>
+  </dgm:styleLbl>
+  <dgm:styleLbl name="asst3">
+    <dgm:fillClrLst meth="repeat">
+      <a:schemeClr val="accent1"/>
+    </dgm:fillClrLst>
+    <dgm:linClrLst meth="repeat">
+      <a:schemeClr val="lt1"/>
+    </dgm:linClrLst>
+    <dgm:effectClrLst/>
+    <dgm:txLinClrLst/>
+    <dgm:txFillClrLst/>
+    <dgm:txEffectClrLst/>
+  </dgm:styleLbl>
+  <dgm:styleLbl name="asst4">
+    <dgm:fillClrLst meth="repeat">
+      <a:schemeClr val="accent1"/>
+    </dgm:fillClrLst>
+    <dgm:linClrLst meth="repeat">
+      <a:schemeClr val="lt1"/>
+    </dgm:linClrLst>
+    <dgm:effectClrLst/>
+    <dgm:txLinClrLst/>
+    <dgm:txFillClrLst/>
+    <dgm:txEffectClrLst/>
+  </dgm:styleLbl>
+  <dgm:styleLbl name="parChTrans2D1">
+    <dgm:fillClrLst meth="repeat">
+      <a:schemeClr val="accent1">
+        <a:tint val="60000"/>
+      </a:schemeClr>
+    </dgm:fillClrLst>
+    <dgm:linClrLst meth="repeat">
+      <a:schemeClr val="accent1">
+        <a:tint val="60000"/>
+      </a:schemeClr>
+    </dgm:linClrLst>
+    <dgm:effectClrLst/>
+    <dgm:txLinClrLst/>
+    <dgm:txFillClrLst meth="repeat">
+      <a:schemeClr val="lt1"/>
+    </dgm:txFillClrLst>
+    <dgm:txEffectClrLst/>
+  </dgm:styleLbl>
+  <dgm:styleLbl name="parChTrans2D2">
+    <dgm:fillClrLst meth="repeat">
+      <a:schemeClr val="accent1"/>
+    </dgm:fillClrLst>
+    <dgm:linClrLst meth="repeat">
+      <a:schemeClr val="accent1"/>
+    </dgm:linClrLst>
+    <dgm:effectClrLst/>
+    <dgm:txLinClrLst/>
+    <dgm:txFillClrLst meth="repeat">
+      <a:schemeClr val="lt1"/>
+    </dgm:txFillClrLst>
+    <dgm:txEffectClrLst/>
+  </dgm:styleLbl>
+  <dgm:styleLbl name="parChTrans2D3">
+    <dgm:fillClrLst meth="repeat">
+      <a:schemeClr val="accent1"/>
+    </dgm:fillClrLst>
+    <dgm:linClrLst meth="repeat">
+      <a:schemeClr val="accent1"/>
+    </dgm:linClrLst>
+    <dgm:effectClrLst/>
+    <dgm:txLinClrLst/>
+    <dgm:txFillClrLst meth="repeat">
+      <a:schemeClr val="lt1"/>
+    </dgm:txFillClrLst>
+    <dgm:txEffectClrLst/>
+  </dgm:styleLbl>
+  <dgm:styleLbl name="parChTrans2D4">
+    <dgm:fillClrLst meth="repeat">
+      <a:schemeClr val="accent1"/>
+    </dgm:fillClrLst>
+    <dgm:linClrLst meth="repeat">
+      <a:schemeClr val="accent1"/>
+    </dgm:linClrLst>
+    <dgm:effectClrLst/>
+    <dgm:txLinClrLst/>
+    <dgm:txFillClrLst meth="repeat">
+      <a:schemeClr val="lt1"/>
+    </dgm:txFillClrLst>
+    <dgm:txEffectClrLst/>
+  </dgm:styleLbl>
+  <dgm:styleLbl name="parChTrans1D1">
+    <dgm:fillClrLst meth="repeat">
+      <a:schemeClr val="accent1"/>
+    </dgm:fillClrLst>
+    <dgm:linClrLst meth="repeat">
+      <a:schemeClr val="accent1">
+        <a:shade val="60000"/>
+      </a:schemeClr>
+    </dgm:linClrLst>
+    <dgm:effectClrLst/>
+    <dgm:txLinClrLst/>
+    <dgm:txFillClrLst meth="repeat">
+      <a:schemeClr val="tx1"/>
+    </dgm:txFillClrLst>
+    <dgm:txEffectClrLst/>
+  </dgm:styleLbl>
+  <dgm:styleLbl name="parChTrans1D2">
+    <dgm:fillClrLst meth="repeat">
+      <a:schemeClr val="accent1"/>
+    </dgm:fillClrLst>
+    <dgm:linClrLst meth="repeat">
+      <a:schemeClr val="accent1">
+        <a:shade val="60000"/>
+      </a:schemeClr>
+    </dgm:linClrLst>
+    <dgm:effectClrLst/>
+    <dgm:txLinClrLst/>
+    <dgm:txFillClrLst meth="repeat">
+      <a:schemeClr val="tx1"/>
+    </dgm:txFillClrLst>
+    <dgm:txEffectClrLst/>
+  </dgm:styleLbl>
+  <dgm:styleLbl name="parChTrans1D3">
+    <dgm:fillClrLst meth="repeat">
+      <a:schemeClr val="accent1"/>
+    </dgm:fillClrLst>
+    <dgm:linClrLst meth="repeat">
+      <a:schemeClr val="accent1">
+        <a:shade val="80000"/>
+      </a:schemeClr>
+    </dgm:linClrLst>
+    <dgm:effectClrLst/>
+    <dgm:txLinClrLst/>
+    <dgm:txFillClrLst meth="repeat">
+      <a:schemeClr val="tx1"/>
+    </dgm:txFillClrLst>
+    <dgm:txEffectClrLst/>
+  </dgm:styleLbl>
+  <dgm:styleLbl name="parChTrans1D4">
+    <dgm:fillClrLst meth="repeat">
+      <a:schemeClr val="accent1"/>
+    </dgm:fillClrLst>
+    <dgm:linClrLst meth="repeat">
+      <a:schemeClr val="accent1">
+        <a:shade val="80000"/>
+      </a:schemeClr>
+    </dgm:linClrLst>
+    <dgm:effectClrLst/>
+    <dgm:txLinClrLst/>
+    <dgm:txFillClrLst meth="repeat">
+      <a:schemeClr val="tx1"/>
+    </dgm:txFillClrLst>
+    <dgm:txEffectClrLst/>
+  </dgm:styleLbl>
+  <dgm:styleLbl name="fgAcc1">
+    <dgm:fillClrLst meth="repeat">
+      <a:schemeClr val="lt1">
+        <a:alpha val="90000"/>
+      </a:schemeClr>
+    </dgm:fillClrLst>
+    <dgm:linClrLst meth="repeat">
+      <a:schemeClr val="accent1"/>
+    </dgm:linClrLst>
+    <dgm:effectClrLst/>
+    <dgm:txLinClrLst/>
+    <dgm:txFillClrLst meth="repeat">
+      <a:schemeClr val="dk1"/>
+    </dgm:txFillClrLst>
+    <dgm:txEffectClrLst/>
+  </dgm:styleLbl>
+  <dgm:styleLbl name="conFgAcc1">
+    <dgm:fillClrLst meth="repeat">
+      <a:schemeClr val="lt1">
+        <a:alpha val="90000"/>
+      </a:schemeClr>
+    </dgm:fillClrLst>
+    <dgm:linClrLst meth="repeat">
+      <a:schemeClr val="accent1"/>
+    </dgm:linClrLst>
+    <dgm:effectClrLst/>
+    <dgm:txLinClrLst/>
+    <dgm:txFillClrLst meth="repeat">
+      <a:schemeClr val="dk1"/>
+    </dgm:txFillClrLst>
+    <dgm:txEffectClrLst/>
+  </dgm:styleLbl>
+  <dgm:styleLbl name="alignAcc1">
+    <dgm:fillClrLst meth="repeat">
+      <a:schemeClr val="lt1">
+        <a:alpha val="90000"/>
+      </a:schemeClr>
+    </dgm:fillClrLst>
+    <dgm:linClrLst meth="repeat">
+      <a:schemeClr val="accent1"/>
+    </dgm:linClrLst>
+    <dgm:effectClrLst/>
+    <dgm:txLinClrLst/>
+    <dgm:txFillClrLst meth="repeat">
+      <a:schemeClr val="dk1"/>
+    </dgm:txFillClrLst>
+    <dgm:txEffectClrLst/>
+  </dgm:styleLbl>
+  <dgm:styleLbl name="trAlignAcc1">
+    <dgm:fillClrLst meth="repeat">
+      <a:schemeClr val="lt1">
+        <a:alpha val="40000"/>
+      </a:schemeClr>
+    </dgm:fillClrLst>
+    <dgm:linClrLst meth="repeat">
+      <a:schemeClr val="accent1"/>
+    </dgm:linClrLst>
+    <dgm:effectClrLst/>
+    <dgm:txLinClrLst/>
+    <dgm:txFillClrLst meth="repeat">
+      <a:schemeClr val="dk1"/>
+    </dgm:txFillClrLst>
+    <dgm:txEffectClrLst/>
+  </dgm:styleLbl>
+  <dgm:styleLbl name="bgAcc1">
+    <dgm:fillClrLst meth="repeat">
+      <a:schemeClr val="lt1">
+        <a:alpha val="90000"/>
+      </a:schemeClr>
+    </dgm:fillClrLst>
+    <dgm:linClrLst meth="repeat">
+      <a:schemeClr val="accent1"/>
+    </dgm:linClrLst>
+    <dgm:effectClrLst/>
+    <dgm:txLinClrLst/>
+    <dgm:txFillClrLst meth="repeat">
+      <a:schemeClr val="dk1"/>
+    </dgm:txFillClrLst>
+    <dgm:txEffectClrLst/>
+  </dgm:styleLbl>
+  <dgm:styleLbl name="solidFgAcc1">
+    <dgm:fillClrLst meth="repeat">
+      <a:schemeClr val="lt1"/>
+    </dgm:fillClrLst>
+    <dgm:linClrLst meth="repeat">
+      <a:schemeClr val="accent1"/>
+    </dgm:linClrLst>
+    <dgm:effectClrLst/>
+    <dgm:txLinClrLst/>
+    <dgm:txFillClrLst meth="repeat">
+      <a:schemeClr val="dk1"/>
+    </dgm:txFillClrLst>
+    <dgm:txEffectClrLst/>
+  </dgm:styleLbl>
+  <dgm:styleLbl name="solidAlignAcc1">
+    <dgm:fillClrLst meth="repeat">
+      <a:schemeClr val="lt1"/>
+    </dgm:fillClrLst>
+    <dgm:linClrLst meth="repeat">
+      <a:schemeClr val="accent1"/>
+    </dgm:linClrLst>
+    <dgm:effectClrLst/>
+    <dgm:txLinClrLst/>
+    <dgm:txFillClrLst meth="repeat">
+      <a:schemeClr val="dk1"/>
+    </dgm:txFillClrLst>
+    <dgm:txEffectClrLst/>
+  </dgm:styleLbl>
+  <dgm:styleLbl name="solidBgAcc1">
+    <dgm:fillClrLst meth="repeat">
+      <a:schemeClr val="lt1"/>
+    </dgm:fillClrLst>
+    <dgm:linClrLst meth="repeat">
+      <a:schemeClr val="accent1"/>
+    </dgm:linClrLst>
+    <dgm:effectClrLst/>
+    <dgm:txLinClrLst/>
+    <dgm:txFillClrLst meth="repeat">
+      <a:schemeClr val="dk1"/>
+    </dgm:txFillClrLst>
+    <dgm:txEffectClrLst/>
+  </dgm:styleLbl>
+  <dgm:styleLbl name="fgAccFollowNode1">
+    <dgm:fillClrLst meth="repeat">
+      <a:schemeClr val="accent1">
+        <a:alpha val="90000"/>
+        <a:tint val="40000"/>
+      </a:schemeClr>
+    </dgm:fillClrLst>
+    <dgm:linClrLst meth="repeat">
+      <a:schemeClr val="accent1">
+        <a:alpha val="90000"/>
+        <a:tint val="40000"/>
+      </a:schemeClr>
+    </dgm:linClrLst>
+    <dgm:effectClrLst/>
+    <dgm:txLinClrLst/>
+    <dgm:txFillClrLst meth="repeat">
+      <a:schemeClr val="dk1"/>
+    </dgm:txFillClrLst>
+    <dgm:txEffectClrLst/>
+  </dgm:styleLbl>
+  <dgm:styleLbl name="alignAccFollowNode1">
+    <dgm:fillClrLst meth="repeat">
+      <a:schemeClr val="accent1">
+        <a:alpha val="90000"/>
+        <a:tint val="40000"/>
+      </a:schemeClr>
+    </dgm:fillClrLst>
+    <dgm:linClrLst meth="repeat">
+      <a:schemeClr val="accent1">
+        <a:alpha val="90000"/>
+        <a:tint val="40000"/>
+      </a:schemeClr>
+    </dgm:linClrLst>
+    <dgm:effectClrLst/>
+    <dgm:txLinClrLst/>
+    <dgm:txFillClrLst meth="repeat">
+      <a:schemeClr val="dk1"/>
+    </dgm:txFillClrLst>
+    <dgm:txEffectClrLst/>
+  </dgm:styleLbl>
+  <dgm:styleLbl name="bgAccFollowNode1">
+    <dgm:fillClrLst meth="repeat">
+      <a:schemeClr val="accent1">
+        <a:alpha val="90000"/>
+        <a:tint val="40000"/>
+      </a:schemeClr>
+    </dgm:fillClrLst>
+    <dgm:linClrLst meth="repeat">
+      <a:schemeClr val="accent1">
+        <a:alpha val="90000"/>
+        <a:tint val="40000"/>
+      </a:schemeClr>
+    </dgm:linClrLst>
+    <dgm:effectClrLst/>
+    <dgm:txLinClrLst/>
+    <dgm:txFillClrLst meth="repeat">
+      <a:schemeClr val="dk1"/>
+    </dgm:txFillClrLst>
+    <dgm:txEffectClrLst/>
+  </dgm:styleLbl>
+  <dgm:styleLbl name="fgAcc0">
+    <dgm:fillClrLst meth="repeat">
+      <a:schemeClr val="lt1">
+        <a:alpha val="90000"/>
+      </a:schemeClr>
+    </dgm:fillClrLst>
+    <dgm:linClrLst meth="repeat">
+      <a:schemeClr val="accent1"/>
+    </dgm:linClrLst>
+    <dgm:effectClrLst/>
+    <dgm:txLinClrLst/>
+    <dgm:txFillClrLst meth="repeat">
+      <a:schemeClr val="dk1"/>
+    </dgm:txFillClrLst>
+    <dgm:txEffectClrLst/>
+  </dgm:styleLbl>
+  <dgm:styleLbl name="fgAcc2">
+    <dgm:fillClrLst meth="repeat">
+      <a:schemeClr val="lt1">
+        <a:alpha val="90000"/>
+      </a:schemeClr>
+    </dgm:fillClrLst>
+    <dgm:linClrLst meth="repeat">
+      <a:schemeClr val="accent1"/>
+    </dgm:linClrLst>
+    <dgm:effectClrLst/>
+    <dgm:txLinClrLst/>
+    <dgm:txFillClrLst meth="repeat">
+      <a:schemeClr val="dk1"/>
+    </dgm:txFillClrLst>
+    <dgm:txEffectClrLst/>
+  </dgm:styleLbl>
+  <dgm:styleLbl name="fgAcc3">
+    <dgm:fillClrLst meth="repeat">
+      <a:schemeClr val="lt1">
+        <a:alpha val="90000"/>
+      </a:schemeClr>
+    </dgm:fillClrLst>
+    <dgm:linClrLst meth="repeat">
+      <a:schemeClr val="accent1"/>
+    </dgm:linClrLst>
+    <dgm:effectClrLst/>
+    <dgm:txLinClrLst/>
+    <dgm:txFillClrLst meth="repeat">
+      <a:schemeClr val="dk1"/>
+    </dgm:txFillClrLst>
+    <dgm:txEffectClrLst/>
+  </dgm:styleLbl>
+  <dgm:styleLbl name="fgAcc4">
+    <dgm:fillClrLst meth="repeat">
+      <a:schemeClr val="lt1">
+        <a:alpha val="90000"/>
+      </a:schemeClr>
+    </dgm:fillClrLst>
+    <dgm:linClrLst meth="repeat">
+      <a:schemeClr val="accent1"/>
+    </dgm:linClrLst>
+    <dgm:effectClrLst/>
+    <dgm:txLinClrLst/>
+    <dgm:txFillClrLst meth="repeat">
+      <a:schemeClr val="dk1"/>
+    </dgm:txFillClrLst>
+    <dgm:txEffectClrLst/>
+  </dgm:styleLbl>
+  <dgm:styleLbl name="bgShp">
+    <dgm:fillClrLst meth="repeat">
+      <a:schemeClr val="accent1">
+        <a:tint val="40000"/>
+      </a:schemeClr>
+    </dgm:fillClrLst>
+    <dgm:linClrLst meth="repeat">
+      <a:schemeClr val="accent1"/>
+    </dgm:linClrLst>
+    <dgm:effectClrLst/>
+    <dgm:txLinClrLst/>
+    <dgm:txFillClrLst meth="repeat">
+      <a:schemeClr val="dk1"/>
+    </dgm:txFillClrLst>
+    <dgm:txEffectClrLst/>
+  </dgm:styleLbl>
+  <dgm:styleLbl name="dkBgShp">
+    <dgm:fillClrLst meth="repeat">
+      <a:schemeClr val="accent1">
+        <a:shade val="80000"/>
+      </a:schemeClr>
+    </dgm:fillClrLst>
+    <dgm:linClrLst meth="repeat">
+      <a:schemeClr val="accent1"/>
+    </dgm:linClrLst>
+    <dgm:effectClrLst/>
+    <dgm:txLinClrLst/>
+    <dgm:txFillClrLst meth="repeat">
+      <a:schemeClr val="lt1"/>
+    </dgm:txFillClrLst>
+    <dgm:txEffectClrLst/>
+  </dgm:styleLbl>
+  <dgm:styleLbl name="trBgShp">
+    <dgm:fillClrLst meth="repeat">
+      <a:schemeClr val="accent1">
+        <a:tint val="50000"/>
+        <a:alpha val="40000"/>
+      </a:schemeClr>
+    </dgm:fillClrLst>
+    <dgm:linClrLst meth="repeat">
+      <a:schemeClr val="accent1"/>
+    </dgm:linClrLst>
+    <dgm:effectClrLst/>
+    <dgm:txLinClrLst/>
+    <dgm:txFillClrLst meth="repeat">
+      <a:schemeClr val="lt1"/>
+    </dgm:txFillClrLst>
+    <dgm:txEffectClrLst/>
+  </dgm:styleLbl>
+  <dgm:styleLbl name="fgShp">
+    <dgm:fillClrLst meth="repeat">
+      <a:schemeClr val="accent1">
+        <a:tint val="60000"/>
+      </a:schemeClr>
+    </dgm:fillClrLst>
+    <dgm:linClrLst meth="repeat">
+      <a:schemeClr val="lt1"/>
+    </dgm:linClrLst>
+    <dgm:effectClrLst/>
+    <dgm:txLinClrLst/>
+    <dgm:txFillClrLst meth="repeat">
+      <a:schemeClr val="dk1"/>
+    </dgm:txFillClrLst>
+    <dgm:txEffectClrLst/>
+  </dgm:styleLbl>
+  <dgm:styleLbl name="revTx">
+    <dgm:fillClrLst meth="repeat">
+      <a:schemeClr val="lt1">
+        <a:alpha val="0"/>
+      </a:schemeClr>
+    </dgm:fillClrLst>
+    <dgm:linClrLst meth="repeat">
+      <a:schemeClr val="dk1">
+        <a:alpha val="0"/>
+      </a:schemeClr>
+    </dgm:linClrLst>
+    <dgm:effectClrLst/>
+    <dgm:txLinClrLst/>
+    <dgm:txFillClrLst meth="repeat">
+      <a:schemeClr val="tx1"/>
+    </dgm:txFillClrLst>
+    <dgm:txEffectClrLst/>
+  </dgm:styleLbl>
+</dgm:colorsDef>
+</file>
+
+<file path=ppt/diagrams/data1.xml><?xml version="1.0" encoding="utf-8"?>
+<dgm:dataModel xmlns:dgm="http://schemas.openxmlformats.org/drawingml/2006/diagram" xmlns:a="http://schemas.openxmlformats.org/drawingml/2006/main">
+  <dgm:ptLst>
+    <dgm:pt modelId="{6F6F4650-1F48-5D4B-A965-CA44D623016D}" type="doc">
+      <dgm:prSet loTypeId="urn:microsoft.com/office/officeart/2005/8/layout/process3" loCatId="" qsTypeId="urn:microsoft.com/office/officeart/2005/8/quickstyle/simple4" qsCatId="simple" csTypeId="urn:microsoft.com/office/officeart/2005/8/colors/accent1_2" csCatId="accent1" phldr="1"/>
+      <dgm:spPr/>
+      <dgm:t>
+        <a:bodyPr/>
+        <a:lstStyle/>
+        <a:p>
+          <a:endParaRPr lang="en-US"/>
+        </a:p>
+      </dgm:t>
+    </dgm:pt>
+    <dgm:pt modelId="{ADA409BC-52EB-3F45-BB00-E5ED77CCA00E}">
+      <dgm:prSet phldrT="[Text]"/>
+      <dgm:spPr/>
+      <dgm:t>
+        <a:bodyPr/>
+        <a:lstStyle/>
+        <a:p>
+          <a:r>
+            <a:rPr lang="en-US" dirty="0" smtClean="0"/>
+            <a:t>Edit</a:t>
+          </a:r>
+          <a:endParaRPr lang="en-US" dirty="0"/>
+        </a:p>
+      </dgm:t>
+    </dgm:pt>
+    <dgm:pt modelId="{0D18916B-92C9-F246-9459-95A92C1AA7D2}" type="parTrans" cxnId="{E7EC4CF8-55A5-EB48-9C54-085431F18C06}">
+      <dgm:prSet/>
+      <dgm:spPr/>
+      <dgm:t>
+        <a:bodyPr/>
+        <a:lstStyle/>
+        <a:p>
+          <a:endParaRPr lang="en-US"/>
+        </a:p>
+      </dgm:t>
+    </dgm:pt>
+    <dgm:pt modelId="{4C5F1EB5-47D0-2D46-AF8E-DBF934C2341E}" type="sibTrans" cxnId="{E7EC4CF8-55A5-EB48-9C54-085431F18C06}">
+      <dgm:prSet/>
+      <dgm:spPr/>
+      <dgm:t>
+        <a:bodyPr/>
+        <a:lstStyle/>
+        <a:p>
+          <a:r>
+            <a:rPr lang="en-US" dirty="0" smtClean="0"/>
+            <a:t>*.c</a:t>
+          </a:r>
+          <a:endParaRPr lang="en-US" dirty="0"/>
+        </a:p>
+      </dgm:t>
+    </dgm:pt>
+    <dgm:pt modelId="{E34D1488-4492-DE4A-9A94-0196755F47F9}">
+      <dgm:prSet phldrT="[Text]"/>
+      <dgm:spPr/>
+      <dgm:t>
+        <a:bodyPr/>
+        <a:lstStyle/>
+        <a:p>
+          <a:r>
+            <a:rPr lang="en-US" dirty="0" smtClean="0"/>
+            <a:t>eclipse</a:t>
+          </a:r>
+          <a:endParaRPr lang="en-US" dirty="0"/>
+        </a:p>
+      </dgm:t>
+    </dgm:pt>
+    <dgm:pt modelId="{DC5EA22C-0D04-A649-A6D9-D0D4CE319D62}" type="parTrans" cxnId="{46DAB0E8-74B5-694D-9456-489F62F60CAE}">
+      <dgm:prSet/>
+      <dgm:spPr/>
+      <dgm:t>
+        <a:bodyPr/>
+        <a:lstStyle/>
+        <a:p>
+          <a:endParaRPr lang="en-US"/>
+        </a:p>
+      </dgm:t>
+    </dgm:pt>
+    <dgm:pt modelId="{081D86B8-B952-514D-9CD2-67760BCD376B}" type="sibTrans" cxnId="{46DAB0E8-74B5-694D-9456-489F62F60CAE}">
+      <dgm:prSet/>
+      <dgm:spPr/>
+      <dgm:t>
+        <a:bodyPr/>
+        <a:lstStyle/>
+        <a:p>
+          <a:endParaRPr lang="en-US"/>
+        </a:p>
+      </dgm:t>
+    </dgm:pt>
+    <dgm:pt modelId="{B2FE4AAF-5041-AD45-807E-155B30CF1D95}">
+      <dgm:prSet phldrT="[Text]"/>
+      <dgm:spPr/>
+      <dgm:t>
+        <a:bodyPr/>
+        <a:lstStyle/>
+        <a:p>
+          <a:r>
+            <a:rPr lang="en-US" dirty="0" err="1" smtClean="0"/>
+            <a:t>gcc</a:t>
+          </a:r>
+          <a:endParaRPr lang="en-US" dirty="0"/>
+        </a:p>
+      </dgm:t>
+    </dgm:pt>
+    <dgm:pt modelId="{A2E10DFC-7241-124A-8B8C-4257E412959F}" type="parTrans" cxnId="{536DA3C1-31D4-0B4C-93EE-7D719ACD813D}">
+      <dgm:prSet/>
+      <dgm:spPr/>
+      <dgm:t>
+        <a:bodyPr/>
+        <a:lstStyle/>
+        <a:p>
+          <a:endParaRPr lang="en-US"/>
+        </a:p>
+      </dgm:t>
+    </dgm:pt>
+    <dgm:pt modelId="{8BF56ADC-8C52-914C-A89B-980FB145A8CD}" type="sibTrans" cxnId="{536DA3C1-31D4-0B4C-93EE-7D719ACD813D}">
+      <dgm:prSet/>
+      <dgm:spPr/>
+      <dgm:t>
+        <a:bodyPr/>
+        <a:lstStyle/>
+        <a:p>
+          <a:endParaRPr lang="en-US"/>
+        </a:p>
+      </dgm:t>
+    </dgm:pt>
+    <dgm:pt modelId="{22CEF46B-A5C0-1E44-99DF-CE905DD74D0F}">
+      <dgm:prSet phldrT="[Text]"/>
+      <dgm:spPr/>
+      <dgm:t>
+        <a:bodyPr/>
+        <a:lstStyle/>
+        <a:p>
+          <a:r>
+            <a:rPr lang="en-US" dirty="0" smtClean="0"/>
+            <a:t>Execute</a:t>
+          </a:r>
+          <a:endParaRPr lang="en-US" dirty="0"/>
+        </a:p>
+      </dgm:t>
+    </dgm:pt>
+    <dgm:pt modelId="{0066949F-EA57-2349-8010-7F01580F5F50}" type="parTrans" cxnId="{F007D444-CF9F-0B4A-9855-B5BE7BAE17B0}">
+      <dgm:prSet/>
+      <dgm:spPr/>
+      <dgm:t>
+        <a:bodyPr/>
+        <a:lstStyle/>
+        <a:p>
+          <a:endParaRPr lang="en-US"/>
+        </a:p>
+      </dgm:t>
+    </dgm:pt>
+    <dgm:pt modelId="{13B2FF73-DEB8-A14B-80EC-DF925D7E31D7}" type="sibTrans" cxnId="{F007D444-CF9F-0B4A-9855-B5BE7BAE17B0}">
+      <dgm:prSet/>
+      <dgm:spPr/>
+      <dgm:t>
+        <a:bodyPr/>
+        <a:lstStyle/>
+        <a:p>
+          <a:endParaRPr lang="en-US"/>
+        </a:p>
+      </dgm:t>
+    </dgm:pt>
+    <dgm:pt modelId="{FABA245D-FB19-6144-8253-F96DDEA2596C}">
+      <dgm:prSet phldrT="[Text]"/>
+      <dgm:spPr/>
+      <dgm:t>
+        <a:bodyPr/>
+        <a:lstStyle/>
+        <a:p>
+          <a:r>
+            <a:rPr lang="en-US" dirty="0" smtClean="0"/>
+            <a:t>vim</a:t>
+          </a:r>
+          <a:endParaRPr lang="en-US" dirty="0"/>
+        </a:p>
+      </dgm:t>
+    </dgm:pt>
+    <dgm:pt modelId="{250D36E6-4399-684C-9B49-7F6B1A23AA35}" type="parTrans" cxnId="{68AF24A7-626B-314C-B557-CC617616F5C6}">
+      <dgm:prSet/>
+      <dgm:spPr/>
+      <dgm:t>
+        <a:bodyPr/>
+        <a:lstStyle/>
+        <a:p>
+          <a:endParaRPr lang="en-US"/>
+        </a:p>
+      </dgm:t>
+    </dgm:pt>
+    <dgm:pt modelId="{4A2F5832-ACBE-3D46-BB09-719FBD33DCAE}" type="sibTrans" cxnId="{68AF24A7-626B-314C-B557-CC617616F5C6}">
+      <dgm:prSet/>
+      <dgm:spPr/>
+      <dgm:t>
+        <a:bodyPr/>
+        <a:lstStyle/>
+        <a:p>
+          <a:endParaRPr lang="en-US"/>
+        </a:p>
+      </dgm:t>
+    </dgm:pt>
+    <dgm:pt modelId="{2788E024-3744-7B48-9525-1F8C1DF300B6}">
+      <dgm:prSet phldrT="[Text]"/>
+      <dgm:spPr/>
+      <dgm:t>
+        <a:bodyPr/>
+        <a:lstStyle/>
+        <a:p>
+          <a:r>
+            <a:rPr lang="en-US" dirty="0" err="1" smtClean="0"/>
+            <a:t>emacs</a:t>
+          </a:r>
+          <a:endParaRPr lang="en-US" dirty="0"/>
+        </a:p>
+      </dgm:t>
+    </dgm:pt>
+    <dgm:pt modelId="{E76DDAB7-CD3D-D54E-BF94-44BA59F05CCD}" type="parTrans" cxnId="{B954FAC1-690C-8547-8DEE-C6783988CEAB}">
+      <dgm:prSet/>
+      <dgm:spPr/>
+      <dgm:t>
+        <a:bodyPr/>
+        <a:lstStyle/>
+        <a:p>
+          <a:endParaRPr lang="en-US"/>
+        </a:p>
+      </dgm:t>
+    </dgm:pt>
+    <dgm:pt modelId="{ACC9A833-A80D-0B45-879B-E6BA5600D03A}" type="sibTrans" cxnId="{B954FAC1-690C-8547-8DEE-C6783988CEAB}">
+      <dgm:prSet/>
+      <dgm:spPr/>
+      <dgm:t>
+        <a:bodyPr/>
+        <a:lstStyle/>
+        <a:p>
+          <a:endParaRPr lang="en-US"/>
+        </a:p>
+      </dgm:t>
+    </dgm:pt>
+    <dgm:pt modelId="{91829D42-0FB7-FB49-9132-CB31B46C5B4E}">
+      <dgm:prSet phldrT="[Text]"/>
+      <dgm:spPr/>
+      <dgm:t>
+        <a:bodyPr/>
+        <a:lstStyle/>
+        <a:p>
+          <a:r>
+            <a:rPr lang="en-US" dirty="0" err="1" smtClean="0"/>
+            <a:t>kwrite</a:t>
+          </a:r>
+          <a:endParaRPr lang="en-US" dirty="0"/>
+        </a:p>
+      </dgm:t>
+    </dgm:pt>
+    <dgm:pt modelId="{95B4D368-5120-7246-A2A8-E2F5EAE7184F}" type="parTrans" cxnId="{A4368DD0-1D67-5C45-8946-6EF9AF9657BF}">
+      <dgm:prSet/>
+      <dgm:spPr/>
+      <dgm:t>
+        <a:bodyPr/>
+        <a:lstStyle/>
+        <a:p>
+          <a:endParaRPr lang="en-US"/>
+        </a:p>
+      </dgm:t>
+    </dgm:pt>
+    <dgm:pt modelId="{31F06138-42B9-EC41-B3CA-8B1B12562171}" type="sibTrans" cxnId="{A4368DD0-1D67-5C45-8946-6EF9AF9657BF}">
+      <dgm:prSet/>
+      <dgm:spPr/>
+      <dgm:t>
+        <a:bodyPr/>
+        <a:lstStyle/>
+        <a:p>
+          <a:endParaRPr lang="en-US"/>
+        </a:p>
+      </dgm:t>
+    </dgm:pt>
+    <dgm:pt modelId="{3A8D9845-661D-5546-95EC-DAE645BC6295}">
+      <dgm:prSet phldrT="[Text]"/>
+      <dgm:spPr/>
+      <dgm:t>
+        <a:bodyPr/>
+        <a:lstStyle/>
+        <a:p>
+          <a:r>
+            <a:rPr lang="en-US" dirty="0" smtClean="0"/>
+            <a:t>Compile</a:t>
+          </a:r>
+          <a:endParaRPr lang="en-US" dirty="0"/>
+        </a:p>
+      </dgm:t>
+    </dgm:pt>
+    <dgm:pt modelId="{B3FD395D-2936-FB4E-96DD-0199337598ED}" type="parTrans" cxnId="{989C11B2-3195-FD42-A67D-CAD0D14473B3}">
+      <dgm:prSet/>
+      <dgm:spPr/>
+      <dgm:t>
+        <a:bodyPr/>
+        <a:lstStyle/>
+        <a:p>
+          <a:endParaRPr lang="en-US"/>
+        </a:p>
+      </dgm:t>
+    </dgm:pt>
+    <dgm:pt modelId="{32FF97B3-59EB-964F-AA93-CBBAF1FC2251}" type="sibTrans" cxnId="{989C11B2-3195-FD42-A67D-CAD0D14473B3}">
+      <dgm:prSet/>
+      <dgm:spPr/>
+      <dgm:t>
+        <a:bodyPr/>
+        <a:lstStyle/>
+        <a:p>
+          <a:r>
+            <a:rPr lang="en-US" dirty="0" smtClean="0"/>
+            <a:t>*.o</a:t>
+          </a:r>
+          <a:endParaRPr lang="en-US" dirty="0"/>
+        </a:p>
+      </dgm:t>
+    </dgm:pt>
+    <dgm:pt modelId="{EF021D95-0361-454C-B8BE-369639DA4430}">
+      <dgm:prSet phldrT="[Text]"/>
+      <dgm:spPr/>
+      <dgm:t>
+        <a:bodyPr/>
+        <a:lstStyle/>
+        <a:p>
+          <a:r>
+            <a:rPr lang="en-US" dirty="0" smtClean="0"/>
+            <a:t>Link</a:t>
+          </a:r>
+          <a:endParaRPr lang="en-US" dirty="0"/>
+        </a:p>
+      </dgm:t>
+    </dgm:pt>
+    <dgm:pt modelId="{045FB120-FCD7-5142-8AD6-601EFC20E2D3}" type="parTrans" cxnId="{73EB1A61-E20F-5247-ABCF-48807FD8CC4C}">
+      <dgm:prSet/>
+      <dgm:spPr/>
+      <dgm:t>
+        <a:bodyPr/>
+        <a:lstStyle/>
+        <a:p>
+          <a:endParaRPr lang="en-US"/>
+        </a:p>
+      </dgm:t>
+    </dgm:pt>
+    <dgm:pt modelId="{02B0C508-69F7-104F-B599-3DBB6829D411}" type="sibTrans" cxnId="{73EB1A61-E20F-5247-ABCF-48807FD8CC4C}">
+      <dgm:prSet/>
+      <dgm:spPr/>
+      <dgm:t>
+        <a:bodyPr/>
+        <a:lstStyle/>
+        <a:p>
+          <a:r>
+            <a:rPr lang="en-US" dirty="0" err="1" smtClean="0"/>
+            <a:t>a.out</a:t>
+          </a:r>
+          <a:endParaRPr lang="en-US" dirty="0"/>
+        </a:p>
+      </dgm:t>
+    </dgm:pt>
+    <dgm:pt modelId="{648FA668-3E75-F043-9950-3E64D64CAC0C}">
+      <dgm:prSet phldrT="[Text]"/>
+      <dgm:spPr/>
+      <dgm:t>
+        <a:bodyPr/>
+        <a:lstStyle/>
+        <a:p>
+          <a:r>
+            <a:rPr lang="en-US" dirty="0" err="1" smtClean="0"/>
+            <a:t>gcc</a:t>
+          </a:r>
+          <a:endParaRPr lang="en-US" dirty="0"/>
+        </a:p>
+      </dgm:t>
+    </dgm:pt>
+    <dgm:pt modelId="{90F6F6E1-FBFA-1F47-9863-9549484EB117}" type="parTrans" cxnId="{752EDE77-247A-744C-9BE5-79787699BC70}">
+      <dgm:prSet/>
+      <dgm:spPr/>
+      <dgm:t>
+        <a:bodyPr/>
+        <a:lstStyle/>
+        <a:p>
+          <a:endParaRPr lang="en-US"/>
+        </a:p>
+      </dgm:t>
+    </dgm:pt>
+    <dgm:pt modelId="{465455A9-6A6D-0540-8C9F-F7E6AEE30272}" type="sibTrans" cxnId="{752EDE77-247A-744C-9BE5-79787699BC70}">
+      <dgm:prSet/>
+      <dgm:spPr/>
+      <dgm:t>
+        <a:bodyPr/>
+        <a:lstStyle/>
+        <a:p>
+          <a:endParaRPr lang="en-US"/>
+        </a:p>
+      </dgm:t>
+    </dgm:pt>
+    <dgm:pt modelId="{9A95A566-8931-D442-B8E5-9E24536E7283}" type="pres">
+      <dgm:prSet presAssocID="{6F6F4650-1F48-5D4B-A965-CA44D623016D}" presName="linearFlow" presStyleCnt="0">
+        <dgm:presLayoutVars>
+          <dgm:dir/>
+          <dgm:animLvl val="lvl"/>
+          <dgm:resizeHandles val="exact"/>
+        </dgm:presLayoutVars>
+      </dgm:prSet>
+      <dgm:spPr/>
+    </dgm:pt>
+    <dgm:pt modelId="{AC612096-332F-5E49-91B1-784B4B2D036B}" type="pres">
+      <dgm:prSet presAssocID="{ADA409BC-52EB-3F45-BB00-E5ED77CCA00E}" presName="composite" presStyleCnt="0"/>
+      <dgm:spPr/>
+    </dgm:pt>
+    <dgm:pt modelId="{C970DBB1-6B56-9642-828C-ED6F8BE1138C}" type="pres">
+      <dgm:prSet presAssocID="{ADA409BC-52EB-3F45-BB00-E5ED77CCA00E}" presName="parTx" presStyleLbl="node1" presStyleIdx="0" presStyleCnt="4">
+        <dgm:presLayoutVars>
+          <dgm:chMax val="0"/>
+          <dgm:chPref val="0"/>
+          <dgm:bulletEnabled val="1"/>
+        </dgm:presLayoutVars>
+      </dgm:prSet>
+      <dgm:spPr/>
+      <dgm:t>
+        <a:bodyPr/>
+        <a:lstStyle/>
+        <a:p>
+          <a:endParaRPr lang="en-US"/>
+        </a:p>
+      </dgm:t>
+    </dgm:pt>
+    <dgm:pt modelId="{9516E0EF-CD34-3048-B475-6D32E64F7725}" type="pres">
+      <dgm:prSet presAssocID="{ADA409BC-52EB-3F45-BB00-E5ED77CCA00E}" presName="parSh" presStyleLbl="node1" presStyleIdx="0" presStyleCnt="4"/>
+      <dgm:spPr/>
+      <dgm:t>
+        <a:bodyPr/>
+        <a:lstStyle/>
+        <a:p>
+          <a:endParaRPr lang="en-US"/>
+        </a:p>
+      </dgm:t>
+    </dgm:pt>
+    <dgm:pt modelId="{EE24CBD2-B6BB-3647-AB34-AE67EB3082B9}" type="pres">
+      <dgm:prSet presAssocID="{ADA409BC-52EB-3F45-BB00-E5ED77CCA00E}" presName="desTx" presStyleLbl="fgAcc1" presStyleIdx="0" presStyleCnt="4">
+        <dgm:presLayoutVars>
+          <dgm:bulletEnabled val="1"/>
+        </dgm:presLayoutVars>
+      </dgm:prSet>
+      <dgm:spPr/>
+      <dgm:t>
+        <a:bodyPr/>
+        <a:lstStyle/>
+        <a:p>
+          <a:endParaRPr lang="en-US"/>
+        </a:p>
+      </dgm:t>
+    </dgm:pt>
+    <dgm:pt modelId="{7CBDDB3C-A751-7443-BC39-972CDC0D18A0}" type="pres">
+      <dgm:prSet presAssocID="{4C5F1EB5-47D0-2D46-AF8E-DBF934C2341E}" presName="sibTrans" presStyleLbl="sibTrans2D1" presStyleIdx="0" presStyleCnt="3"/>
+      <dgm:spPr/>
+      <dgm:t>
+        <a:bodyPr/>
+        <a:lstStyle/>
+        <a:p>
+          <a:endParaRPr lang="en-US"/>
+        </a:p>
+      </dgm:t>
+    </dgm:pt>
+    <dgm:pt modelId="{BF70A7CC-2346-3144-BFFB-BCC674B1C98E}" type="pres">
+      <dgm:prSet presAssocID="{4C5F1EB5-47D0-2D46-AF8E-DBF934C2341E}" presName="connTx" presStyleLbl="sibTrans2D1" presStyleIdx="0" presStyleCnt="3"/>
+      <dgm:spPr/>
+      <dgm:t>
+        <a:bodyPr/>
+        <a:lstStyle/>
+        <a:p>
+          <a:endParaRPr lang="en-US"/>
+        </a:p>
+      </dgm:t>
+    </dgm:pt>
+    <dgm:pt modelId="{85A57CA9-45FF-CC4B-914F-9572B968A9D8}" type="pres">
+      <dgm:prSet presAssocID="{3A8D9845-661D-5546-95EC-DAE645BC6295}" presName="composite" presStyleCnt="0"/>
+      <dgm:spPr/>
+    </dgm:pt>
+    <dgm:pt modelId="{C3A6B8F6-2399-6E44-A701-9B8D41D02093}" type="pres">
+      <dgm:prSet presAssocID="{3A8D9845-661D-5546-95EC-DAE645BC6295}" presName="parTx" presStyleLbl="node1" presStyleIdx="0" presStyleCnt="4">
+        <dgm:presLayoutVars>
+          <dgm:chMax val="0"/>
+          <dgm:chPref val="0"/>
+          <dgm:bulletEnabled val="1"/>
+        </dgm:presLayoutVars>
+      </dgm:prSet>
+      <dgm:spPr/>
+    </dgm:pt>
+    <dgm:pt modelId="{7D838EBD-BC01-9648-8B26-194A4A736070}" type="pres">
+      <dgm:prSet presAssocID="{3A8D9845-661D-5546-95EC-DAE645BC6295}" presName="parSh" presStyleLbl="node1" presStyleIdx="1" presStyleCnt="4"/>
+      <dgm:spPr/>
+    </dgm:pt>
+    <dgm:pt modelId="{E0DF3329-844F-B64F-82F8-1FE1115812BC}" type="pres">
+      <dgm:prSet presAssocID="{3A8D9845-661D-5546-95EC-DAE645BC6295}" presName="desTx" presStyleLbl="fgAcc1" presStyleIdx="1" presStyleCnt="4">
+        <dgm:presLayoutVars>
+          <dgm:bulletEnabled val="1"/>
+        </dgm:presLayoutVars>
+      </dgm:prSet>
+      <dgm:spPr/>
+      <dgm:t>
+        <a:bodyPr/>
+        <a:lstStyle/>
+        <a:p>
+          <a:endParaRPr lang="en-US"/>
+        </a:p>
+      </dgm:t>
+    </dgm:pt>
+    <dgm:pt modelId="{A2421DC8-4C9D-464B-9F73-D38F2A1D0D4E}" type="pres">
+      <dgm:prSet presAssocID="{32FF97B3-59EB-964F-AA93-CBBAF1FC2251}" presName="sibTrans" presStyleLbl="sibTrans2D1" presStyleIdx="1" presStyleCnt="3"/>
+      <dgm:spPr/>
+    </dgm:pt>
+    <dgm:pt modelId="{B6743290-0AFC-A841-954B-52461BC8556E}" type="pres">
+      <dgm:prSet presAssocID="{32FF97B3-59EB-964F-AA93-CBBAF1FC2251}" presName="connTx" presStyleLbl="sibTrans2D1" presStyleIdx="1" presStyleCnt="3"/>
+      <dgm:spPr/>
+    </dgm:pt>
+    <dgm:pt modelId="{EA62AD6C-7650-F14E-89AC-D5FC6999B592}" type="pres">
+      <dgm:prSet presAssocID="{EF021D95-0361-454C-B8BE-369639DA4430}" presName="composite" presStyleCnt="0"/>
+      <dgm:spPr/>
+    </dgm:pt>
+    <dgm:pt modelId="{E0DE6778-D41C-C949-B200-11F3CEBA2C4B}" type="pres">
+      <dgm:prSet presAssocID="{EF021D95-0361-454C-B8BE-369639DA4430}" presName="parTx" presStyleLbl="node1" presStyleIdx="1" presStyleCnt="4">
+        <dgm:presLayoutVars>
+          <dgm:chMax val="0"/>
+          <dgm:chPref val="0"/>
+          <dgm:bulletEnabled val="1"/>
+        </dgm:presLayoutVars>
+      </dgm:prSet>
+      <dgm:spPr/>
+    </dgm:pt>
+    <dgm:pt modelId="{0119A2CD-C4EF-C046-9B7A-CCE76A01246B}" type="pres">
+      <dgm:prSet presAssocID="{EF021D95-0361-454C-B8BE-369639DA4430}" presName="parSh" presStyleLbl="node1" presStyleIdx="2" presStyleCnt="4"/>
+      <dgm:spPr/>
+    </dgm:pt>
+    <dgm:pt modelId="{8DD49C97-AAF5-0A4E-B462-EFDC89D3AFD3}" type="pres">
+      <dgm:prSet presAssocID="{EF021D95-0361-454C-B8BE-369639DA4430}" presName="desTx" presStyleLbl="fgAcc1" presStyleIdx="2" presStyleCnt="4">
+        <dgm:presLayoutVars>
+          <dgm:bulletEnabled val="1"/>
+        </dgm:presLayoutVars>
+      </dgm:prSet>
+      <dgm:spPr/>
+    </dgm:pt>
+    <dgm:pt modelId="{E2F96D9F-AB08-E640-B977-50BFE3008110}" type="pres">
+      <dgm:prSet presAssocID="{02B0C508-69F7-104F-B599-3DBB6829D411}" presName="sibTrans" presStyleLbl="sibTrans2D1" presStyleIdx="2" presStyleCnt="3"/>
+      <dgm:spPr/>
+      <dgm:t>
+        <a:bodyPr/>
+        <a:lstStyle/>
+        <a:p>
+          <a:endParaRPr lang="en-US"/>
+        </a:p>
+      </dgm:t>
+    </dgm:pt>
+    <dgm:pt modelId="{BF0715F3-1C3A-E643-B606-AE668633774A}" type="pres">
+      <dgm:prSet presAssocID="{02B0C508-69F7-104F-B599-3DBB6829D411}" presName="connTx" presStyleLbl="sibTrans2D1" presStyleIdx="2" presStyleCnt="3"/>
+      <dgm:spPr/>
+      <dgm:t>
+        <a:bodyPr/>
+        <a:lstStyle/>
+        <a:p>
+          <a:endParaRPr lang="en-US"/>
+        </a:p>
+      </dgm:t>
+    </dgm:pt>
+    <dgm:pt modelId="{80B5BAB9-00EF-E244-9617-294A44E2911E}" type="pres">
+      <dgm:prSet presAssocID="{22CEF46B-A5C0-1E44-99DF-CE905DD74D0F}" presName="composite" presStyleCnt="0"/>
+      <dgm:spPr/>
+    </dgm:pt>
+    <dgm:pt modelId="{78DEBFB1-DBD0-F54D-B4C6-4D0225D348BE}" type="pres">
+      <dgm:prSet presAssocID="{22CEF46B-A5C0-1E44-99DF-CE905DD74D0F}" presName="parTx" presStyleLbl="node1" presStyleIdx="2" presStyleCnt="4">
+        <dgm:presLayoutVars>
+          <dgm:chMax val="0"/>
+          <dgm:chPref val="0"/>
+          <dgm:bulletEnabled val="1"/>
+        </dgm:presLayoutVars>
+      </dgm:prSet>
+      <dgm:spPr/>
+    </dgm:pt>
+    <dgm:pt modelId="{2A79F767-1CEB-A944-9536-C44CCA90632D}" type="pres">
+      <dgm:prSet presAssocID="{22CEF46B-A5C0-1E44-99DF-CE905DD74D0F}" presName="parSh" presStyleLbl="node1" presStyleIdx="3" presStyleCnt="4"/>
+      <dgm:spPr/>
+    </dgm:pt>
+    <dgm:pt modelId="{6DB9280B-D514-B548-833D-EBED3FF69866}" type="pres">
+      <dgm:prSet presAssocID="{22CEF46B-A5C0-1E44-99DF-CE905DD74D0F}" presName="desTx" presStyleLbl="fgAcc1" presStyleIdx="3" presStyleCnt="4">
+        <dgm:presLayoutVars>
+          <dgm:bulletEnabled val="1"/>
+        </dgm:presLayoutVars>
+      </dgm:prSet>
+      <dgm:spPr>
+        <a:noFill/>
+      </dgm:spPr>
+      <dgm:t>
+        <a:bodyPr/>
+        <a:lstStyle/>
+        <a:p>
+          <a:endParaRPr lang="en-US"/>
+        </a:p>
+      </dgm:t>
+    </dgm:pt>
+  </dgm:ptLst>
+  <dgm:cxnLst>
+    <dgm:cxn modelId="{93406168-1830-2A4E-BC3B-10585D74CD24}" type="presOf" srcId="{ADA409BC-52EB-3F45-BB00-E5ED77CCA00E}" destId="{C970DBB1-6B56-9642-828C-ED6F8BE1138C}" srcOrd="0" destOrd="0" presId="urn:microsoft.com/office/officeart/2005/8/layout/process3"/>
+    <dgm:cxn modelId="{3DA60360-DD28-C74B-BDA1-9AC2AEB934CF}" type="presOf" srcId="{2788E024-3744-7B48-9525-1F8C1DF300B6}" destId="{EE24CBD2-B6BB-3647-AB34-AE67EB3082B9}" srcOrd="0" destOrd="3" presId="urn:microsoft.com/office/officeart/2005/8/layout/process3"/>
+    <dgm:cxn modelId="{FFF3C47B-C7D3-F24F-A6E5-9AF1BA674042}" type="presOf" srcId="{FABA245D-FB19-6144-8253-F96DDEA2596C}" destId="{EE24CBD2-B6BB-3647-AB34-AE67EB3082B9}" srcOrd="0" destOrd="2" presId="urn:microsoft.com/office/officeart/2005/8/layout/process3"/>
+    <dgm:cxn modelId="{EF916A28-439C-A644-BD1D-182D6A5ECC5D}" type="presOf" srcId="{EF021D95-0361-454C-B8BE-369639DA4430}" destId="{E0DE6778-D41C-C949-B200-11F3CEBA2C4B}" srcOrd="0" destOrd="0" presId="urn:microsoft.com/office/officeart/2005/8/layout/process3"/>
+    <dgm:cxn modelId="{913E0A49-7675-BB4A-A051-DC04554F343C}" type="presOf" srcId="{B2FE4AAF-5041-AD45-807E-155B30CF1D95}" destId="{E0DF3329-844F-B64F-82F8-1FE1115812BC}" srcOrd="0" destOrd="0" presId="urn:microsoft.com/office/officeart/2005/8/layout/process3"/>
+    <dgm:cxn modelId="{E7EC4CF8-55A5-EB48-9C54-085431F18C06}" srcId="{6F6F4650-1F48-5D4B-A965-CA44D623016D}" destId="{ADA409BC-52EB-3F45-BB00-E5ED77CCA00E}" srcOrd="0" destOrd="0" parTransId="{0D18916B-92C9-F246-9459-95A92C1AA7D2}" sibTransId="{4C5F1EB5-47D0-2D46-AF8E-DBF934C2341E}"/>
+    <dgm:cxn modelId="{8885223F-28A2-D04E-B4E6-D92920E5EB8B}" type="presOf" srcId="{3A8D9845-661D-5546-95EC-DAE645BC6295}" destId="{7D838EBD-BC01-9648-8B26-194A4A736070}" srcOrd="1" destOrd="0" presId="urn:microsoft.com/office/officeart/2005/8/layout/process3"/>
+    <dgm:cxn modelId="{94C90300-29D0-1D4B-AC5B-137C365FF05E}" type="presOf" srcId="{91829D42-0FB7-FB49-9132-CB31B46C5B4E}" destId="{EE24CBD2-B6BB-3647-AB34-AE67EB3082B9}" srcOrd="0" destOrd="1" presId="urn:microsoft.com/office/officeart/2005/8/layout/process3"/>
+    <dgm:cxn modelId="{46DAB0E8-74B5-694D-9456-489F62F60CAE}" srcId="{ADA409BC-52EB-3F45-BB00-E5ED77CCA00E}" destId="{E34D1488-4492-DE4A-9A94-0196755F47F9}" srcOrd="0" destOrd="0" parTransId="{DC5EA22C-0D04-A649-A6D9-D0D4CE319D62}" sibTransId="{081D86B8-B952-514D-9CD2-67760BCD376B}"/>
+    <dgm:cxn modelId="{D89A2616-C739-F649-B317-E2347EE22599}" type="presOf" srcId="{ADA409BC-52EB-3F45-BB00-E5ED77CCA00E}" destId="{9516E0EF-CD34-3048-B475-6D32E64F7725}" srcOrd="1" destOrd="0" presId="urn:microsoft.com/office/officeart/2005/8/layout/process3"/>
+    <dgm:cxn modelId="{269B1B1C-4362-2B43-AE13-F73DD44E1A18}" type="presOf" srcId="{3A8D9845-661D-5546-95EC-DAE645BC6295}" destId="{C3A6B8F6-2399-6E44-A701-9B8D41D02093}" srcOrd="0" destOrd="0" presId="urn:microsoft.com/office/officeart/2005/8/layout/process3"/>
+    <dgm:cxn modelId="{411892C9-C778-864C-86B0-005B7F6C9D35}" type="presOf" srcId="{4C5F1EB5-47D0-2D46-AF8E-DBF934C2341E}" destId="{BF70A7CC-2346-3144-BFFB-BCC674B1C98E}" srcOrd="1" destOrd="0" presId="urn:microsoft.com/office/officeart/2005/8/layout/process3"/>
+    <dgm:cxn modelId="{155AAE4D-98ED-454B-8FC6-5A41F2AAE44B}" type="presOf" srcId="{22CEF46B-A5C0-1E44-99DF-CE905DD74D0F}" destId="{78DEBFB1-DBD0-F54D-B4C6-4D0225D348BE}" srcOrd="0" destOrd="0" presId="urn:microsoft.com/office/officeart/2005/8/layout/process3"/>
+    <dgm:cxn modelId="{FA3E9AEE-BFE9-1D48-BB05-7E73C251532B}" type="presOf" srcId="{648FA668-3E75-F043-9950-3E64D64CAC0C}" destId="{8DD49C97-AAF5-0A4E-B462-EFDC89D3AFD3}" srcOrd="0" destOrd="0" presId="urn:microsoft.com/office/officeart/2005/8/layout/process3"/>
+    <dgm:cxn modelId="{68AF24A7-626B-314C-B557-CC617616F5C6}" srcId="{ADA409BC-52EB-3F45-BB00-E5ED77CCA00E}" destId="{FABA245D-FB19-6144-8253-F96DDEA2596C}" srcOrd="2" destOrd="0" parTransId="{250D36E6-4399-684C-9B49-7F6B1A23AA35}" sibTransId="{4A2F5832-ACBE-3D46-BB09-719FBD33DCAE}"/>
+    <dgm:cxn modelId="{E2C11E6F-10E7-8746-8738-D8B2CA456175}" type="presOf" srcId="{02B0C508-69F7-104F-B599-3DBB6829D411}" destId="{E2F96D9F-AB08-E640-B977-50BFE3008110}" srcOrd="0" destOrd="0" presId="urn:microsoft.com/office/officeart/2005/8/layout/process3"/>
+    <dgm:cxn modelId="{916BAABA-AF7A-5447-9145-2BEBE9928DF6}" type="presOf" srcId="{32FF97B3-59EB-964F-AA93-CBBAF1FC2251}" destId="{A2421DC8-4C9D-464B-9F73-D38F2A1D0D4E}" srcOrd="0" destOrd="0" presId="urn:microsoft.com/office/officeart/2005/8/layout/process3"/>
+    <dgm:cxn modelId="{989C11B2-3195-FD42-A67D-CAD0D14473B3}" srcId="{6F6F4650-1F48-5D4B-A965-CA44D623016D}" destId="{3A8D9845-661D-5546-95EC-DAE645BC6295}" srcOrd="1" destOrd="0" parTransId="{B3FD395D-2936-FB4E-96DD-0199337598ED}" sibTransId="{32FF97B3-59EB-964F-AA93-CBBAF1FC2251}"/>
+    <dgm:cxn modelId="{A4368DD0-1D67-5C45-8946-6EF9AF9657BF}" srcId="{ADA409BC-52EB-3F45-BB00-E5ED77CCA00E}" destId="{91829D42-0FB7-FB49-9132-CB31B46C5B4E}" srcOrd="1" destOrd="0" parTransId="{95B4D368-5120-7246-A2A8-E2F5EAE7184F}" sibTransId="{31F06138-42B9-EC41-B3CA-8B1B12562171}"/>
+    <dgm:cxn modelId="{7D17811C-3CC7-584A-B273-D97131CBEC55}" type="presOf" srcId="{02B0C508-69F7-104F-B599-3DBB6829D411}" destId="{BF0715F3-1C3A-E643-B606-AE668633774A}" srcOrd="1" destOrd="0" presId="urn:microsoft.com/office/officeart/2005/8/layout/process3"/>
+    <dgm:cxn modelId="{752EDE77-247A-744C-9BE5-79787699BC70}" srcId="{EF021D95-0361-454C-B8BE-369639DA4430}" destId="{648FA668-3E75-F043-9950-3E64D64CAC0C}" srcOrd="0" destOrd="0" parTransId="{90F6F6E1-FBFA-1F47-9863-9549484EB117}" sibTransId="{465455A9-6A6D-0540-8C9F-F7E6AEE30272}"/>
+    <dgm:cxn modelId="{CB2922FA-52B2-6246-B66E-D3E7964E725B}" type="presOf" srcId="{4C5F1EB5-47D0-2D46-AF8E-DBF934C2341E}" destId="{7CBDDB3C-A751-7443-BC39-972CDC0D18A0}" srcOrd="0" destOrd="0" presId="urn:microsoft.com/office/officeart/2005/8/layout/process3"/>
+    <dgm:cxn modelId="{F007D444-CF9F-0B4A-9855-B5BE7BAE17B0}" srcId="{6F6F4650-1F48-5D4B-A965-CA44D623016D}" destId="{22CEF46B-A5C0-1E44-99DF-CE905DD74D0F}" srcOrd="3" destOrd="0" parTransId="{0066949F-EA57-2349-8010-7F01580F5F50}" sibTransId="{13B2FF73-DEB8-A14B-80EC-DF925D7E31D7}"/>
+    <dgm:cxn modelId="{446B7CBA-F3B3-FD44-A84C-54B1CAAE1CBD}" type="presOf" srcId="{32FF97B3-59EB-964F-AA93-CBBAF1FC2251}" destId="{B6743290-0AFC-A841-954B-52461BC8556E}" srcOrd="1" destOrd="0" presId="urn:microsoft.com/office/officeart/2005/8/layout/process3"/>
+    <dgm:cxn modelId="{B954FAC1-690C-8547-8DEE-C6783988CEAB}" srcId="{ADA409BC-52EB-3F45-BB00-E5ED77CCA00E}" destId="{2788E024-3744-7B48-9525-1F8C1DF300B6}" srcOrd="3" destOrd="0" parTransId="{E76DDAB7-CD3D-D54E-BF94-44BA59F05CCD}" sibTransId="{ACC9A833-A80D-0B45-879B-E6BA5600D03A}"/>
+    <dgm:cxn modelId="{DC187558-5D23-D147-9789-C18D113947F1}" type="presOf" srcId="{E34D1488-4492-DE4A-9A94-0196755F47F9}" destId="{EE24CBD2-B6BB-3647-AB34-AE67EB3082B9}" srcOrd="0" destOrd="0" presId="urn:microsoft.com/office/officeart/2005/8/layout/process3"/>
+    <dgm:cxn modelId="{81BE32DF-2392-1C41-8CBD-B58164A5A4B8}" type="presOf" srcId="{22CEF46B-A5C0-1E44-99DF-CE905DD74D0F}" destId="{2A79F767-1CEB-A944-9536-C44CCA90632D}" srcOrd="1" destOrd="0" presId="urn:microsoft.com/office/officeart/2005/8/layout/process3"/>
+    <dgm:cxn modelId="{D18CB0B8-0E33-B548-857E-8D9798018FC7}" type="presOf" srcId="{6F6F4650-1F48-5D4B-A965-CA44D623016D}" destId="{9A95A566-8931-D442-B8E5-9E24536E7283}" srcOrd="0" destOrd="0" presId="urn:microsoft.com/office/officeart/2005/8/layout/process3"/>
+    <dgm:cxn modelId="{536DA3C1-31D4-0B4C-93EE-7D719ACD813D}" srcId="{3A8D9845-661D-5546-95EC-DAE645BC6295}" destId="{B2FE4AAF-5041-AD45-807E-155B30CF1D95}" srcOrd="0" destOrd="0" parTransId="{A2E10DFC-7241-124A-8B8C-4257E412959F}" sibTransId="{8BF56ADC-8C52-914C-A89B-980FB145A8CD}"/>
+    <dgm:cxn modelId="{2426128E-5C72-6545-9D82-4645C8DD49E7}" type="presOf" srcId="{EF021D95-0361-454C-B8BE-369639DA4430}" destId="{0119A2CD-C4EF-C046-9B7A-CCE76A01246B}" srcOrd="1" destOrd="0" presId="urn:microsoft.com/office/officeart/2005/8/layout/process3"/>
+    <dgm:cxn modelId="{73EB1A61-E20F-5247-ABCF-48807FD8CC4C}" srcId="{6F6F4650-1F48-5D4B-A965-CA44D623016D}" destId="{EF021D95-0361-454C-B8BE-369639DA4430}" srcOrd="2" destOrd="0" parTransId="{045FB120-FCD7-5142-8AD6-601EFC20E2D3}" sibTransId="{02B0C508-69F7-104F-B599-3DBB6829D411}"/>
+    <dgm:cxn modelId="{6C938F77-A866-4044-B914-C41C82FAE453}" type="presParOf" srcId="{9A95A566-8931-D442-B8E5-9E24536E7283}" destId="{AC612096-332F-5E49-91B1-784B4B2D036B}" srcOrd="0" destOrd="0" presId="urn:microsoft.com/office/officeart/2005/8/layout/process3"/>
+    <dgm:cxn modelId="{21183086-E28D-4546-96ED-D13FAD186CB2}" type="presParOf" srcId="{AC612096-332F-5E49-91B1-784B4B2D036B}" destId="{C970DBB1-6B56-9642-828C-ED6F8BE1138C}" srcOrd="0" destOrd="0" presId="urn:microsoft.com/office/officeart/2005/8/layout/process3"/>
+    <dgm:cxn modelId="{7697CE17-F0FD-DE41-865E-90A1C1613591}" type="presParOf" srcId="{AC612096-332F-5E49-91B1-784B4B2D036B}" destId="{9516E0EF-CD34-3048-B475-6D32E64F7725}" srcOrd="1" destOrd="0" presId="urn:microsoft.com/office/officeart/2005/8/layout/process3"/>
+    <dgm:cxn modelId="{27995C53-3661-7F42-8D6E-C2671DE22EB1}" type="presParOf" srcId="{AC612096-332F-5E49-91B1-784B4B2D036B}" destId="{EE24CBD2-B6BB-3647-AB34-AE67EB3082B9}" srcOrd="2" destOrd="0" presId="urn:microsoft.com/office/officeart/2005/8/layout/process3"/>
+    <dgm:cxn modelId="{2D884FE8-B642-0B43-AAAD-A798AABBA6FC}" type="presParOf" srcId="{9A95A566-8931-D442-B8E5-9E24536E7283}" destId="{7CBDDB3C-A751-7443-BC39-972CDC0D18A0}" srcOrd="1" destOrd="0" presId="urn:microsoft.com/office/officeart/2005/8/layout/process3"/>
+    <dgm:cxn modelId="{8B0E5650-3A6E-1242-9611-B8D9DD83F0BB}" type="presParOf" srcId="{7CBDDB3C-A751-7443-BC39-972CDC0D18A0}" destId="{BF70A7CC-2346-3144-BFFB-BCC674B1C98E}" srcOrd="0" destOrd="0" presId="urn:microsoft.com/office/officeart/2005/8/layout/process3"/>
+    <dgm:cxn modelId="{842E2A4B-D60B-954B-8595-C7D01162CE45}" type="presParOf" srcId="{9A95A566-8931-D442-B8E5-9E24536E7283}" destId="{85A57CA9-45FF-CC4B-914F-9572B968A9D8}" srcOrd="2" destOrd="0" presId="urn:microsoft.com/office/officeart/2005/8/layout/process3"/>
+    <dgm:cxn modelId="{9BA20620-2678-AF47-BD92-25F77872C4A6}" type="presParOf" srcId="{85A57CA9-45FF-CC4B-914F-9572B968A9D8}" destId="{C3A6B8F6-2399-6E44-A701-9B8D41D02093}" srcOrd="0" destOrd="0" presId="urn:microsoft.com/office/officeart/2005/8/layout/process3"/>
+    <dgm:cxn modelId="{EB7F74C2-59FB-F94E-9FC2-5A998108B3D2}" type="presParOf" srcId="{85A57CA9-45FF-CC4B-914F-9572B968A9D8}" destId="{7D838EBD-BC01-9648-8B26-194A4A736070}" srcOrd="1" destOrd="0" presId="urn:microsoft.com/office/officeart/2005/8/layout/process3"/>
+    <dgm:cxn modelId="{45D7B860-7A49-B446-8C14-160D31371AF5}" type="presParOf" srcId="{85A57CA9-45FF-CC4B-914F-9572B968A9D8}" destId="{E0DF3329-844F-B64F-82F8-1FE1115812BC}" srcOrd="2" destOrd="0" presId="urn:microsoft.com/office/officeart/2005/8/layout/process3"/>
+    <dgm:cxn modelId="{DC6ECBF6-FB8F-5C4A-AC74-2A524B171FBC}" type="presParOf" srcId="{9A95A566-8931-D442-B8E5-9E24536E7283}" destId="{A2421DC8-4C9D-464B-9F73-D38F2A1D0D4E}" srcOrd="3" destOrd="0" presId="urn:microsoft.com/office/officeart/2005/8/layout/process3"/>
+    <dgm:cxn modelId="{F1B971CE-4931-084C-8571-49F14A5BF6B6}" type="presParOf" srcId="{A2421DC8-4C9D-464B-9F73-D38F2A1D0D4E}" destId="{B6743290-0AFC-A841-954B-52461BC8556E}" srcOrd="0" destOrd="0" presId="urn:microsoft.com/office/officeart/2005/8/layout/process3"/>
+    <dgm:cxn modelId="{9240C036-2822-2648-9B1B-F0B7807E224D}" type="presParOf" srcId="{9A95A566-8931-D442-B8E5-9E24536E7283}" destId="{EA62AD6C-7650-F14E-89AC-D5FC6999B592}" srcOrd="4" destOrd="0" presId="urn:microsoft.com/office/officeart/2005/8/layout/process3"/>
+    <dgm:cxn modelId="{5C5A4926-71E7-6C4D-B313-FA956FED9C8D}" type="presParOf" srcId="{EA62AD6C-7650-F14E-89AC-D5FC6999B592}" destId="{E0DE6778-D41C-C949-B200-11F3CEBA2C4B}" srcOrd="0" destOrd="0" presId="urn:microsoft.com/office/officeart/2005/8/layout/process3"/>
+    <dgm:cxn modelId="{246BC845-FF86-2248-9800-6E6B427D7F16}" type="presParOf" srcId="{EA62AD6C-7650-F14E-89AC-D5FC6999B592}" destId="{0119A2CD-C4EF-C046-9B7A-CCE76A01246B}" srcOrd="1" destOrd="0" presId="urn:microsoft.com/office/officeart/2005/8/layout/process3"/>
+    <dgm:cxn modelId="{AE5A34E1-00AC-DF4E-869B-F05942C64322}" type="presParOf" srcId="{EA62AD6C-7650-F14E-89AC-D5FC6999B592}" destId="{8DD49C97-AAF5-0A4E-B462-EFDC89D3AFD3}" srcOrd="2" destOrd="0" presId="urn:microsoft.com/office/officeart/2005/8/layout/process3"/>
+    <dgm:cxn modelId="{B64544C9-6943-D74E-A17F-6AEC92634727}" type="presParOf" srcId="{9A95A566-8931-D442-B8E5-9E24536E7283}" destId="{E2F96D9F-AB08-E640-B977-50BFE3008110}" srcOrd="5" destOrd="0" presId="urn:microsoft.com/office/officeart/2005/8/layout/process3"/>
+    <dgm:cxn modelId="{B9F03899-573A-A94D-9A06-DBCAB4E31CEB}" type="presParOf" srcId="{E2F96D9F-AB08-E640-B977-50BFE3008110}" destId="{BF0715F3-1C3A-E643-B606-AE668633774A}" srcOrd="0" destOrd="0" presId="urn:microsoft.com/office/officeart/2005/8/layout/process3"/>
+    <dgm:cxn modelId="{903080C5-669A-A645-A26B-912CE5C6BE14}" type="presParOf" srcId="{9A95A566-8931-D442-B8E5-9E24536E7283}" destId="{80B5BAB9-00EF-E244-9617-294A44E2911E}" srcOrd="6" destOrd="0" presId="urn:microsoft.com/office/officeart/2005/8/layout/process3"/>
+    <dgm:cxn modelId="{994150F5-37C3-F046-BCC8-B9E17967F071}" type="presParOf" srcId="{80B5BAB9-00EF-E244-9617-294A44E2911E}" destId="{78DEBFB1-DBD0-F54D-B4C6-4D0225D348BE}" srcOrd="0" destOrd="0" presId="urn:microsoft.com/office/officeart/2005/8/layout/process3"/>
+    <dgm:cxn modelId="{A9C5580B-B2CD-4345-8004-5124EF5457D3}" type="presParOf" srcId="{80B5BAB9-00EF-E244-9617-294A44E2911E}" destId="{2A79F767-1CEB-A944-9536-C44CCA90632D}" srcOrd="1" destOrd="0" presId="urn:microsoft.com/office/officeart/2005/8/layout/process3"/>
+    <dgm:cxn modelId="{92A3FBC0-79C4-994E-9962-588D4808A9C1}" type="presParOf" srcId="{80B5BAB9-00EF-E244-9617-294A44E2911E}" destId="{6DB9280B-D514-B548-833D-EBED3FF69866}" srcOrd="2" destOrd="0" presId="urn:microsoft.com/office/officeart/2005/8/layout/process3"/>
+  </dgm:cxnLst>
+  <dgm:bg/>
+  <dgm:whole/>
+  <dgm:extLst>
+    <a:ext uri="http://schemas.microsoft.com/office/drawing/2008/diagram">
+      <dsp:dataModelExt xmlns:dsp="http://schemas.microsoft.com/office/drawing/2008/diagram" relId="rId6" minVer="http://schemas.openxmlformats.org/drawingml/2006/diagram"/>
+    </a:ext>
+  </dgm:extLst>
+</dgm:dataModel>
+</file>
+
+<file path=ppt/diagrams/drawing1.xml><?xml version="1.0" encoding="utf-8"?>
+<dsp:drawing xmlns:dgm="http://schemas.openxmlformats.org/drawingml/2006/diagram" xmlns:dsp="http://schemas.microsoft.com/office/drawing/2008/diagram" xmlns:a="http://schemas.openxmlformats.org/drawingml/2006/main">
+  <dsp:spTree>
+    <dsp:nvGrpSpPr>
+      <dsp:cNvPr id="0" name=""/>
+      <dsp:cNvGrpSpPr/>
+    </dsp:nvGrpSpPr>
+    <dsp:grpSpPr/>
+    <dsp:sp modelId="{9516E0EF-CD34-3048-B475-6D32E64F7725}">
+      <dsp:nvSpPr>
+        <dsp:cNvPr id="0" name=""/>
+        <dsp:cNvSpPr/>
+      </dsp:nvSpPr>
+      <dsp:spPr>
+        <a:xfrm>
+          <a:off x="1093" y="760368"/>
+          <a:ext cx="1374706" cy="820800"/>
+        </a:xfrm>
+        <a:prstGeom prst="roundRect">
+          <a:avLst>
+            <a:gd name="adj" fmla="val 10000"/>
+          </a:avLst>
+        </a:prstGeom>
+        <a:gradFill rotWithShape="0">
+          <a:gsLst>
+            <a:gs pos="0">
+              <a:schemeClr val="accent1">
+                <a:hueOff val="0"/>
+                <a:satOff val="0"/>
+                <a:lumOff val="0"/>
+                <a:alphaOff val="0"/>
+                <a:tint val="96000"/>
+                <a:satMod val="130000"/>
+                <a:lumMod val="114000"/>
+              </a:schemeClr>
+            </a:gs>
+            <a:gs pos="60000">
+              <a:schemeClr val="accent1">
+                <a:hueOff val="0"/>
+                <a:satOff val="0"/>
+                <a:lumOff val="0"/>
+                <a:alphaOff val="0"/>
+                <a:tint val="100000"/>
+                <a:satMod val="106000"/>
+                <a:lumMod val="110000"/>
+              </a:schemeClr>
+            </a:gs>
+            <a:gs pos="100000">
+              <a:schemeClr val="accent1">
+                <a:hueOff val="0"/>
+                <a:satOff val="0"/>
+                <a:lumOff val="0"/>
+                <a:alphaOff val="0"/>
+              </a:schemeClr>
+            </a:gs>
+          </a:gsLst>
+          <a:lin ang="5400000" scaled="0"/>
+        </a:gradFill>
+        <a:ln>
+          <a:noFill/>
+        </a:ln>
+        <a:effectLst>
+          <a:outerShdw blurRad="47625" dist="38100" dir="5400000" sy="98000" rotWithShape="0">
+            <a:srgbClr val="000000">
+              <a:alpha val="48000"/>
+            </a:srgbClr>
+          </a:outerShdw>
+        </a:effectLst>
+        <a:scene3d>
+          <a:camera prst="orthographicFront">
+            <a:rot lat="0" lon="0" rev="0"/>
+          </a:camera>
+          <a:lightRig rig="twoPt" dir="br">
+            <a:rot lat="0" lon="0" rev="8700000"/>
+          </a:lightRig>
+        </a:scene3d>
+        <a:sp3d prstMaterial="matte">
+          <a:bevelT w="25400" h="53975"/>
+        </a:sp3d>
+      </dsp:spPr>
+      <dsp:style>
+        <a:lnRef idx="0">
+          <a:scrgbClr r="0" g="0" b="0"/>
+        </a:lnRef>
+        <a:fillRef idx="3">
+          <a:scrgbClr r="0" g="0" b="0"/>
+        </a:fillRef>
+        <a:effectRef idx="2">
+          <a:scrgbClr r="0" g="0" b="0"/>
+        </a:effectRef>
+        <a:fontRef idx="minor">
+          <a:schemeClr val="lt1"/>
+        </a:fontRef>
+      </dsp:style>
+      <dsp:txBody>
+        <a:bodyPr spcFirstLastPara="0" vert="horz" wrap="square" lIns="135128" tIns="135128" rIns="135128" bIns="72390" numCol="1" spcCol="1270" anchor="t" anchorCtr="0">
+          <a:noAutofit/>
+        </a:bodyPr>
+        <a:lstStyle/>
+        <a:p>
+          <a:pPr lvl="0" algn="l" defTabSz="844550">
+            <a:lnSpc>
+              <a:spcPct val="90000"/>
+            </a:lnSpc>
+            <a:spcBef>
+              <a:spcPct val="0"/>
+            </a:spcBef>
+            <a:spcAft>
+              <a:spcPct val="35000"/>
+            </a:spcAft>
+          </a:pPr>
+          <a:r>
+            <a:rPr lang="en-US" sz="1900" kern="1200" dirty="0" smtClean="0"/>
+            <a:t>Edit</a:t>
+          </a:r>
+          <a:endParaRPr lang="en-US" sz="1900" kern="1200" dirty="0"/>
+        </a:p>
+      </dsp:txBody>
+      <dsp:txXfrm>
+        <a:off x="1093" y="760368"/>
+        <a:ext cx="1374706" cy="547200"/>
+      </dsp:txXfrm>
+    </dsp:sp>
+    <dsp:sp modelId="{EE24CBD2-B6BB-3647-AB34-AE67EB3082B9}">
+      <dsp:nvSpPr>
+        <dsp:cNvPr id="0" name=""/>
+        <dsp:cNvSpPr/>
+      </dsp:nvSpPr>
+      <dsp:spPr>
+        <a:xfrm>
+          <a:off x="282660" y="1307568"/>
+          <a:ext cx="1374706" cy="1470600"/>
+        </a:xfrm>
+        <a:prstGeom prst="roundRect">
+          <a:avLst>
+            <a:gd name="adj" fmla="val 10000"/>
+          </a:avLst>
+        </a:prstGeom>
+        <a:solidFill>
+          <a:schemeClr val="lt1">
+            <a:alpha val="90000"/>
+            <a:hueOff val="0"/>
+            <a:satOff val="0"/>
+            <a:lumOff val="0"/>
+            <a:alphaOff val="0"/>
+          </a:schemeClr>
+        </a:solidFill>
+        <a:ln w="12700" cap="flat" cmpd="sng" algn="ctr">
+          <a:solidFill>
+            <a:schemeClr val="accent1">
+              <a:hueOff val="0"/>
+              <a:satOff val="0"/>
+              <a:lumOff val="0"/>
+              <a:alphaOff val="0"/>
+            </a:schemeClr>
+          </a:solidFill>
+          <a:prstDash val="solid"/>
+        </a:ln>
+        <a:effectLst/>
+      </dsp:spPr>
+      <dsp:style>
+        <a:lnRef idx="1">
+          <a:scrgbClr r="0" g="0" b="0"/>
+        </a:lnRef>
+        <a:fillRef idx="1">
+          <a:scrgbClr r="0" g="0" b="0"/>
+        </a:fillRef>
+        <a:effectRef idx="0">
+          <a:scrgbClr r="0" g="0" b="0"/>
+        </a:effectRef>
+        <a:fontRef idx="minor"/>
+      </dsp:style>
+      <dsp:txBody>
+        <a:bodyPr spcFirstLastPara="0" vert="horz" wrap="square" lIns="135128" tIns="135128" rIns="135128" bIns="135128" numCol="1" spcCol="1270" anchor="t" anchorCtr="0">
+          <a:noAutofit/>
+        </a:bodyPr>
+        <a:lstStyle/>
+        <a:p>
+          <a:pPr marL="171450" lvl="1" indent="-171450" algn="l" defTabSz="844550">
+            <a:lnSpc>
+              <a:spcPct val="90000"/>
+            </a:lnSpc>
+            <a:spcBef>
+              <a:spcPct val="0"/>
+            </a:spcBef>
+            <a:spcAft>
+              <a:spcPct val="15000"/>
+            </a:spcAft>
+            <a:buChar char="•"/>
+          </a:pPr>
+          <a:r>
+            <a:rPr lang="en-US" sz="1900" kern="1200" dirty="0" smtClean="0"/>
+            <a:t>eclipse</a:t>
+          </a:r>
+          <a:endParaRPr lang="en-US" sz="1900" kern="1200" dirty="0"/>
+        </a:p>
+        <a:p>
+          <a:pPr marL="171450" lvl="1" indent="-171450" algn="l" defTabSz="844550">
+            <a:lnSpc>
+              <a:spcPct val="90000"/>
+            </a:lnSpc>
+            <a:spcBef>
+              <a:spcPct val="0"/>
+            </a:spcBef>
+            <a:spcAft>
+              <a:spcPct val="15000"/>
+            </a:spcAft>
+            <a:buChar char="•"/>
+          </a:pPr>
+          <a:r>
+            <a:rPr lang="en-US" sz="1900" kern="1200" dirty="0" err="1" smtClean="0"/>
+            <a:t>kwrite</a:t>
+          </a:r>
+          <a:endParaRPr lang="en-US" sz="1900" kern="1200" dirty="0"/>
+        </a:p>
+        <a:p>
+          <a:pPr marL="171450" lvl="1" indent="-171450" algn="l" defTabSz="844550">
+            <a:lnSpc>
+              <a:spcPct val="90000"/>
+            </a:lnSpc>
+            <a:spcBef>
+              <a:spcPct val="0"/>
+            </a:spcBef>
+            <a:spcAft>
+              <a:spcPct val="15000"/>
+            </a:spcAft>
+            <a:buChar char="•"/>
+          </a:pPr>
+          <a:r>
+            <a:rPr lang="en-US" sz="1900" kern="1200" dirty="0" smtClean="0"/>
+            <a:t>vim</a:t>
+          </a:r>
+          <a:endParaRPr lang="en-US" sz="1900" kern="1200" dirty="0"/>
+        </a:p>
+        <a:p>
+          <a:pPr marL="171450" lvl="1" indent="-171450" algn="l" defTabSz="844550">
+            <a:lnSpc>
+              <a:spcPct val="90000"/>
+            </a:lnSpc>
+            <a:spcBef>
+              <a:spcPct val="0"/>
+            </a:spcBef>
+            <a:spcAft>
+              <a:spcPct val="15000"/>
+            </a:spcAft>
+            <a:buChar char="•"/>
+          </a:pPr>
+          <a:r>
+            <a:rPr lang="en-US" sz="1900" kern="1200" dirty="0" err="1" smtClean="0"/>
+            <a:t>emacs</a:t>
+          </a:r>
+          <a:endParaRPr lang="en-US" sz="1900" kern="1200" dirty="0"/>
+        </a:p>
+      </dsp:txBody>
+      <dsp:txXfrm>
+        <a:off x="322924" y="1347832"/>
+        <a:ext cx="1294178" cy="1390072"/>
+      </dsp:txXfrm>
+    </dsp:sp>
+    <dsp:sp modelId="{7CBDDB3C-A751-7443-BC39-972CDC0D18A0}">
+      <dsp:nvSpPr>
+        <dsp:cNvPr id="0" name=""/>
+        <dsp:cNvSpPr/>
+      </dsp:nvSpPr>
+      <dsp:spPr>
+        <a:xfrm>
+          <a:off x="1584201" y="862837"/>
+          <a:ext cx="441809" cy="342262"/>
+        </a:xfrm>
+        <a:prstGeom prst="rightArrow">
+          <a:avLst>
+            <a:gd name="adj1" fmla="val 60000"/>
+            <a:gd name="adj2" fmla="val 50000"/>
+          </a:avLst>
+        </a:prstGeom>
+        <a:gradFill rotWithShape="0">
+          <a:gsLst>
+            <a:gs pos="0">
+              <a:schemeClr val="accent1">
+                <a:tint val="60000"/>
+                <a:hueOff val="0"/>
+                <a:satOff val="0"/>
+                <a:lumOff val="0"/>
+                <a:alphaOff val="0"/>
+                <a:tint val="96000"/>
+                <a:satMod val="130000"/>
+                <a:lumMod val="114000"/>
+              </a:schemeClr>
+            </a:gs>
+            <a:gs pos="60000">
+              <a:schemeClr val="accent1">
+                <a:tint val="60000"/>
+                <a:hueOff val="0"/>
+                <a:satOff val="0"/>
+                <a:lumOff val="0"/>
+                <a:alphaOff val="0"/>
+                <a:tint val="100000"/>
+                <a:satMod val="106000"/>
+                <a:lumMod val="110000"/>
+              </a:schemeClr>
+            </a:gs>
+            <a:gs pos="100000">
+              <a:schemeClr val="accent1">
+                <a:tint val="60000"/>
+                <a:hueOff val="0"/>
+                <a:satOff val="0"/>
+                <a:lumOff val="0"/>
+                <a:alphaOff val="0"/>
+              </a:schemeClr>
+            </a:gs>
+          </a:gsLst>
+          <a:lin ang="5400000" scaled="0"/>
+        </a:gradFill>
+        <a:ln>
+          <a:noFill/>
+        </a:ln>
+        <a:effectLst>
+          <a:outerShdw blurRad="47625" dist="38100" dir="5400000" sy="98000" rotWithShape="0">
+            <a:srgbClr val="000000">
+              <a:alpha val="48000"/>
+            </a:srgbClr>
+          </a:outerShdw>
+        </a:effectLst>
+        <a:scene3d>
+          <a:camera prst="orthographicFront">
+            <a:rot lat="0" lon="0" rev="0"/>
+          </a:camera>
+          <a:lightRig rig="twoPt" dir="br">
+            <a:rot lat="0" lon="0" rev="8700000"/>
+          </a:lightRig>
+        </a:scene3d>
+        <a:sp3d prstMaterial="matte">
+          <a:bevelT w="25400" h="53975"/>
+        </a:sp3d>
+      </dsp:spPr>
+      <dsp:style>
+        <a:lnRef idx="0">
+          <a:scrgbClr r="0" g="0" b="0"/>
+        </a:lnRef>
+        <a:fillRef idx="3">
+          <a:scrgbClr r="0" g="0" b="0"/>
+        </a:fillRef>
+        <a:effectRef idx="2">
+          <a:scrgbClr r="0" g="0" b="0"/>
+        </a:effectRef>
+        <a:fontRef idx="minor">
+          <a:schemeClr val="lt1"/>
+        </a:fontRef>
+      </dsp:style>
+      <dsp:txBody>
+        <a:bodyPr spcFirstLastPara="0" vert="horz" wrap="square" lIns="0" tIns="0" rIns="0" bIns="0" numCol="1" spcCol="1270" anchor="ctr" anchorCtr="0">
+          <a:noAutofit/>
+        </a:bodyPr>
+        <a:lstStyle/>
+        <a:p>
+          <a:pPr lvl="0" algn="ctr" defTabSz="533400">
+            <a:lnSpc>
+              <a:spcPct val="90000"/>
+            </a:lnSpc>
+            <a:spcBef>
+              <a:spcPct val="0"/>
+            </a:spcBef>
+            <a:spcAft>
+              <a:spcPct val="35000"/>
+            </a:spcAft>
+          </a:pPr>
+          <a:r>
+            <a:rPr lang="en-US" sz="1200" kern="1200" dirty="0" smtClean="0"/>
+            <a:t>*.c</a:t>
+          </a:r>
+          <a:endParaRPr lang="en-US" sz="1200" kern="1200" dirty="0"/>
+        </a:p>
+      </dsp:txBody>
+      <dsp:txXfrm>
+        <a:off x="1584201" y="931289"/>
+        <a:ext cx="339130" cy="205358"/>
+      </dsp:txXfrm>
+    </dsp:sp>
+    <dsp:sp modelId="{7D838EBD-BC01-9648-8B26-194A4A736070}">
+      <dsp:nvSpPr>
+        <dsp:cNvPr id="0" name=""/>
+        <dsp:cNvSpPr/>
+      </dsp:nvSpPr>
+      <dsp:spPr>
+        <a:xfrm>
+          <a:off x="2209402" y="760368"/>
+          <a:ext cx="1374706" cy="820800"/>
+        </a:xfrm>
+        <a:prstGeom prst="roundRect">
+          <a:avLst>
+            <a:gd name="adj" fmla="val 10000"/>
+          </a:avLst>
+        </a:prstGeom>
+        <a:gradFill rotWithShape="0">
+          <a:gsLst>
+            <a:gs pos="0">
+              <a:schemeClr val="accent1">
+                <a:hueOff val="0"/>
+                <a:satOff val="0"/>
+                <a:lumOff val="0"/>
+                <a:alphaOff val="0"/>
+                <a:tint val="96000"/>
+                <a:satMod val="130000"/>
+                <a:lumMod val="114000"/>
+              </a:schemeClr>
+            </a:gs>
+            <a:gs pos="60000">
+              <a:schemeClr val="accent1">
+                <a:hueOff val="0"/>
+                <a:satOff val="0"/>
+                <a:lumOff val="0"/>
+                <a:alphaOff val="0"/>
+                <a:tint val="100000"/>
+                <a:satMod val="106000"/>
+                <a:lumMod val="110000"/>
+              </a:schemeClr>
+            </a:gs>
+            <a:gs pos="100000">
+              <a:schemeClr val="accent1">
+                <a:hueOff val="0"/>
+                <a:satOff val="0"/>
+                <a:lumOff val="0"/>
+                <a:alphaOff val="0"/>
+              </a:schemeClr>
+            </a:gs>
+          </a:gsLst>
+          <a:lin ang="5400000" scaled="0"/>
+        </a:gradFill>
+        <a:ln>
+          <a:noFill/>
+        </a:ln>
+        <a:effectLst>
+          <a:outerShdw blurRad="47625" dist="38100" dir="5400000" sy="98000" rotWithShape="0">
+            <a:srgbClr val="000000">
+              <a:alpha val="48000"/>
+            </a:srgbClr>
+          </a:outerShdw>
+        </a:effectLst>
+        <a:scene3d>
+          <a:camera prst="orthographicFront">
+            <a:rot lat="0" lon="0" rev="0"/>
+          </a:camera>
+          <a:lightRig rig="twoPt" dir="br">
+            <a:rot lat="0" lon="0" rev="8700000"/>
+          </a:lightRig>
+        </a:scene3d>
+        <a:sp3d prstMaterial="matte">
+          <a:bevelT w="25400" h="53975"/>
+        </a:sp3d>
+      </dsp:spPr>
+      <dsp:style>
+        <a:lnRef idx="0">
+          <a:scrgbClr r="0" g="0" b="0"/>
+        </a:lnRef>
+        <a:fillRef idx="3">
+          <a:scrgbClr r="0" g="0" b="0"/>
+        </a:fillRef>
+        <a:effectRef idx="2">
+          <a:scrgbClr r="0" g="0" b="0"/>
+        </a:effectRef>
+        <a:fontRef idx="minor">
+          <a:schemeClr val="lt1"/>
+        </a:fontRef>
+      </dsp:style>
+      <dsp:txBody>
+        <a:bodyPr spcFirstLastPara="0" vert="horz" wrap="square" lIns="135128" tIns="135128" rIns="135128" bIns="72390" numCol="1" spcCol="1270" anchor="t" anchorCtr="0">
+          <a:noAutofit/>
+        </a:bodyPr>
+        <a:lstStyle/>
+        <a:p>
+          <a:pPr lvl="0" algn="l" defTabSz="844550">
+            <a:lnSpc>
+              <a:spcPct val="90000"/>
+            </a:lnSpc>
+            <a:spcBef>
+              <a:spcPct val="0"/>
+            </a:spcBef>
+            <a:spcAft>
+              <a:spcPct val="35000"/>
+            </a:spcAft>
+          </a:pPr>
+          <a:r>
+            <a:rPr lang="en-US" sz="1900" kern="1200" dirty="0" smtClean="0"/>
+            <a:t>Compile</a:t>
+          </a:r>
+          <a:endParaRPr lang="en-US" sz="1900" kern="1200" dirty="0"/>
+        </a:p>
+      </dsp:txBody>
+      <dsp:txXfrm>
+        <a:off x="2209402" y="760368"/>
+        <a:ext cx="1374706" cy="547200"/>
+      </dsp:txXfrm>
+    </dsp:sp>
+    <dsp:sp modelId="{E0DF3329-844F-B64F-82F8-1FE1115812BC}">
+      <dsp:nvSpPr>
+        <dsp:cNvPr id="0" name=""/>
+        <dsp:cNvSpPr/>
+      </dsp:nvSpPr>
+      <dsp:spPr>
+        <a:xfrm>
+          <a:off x="2490969" y="1307568"/>
+          <a:ext cx="1374706" cy="1470600"/>
+        </a:xfrm>
+        <a:prstGeom prst="roundRect">
+          <a:avLst>
+            <a:gd name="adj" fmla="val 10000"/>
+          </a:avLst>
+        </a:prstGeom>
+        <a:solidFill>
+          <a:schemeClr val="lt1">
+            <a:alpha val="90000"/>
+            <a:hueOff val="0"/>
+            <a:satOff val="0"/>
+            <a:lumOff val="0"/>
+            <a:alphaOff val="0"/>
+          </a:schemeClr>
+        </a:solidFill>
+        <a:ln w="12700" cap="flat" cmpd="sng" algn="ctr">
+          <a:solidFill>
+            <a:schemeClr val="accent1">
+              <a:hueOff val="0"/>
+              <a:satOff val="0"/>
+              <a:lumOff val="0"/>
+              <a:alphaOff val="0"/>
+            </a:schemeClr>
+          </a:solidFill>
+          <a:prstDash val="solid"/>
+        </a:ln>
+        <a:effectLst/>
+      </dsp:spPr>
+      <dsp:style>
+        <a:lnRef idx="1">
+          <a:scrgbClr r="0" g="0" b="0"/>
+        </a:lnRef>
+        <a:fillRef idx="1">
+          <a:scrgbClr r="0" g="0" b="0"/>
+        </a:fillRef>
+        <a:effectRef idx="0">
+          <a:scrgbClr r="0" g="0" b="0"/>
+        </a:effectRef>
+        <a:fontRef idx="minor"/>
+      </dsp:style>
+      <dsp:txBody>
+        <a:bodyPr spcFirstLastPara="0" vert="horz" wrap="square" lIns="135128" tIns="135128" rIns="135128" bIns="135128" numCol="1" spcCol="1270" anchor="t" anchorCtr="0">
+          <a:noAutofit/>
+        </a:bodyPr>
+        <a:lstStyle/>
+        <a:p>
+          <a:pPr marL="171450" lvl="1" indent="-171450" algn="l" defTabSz="844550">
+            <a:lnSpc>
+              <a:spcPct val="90000"/>
+            </a:lnSpc>
+            <a:spcBef>
+              <a:spcPct val="0"/>
+            </a:spcBef>
+            <a:spcAft>
+              <a:spcPct val="15000"/>
+            </a:spcAft>
+            <a:buChar char="•"/>
+          </a:pPr>
+          <a:r>
+            <a:rPr lang="en-US" sz="1900" kern="1200" dirty="0" err="1" smtClean="0"/>
+            <a:t>gcc</a:t>
+          </a:r>
+          <a:endParaRPr lang="en-US" sz="1900" kern="1200" dirty="0"/>
+        </a:p>
+      </dsp:txBody>
+      <dsp:txXfrm>
+        <a:off x="2531233" y="1347832"/>
+        <a:ext cx="1294178" cy="1390072"/>
+      </dsp:txXfrm>
+    </dsp:sp>
+    <dsp:sp modelId="{A2421DC8-4C9D-464B-9F73-D38F2A1D0D4E}">
+      <dsp:nvSpPr>
+        <dsp:cNvPr id="0" name=""/>
+        <dsp:cNvSpPr/>
+      </dsp:nvSpPr>
+      <dsp:spPr>
+        <a:xfrm>
+          <a:off x="3792510" y="862837"/>
+          <a:ext cx="441809" cy="342262"/>
+        </a:xfrm>
+        <a:prstGeom prst="rightArrow">
+          <a:avLst>
+            <a:gd name="adj1" fmla="val 60000"/>
+            <a:gd name="adj2" fmla="val 50000"/>
+          </a:avLst>
+        </a:prstGeom>
+        <a:gradFill rotWithShape="0">
+          <a:gsLst>
+            <a:gs pos="0">
+              <a:schemeClr val="accent1">
+                <a:tint val="60000"/>
+                <a:hueOff val="0"/>
+                <a:satOff val="0"/>
+                <a:lumOff val="0"/>
+                <a:alphaOff val="0"/>
+                <a:tint val="96000"/>
+                <a:satMod val="130000"/>
+                <a:lumMod val="114000"/>
+              </a:schemeClr>
+            </a:gs>
+            <a:gs pos="60000">
+              <a:schemeClr val="accent1">
+                <a:tint val="60000"/>
+                <a:hueOff val="0"/>
+                <a:satOff val="0"/>
+                <a:lumOff val="0"/>
+                <a:alphaOff val="0"/>
+                <a:tint val="100000"/>
+                <a:satMod val="106000"/>
+                <a:lumMod val="110000"/>
+              </a:schemeClr>
+            </a:gs>
+            <a:gs pos="100000">
+              <a:schemeClr val="accent1">
+                <a:tint val="60000"/>
+                <a:hueOff val="0"/>
+                <a:satOff val="0"/>
+                <a:lumOff val="0"/>
+                <a:alphaOff val="0"/>
+              </a:schemeClr>
+            </a:gs>
+          </a:gsLst>
+          <a:lin ang="5400000" scaled="0"/>
+        </a:gradFill>
+        <a:ln>
+          <a:noFill/>
+        </a:ln>
+        <a:effectLst>
+          <a:outerShdw blurRad="47625" dist="38100" dir="5400000" sy="98000" rotWithShape="0">
+            <a:srgbClr val="000000">
+              <a:alpha val="48000"/>
+            </a:srgbClr>
+          </a:outerShdw>
+        </a:effectLst>
+        <a:scene3d>
+          <a:camera prst="orthographicFront">
+            <a:rot lat="0" lon="0" rev="0"/>
+          </a:camera>
+          <a:lightRig rig="twoPt" dir="br">
+            <a:rot lat="0" lon="0" rev="8700000"/>
+          </a:lightRig>
+        </a:scene3d>
+        <a:sp3d prstMaterial="matte">
+          <a:bevelT w="25400" h="53975"/>
+        </a:sp3d>
+      </dsp:spPr>
+      <dsp:style>
+        <a:lnRef idx="0">
+          <a:scrgbClr r="0" g="0" b="0"/>
+        </a:lnRef>
+        <a:fillRef idx="3">
+          <a:scrgbClr r="0" g="0" b="0"/>
+        </a:fillRef>
+        <a:effectRef idx="2">
+          <a:scrgbClr r="0" g="0" b="0"/>
+        </a:effectRef>
+        <a:fontRef idx="minor">
+          <a:schemeClr val="lt1"/>
+        </a:fontRef>
+      </dsp:style>
+      <dsp:txBody>
+        <a:bodyPr spcFirstLastPara="0" vert="horz" wrap="square" lIns="0" tIns="0" rIns="0" bIns="0" numCol="1" spcCol="1270" anchor="ctr" anchorCtr="0">
+          <a:noAutofit/>
+        </a:bodyPr>
+        <a:lstStyle/>
+        <a:p>
+          <a:pPr lvl="0" algn="ctr" defTabSz="533400">
+            <a:lnSpc>
+              <a:spcPct val="90000"/>
+            </a:lnSpc>
+            <a:spcBef>
+              <a:spcPct val="0"/>
+            </a:spcBef>
+            <a:spcAft>
+              <a:spcPct val="35000"/>
+            </a:spcAft>
+          </a:pPr>
+          <a:r>
+            <a:rPr lang="en-US" sz="1200" kern="1200" dirty="0" smtClean="0"/>
+            <a:t>*.o</a:t>
+          </a:r>
+          <a:endParaRPr lang="en-US" sz="1200" kern="1200" dirty="0"/>
+        </a:p>
+      </dsp:txBody>
+      <dsp:txXfrm>
+        <a:off x="3792510" y="931289"/>
+        <a:ext cx="339130" cy="205358"/>
+      </dsp:txXfrm>
+    </dsp:sp>
+    <dsp:sp modelId="{0119A2CD-C4EF-C046-9B7A-CCE76A01246B}">
+      <dsp:nvSpPr>
+        <dsp:cNvPr id="0" name=""/>
+        <dsp:cNvSpPr/>
+      </dsp:nvSpPr>
+      <dsp:spPr>
+        <a:xfrm>
+          <a:off x="4417711" y="760368"/>
+          <a:ext cx="1374706" cy="820800"/>
+        </a:xfrm>
+        <a:prstGeom prst="roundRect">
+          <a:avLst>
+            <a:gd name="adj" fmla="val 10000"/>
+          </a:avLst>
+        </a:prstGeom>
+        <a:gradFill rotWithShape="0">
+          <a:gsLst>
+            <a:gs pos="0">
+              <a:schemeClr val="accent1">
+                <a:hueOff val="0"/>
+                <a:satOff val="0"/>
+                <a:lumOff val="0"/>
+                <a:alphaOff val="0"/>
+                <a:tint val="96000"/>
+                <a:satMod val="130000"/>
+                <a:lumMod val="114000"/>
+              </a:schemeClr>
+            </a:gs>
+            <a:gs pos="60000">
+              <a:schemeClr val="accent1">
+                <a:hueOff val="0"/>
+                <a:satOff val="0"/>
+                <a:lumOff val="0"/>
+                <a:alphaOff val="0"/>
+                <a:tint val="100000"/>
+                <a:satMod val="106000"/>
+                <a:lumMod val="110000"/>
+              </a:schemeClr>
+            </a:gs>
+            <a:gs pos="100000">
+              <a:schemeClr val="accent1">
+                <a:hueOff val="0"/>
+                <a:satOff val="0"/>
+                <a:lumOff val="0"/>
+                <a:alphaOff val="0"/>
+              </a:schemeClr>
+            </a:gs>
+          </a:gsLst>
+          <a:lin ang="5400000" scaled="0"/>
+        </a:gradFill>
+        <a:ln>
+          <a:noFill/>
+        </a:ln>
+        <a:effectLst>
+          <a:outerShdw blurRad="47625" dist="38100" dir="5400000" sy="98000" rotWithShape="0">
+            <a:srgbClr val="000000">
+              <a:alpha val="48000"/>
+            </a:srgbClr>
+          </a:outerShdw>
+        </a:effectLst>
+        <a:scene3d>
+          <a:camera prst="orthographicFront">
+            <a:rot lat="0" lon="0" rev="0"/>
+          </a:camera>
+          <a:lightRig rig="twoPt" dir="br">
+            <a:rot lat="0" lon="0" rev="8700000"/>
+          </a:lightRig>
+        </a:scene3d>
+        <a:sp3d prstMaterial="matte">
+          <a:bevelT w="25400" h="53975"/>
+        </a:sp3d>
+      </dsp:spPr>
+      <dsp:style>
+        <a:lnRef idx="0">
+          <a:scrgbClr r="0" g="0" b="0"/>
+        </a:lnRef>
+        <a:fillRef idx="3">
+          <a:scrgbClr r="0" g="0" b="0"/>
+        </a:fillRef>
+        <a:effectRef idx="2">
+          <a:scrgbClr r="0" g="0" b="0"/>
+        </a:effectRef>
+        <a:fontRef idx="minor">
+          <a:schemeClr val="lt1"/>
+        </a:fontRef>
+      </dsp:style>
+      <dsp:txBody>
+        <a:bodyPr spcFirstLastPara="0" vert="horz" wrap="square" lIns="135128" tIns="135128" rIns="135128" bIns="72390" numCol="1" spcCol="1270" anchor="t" anchorCtr="0">
+          <a:noAutofit/>
+        </a:bodyPr>
+        <a:lstStyle/>
+        <a:p>
+          <a:pPr lvl="0" algn="l" defTabSz="844550">
+            <a:lnSpc>
+              <a:spcPct val="90000"/>
+            </a:lnSpc>
+            <a:spcBef>
+              <a:spcPct val="0"/>
+            </a:spcBef>
+            <a:spcAft>
+              <a:spcPct val="35000"/>
+            </a:spcAft>
+          </a:pPr>
+          <a:r>
+            <a:rPr lang="en-US" sz="1900" kern="1200" dirty="0" smtClean="0"/>
+            <a:t>Link</a:t>
+          </a:r>
+          <a:endParaRPr lang="en-US" sz="1900" kern="1200" dirty="0"/>
+        </a:p>
+      </dsp:txBody>
+      <dsp:txXfrm>
+        <a:off x="4417711" y="760368"/>
+        <a:ext cx="1374706" cy="547200"/>
+      </dsp:txXfrm>
+    </dsp:sp>
+    <dsp:sp modelId="{8DD49C97-AAF5-0A4E-B462-EFDC89D3AFD3}">
+      <dsp:nvSpPr>
+        <dsp:cNvPr id="0" name=""/>
+        <dsp:cNvSpPr/>
+      </dsp:nvSpPr>
+      <dsp:spPr>
+        <a:xfrm>
+          <a:off x="4699278" y="1307568"/>
+          <a:ext cx="1374706" cy="1470600"/>
+        </a:xfrm>
+        <a:prstGeom prst="roundRect">
+          <a:avLst>
+            <a:gd name="adj" fmla="val 10000"/>
+          </a:avLst>
+        </a:prstGeom>
+        <a:solidFill>
+          <a:schemeClr val="lt1">
+            <a:alpha val="90000"/>
+            <a:hueOff val="0"/>
+            <a:satOff val="0"/>
+            <a:lumOff val="0"/>
+            <a:alphaOff val="0"/>
+          </a:schemeClr>
+        </a:solidFill>
+        <a:ln w="12700" cap="flat" cmpd="sng" algn="ctr">
+          <a:solidFill>
+            <a:schemeClr val="accent1">
+              <a:hueOff val="0"/>
+              <a:satOff val="0"/>
+              <a:lumOff val="0"/>
+              <a:alphaOff val="0"/>
+            </a:schemeClr>
+          </a:solidFill>
+          <a:prstDash val="solid"/>
+        </a:ln>
+        <a:effectLst/>
+      </dsp:spPr>
+      <dsp:style>
+        <a:lnRef idx="1">
+          <a:scrgbClr r="0" g="0" b="0"/>
+        </a:lnRef>
+        <a:fillRef idx="1">
+          <a:scrgbClr r="0" g="0" b="0"/>
+        </a:fillRef>
+        <a:effectRef idx="0">
+          <a:scrgbClr r="0" g="0" b="0"/>
+        </a:effectRef>
+        <a:fontRef idx="minor"/>
+      </dsp:style>
+      <dsp:txBody>
+        <a:bodyPr spcFirstLastPara="0" vert="horz" wrap="square" lIns="135128" tIns="135128" rIns="135128" bIns="135128" numCol="1" spcCol="1270" anchor="t" anchorCtr="0">
+          <a:noAutofit/>
+        </a:bodyPr>
+        <a:lstStyle/>
+        <a:p>
+          <a:pPr marL="171450" lvl="1" indent="-171450" algn="l" defTabSz="844550">
+            <a:lnSpc>
+              <a:spcPct val="90000"/>
+            </a:lnSpc>
+            <a:spcBef>
+              <a:spcPct val="0"/>
+            </a:spcBef>
+            <a:spcAft>
+              <a:spcPct val="15000"/>
+            </a:spcAft>
+            <a:buChar char="•"/>
+          </a:pPr>
+          <a:r>
+            <a:rPr lang="en-US" sz="1900" kern="1200" dirty="0" err="1" smtClean="0"/>
+            <a:t>gcc</a:t>
+          </a:r>
+          <a:endParaRPr lang="en-US" sz="1900" kern="1200" dirty="0"/>
+        </a:p>
+      </dsp:txBody>
+      <dsp:txXfrm>
+        <a:off x="4739542" y="1347832"/>
+        <a:ext cx="1294178" cy="1390072"/>
+      </dsp:txXfrm>
+    </dsp:sp>
+    <dsp:sp modelId="{E2F96D9F-AB08-E640-B977-50BFE3008110}">
+      <dsp:nvSpPr>
+        <dsp:cNvPr id="0" name=""/>
+        <dsp:cNvSpPr/>
+      </dsp:nvSpPr>
+      <dsp:spPr>
+        <a:xfrm>
+          <a:off x="6000819" y="862837"/>
+          <a:ext cx="441809" cy="342262"/>
+        </a:xfrm>
+        <a:prstGeom prst="rightArrow">
+          <a:avLst>
+            <a:gd name="adj1" fmla="val 60000"/>
+            <a:gd name="adj2" fmla="val 50000"/>
+          </a:avLst>
+        </a:prstGeom>
+        <a:gradFill rotWithShape="0">
+          <a:gsLst>
+            <a:gs pos="0">
+              <a:schemeClr val="accent1">
+                <a:tint val="60000"/>
+                <a:hueOff val="0"/>
+                <a:satOff val="0"/>
+                <a:lumOff val="0"/>
+                <a:alphaOff val="0"/>
+                <a:tint val="96000"/>
+                <a:satMod val="130000"/>
+                <a:lumMod val="114000"/>
+              </a:schemeClr>
+            </a:gs>
+            <a:gs pos="60000">
+              <a:schemeClr val="accent1">
+                <a:tint val="60000"/>
+                <a:hueOff val="0"/>
+                <a:satOff val="0"/>
+                <a:lumOff val="0"/>
+                <a:alphaOff val="0"/>
+                <a:tint val="100000"/>
+                <a:satMod val="106000"/>
+                <a:lumMod val="110000"/>
+              </a:schemeClr>
+            </a:gs>
+            <a:gs pos="100000">
+              <a:schemeClr val="accent1">
+                <a:tint val="60000"/>
+                <a:hueOff val="0"/>
+                <a:satOff val="0"/>
+                <a:lumOff val="0"/>
+                <a:alphaOff val="0"/>
+              </a:schemeClr>
+            </a:gs>
+          </a:gsLst>
+          <a:lin ang="5400000" scaled="0"/>
+        </a:gradFill>
+        <a:ln>
+          <a:noFill/>
+        </a:ln>
+        <a:effectLst>
+          <a:outerShdw blurRad="47625" dist="38100" dir="5400000" sy="98000" rotWithShape="0">
+            <a:srgbClr val="000000">
+              <a:alpha val="48000"/>
+            </a:srgbClr>
+          </a:outerShdw>
+        </a:effectLst>
+        <a:scene3d>
+          <a:camera prst="orthographicFront">
+            <a:rot lat="0" lon="0" rev="0"/>
+          </a:camera>
+          <a:lightRig rig="twoPt" dir="br">
+            <a:rot lat="0" lon="0" rev="8700000"/>
+          </a:lightRig>
+        </a:scene3d>
+        <a:sp3d prstMaterial="matte">
+          <a:bevelT w="25400" h="53975"/>
+        </a:sp3d>
+      </dsp:spPr>
+      <dsp:style>
+        <a:lnRef idx="0">
+          <a:scrgbClr r="0" g="0" b="0"/>
+        </a:lnRef>
+        <a:fillRef idx="3">
+          <a:scrgbClr r="0" g="0" b="0"/>
+        </a:fillRef>
+        <a:effectRef idx="2">
+          <a:scrgbClr r="0" g="0" b="0"/>
+        </a:effectRef>
+        <a:fontRef idx="minor">
+          <a:schemeClr val="lt1"/>
+        </a:fontRef>
+      </dsp:style>
+      <dsp:txBody>
+        <a:bodyPr spcFirstLastPara="0" vert="horz" wrap="square" lIns="0" tIns="0" rIns="0" bIns="0" numCol="1" spcCol="1270" anchor="ctr" anchorCtr="0">
+          <a:noAutofit/>
+        </a:bodyPr>
+        <a:lstStyle/>
+        <a:p>
+          <a:pPr lvl="0" algn="ctr" defTabSz="533400">
+            <a:lnSpc>
+              <a:spcPct val="90000"/>
+            </a:lnSpc>
+            <a:spcBef>
+              <a:spcPct val="0"/>
+            </a:spcBef>
+            <a:spcAft>
+              <a:spcPct val="35000"/>
+            </a:spcAft>
+          </a:pPr>
+          <a:r>
+            <a:rPr lang="en-US" sz="1200" kern="1200" dirty="0" err="1" smtClean="0"/>
+            <a:t>a.out</a:t>
+          </a:r>
+          <a:endParaRPr lang="en-US" sz="1200" kern="1200" dirty="0"/>
+        </a:p>
+      </dsp:txBody>
+      <dsp:txXfrm>
+        <a:off x="6000819" y="931289"/>
+        <a:ext cx="339130" cy="205358"/>
+      </dsp:txXfrm>
+    </dsp:sp>
+    <dsp:sp modelId="{2A79F767-1CEB-A944-9536-C44CCA90632D}">
+      <dsp:nvSpPr>
+        <dsp:cNvPr id="0" name=""/>
+        <dsp:cNvSpPr/>
+      </dsp:nvSpPr>
+      <dsp:spPr>
+        <a:xfrm>
+          <a:off x="6626020" y="760368"/>
+          <a:ext cx="1374706" cy="820800"/>
+        </a:xfrm>
+        <a:prstGeom prst="roundRect">
+          <a:avLst>
+            <a:gd name="adj" fmla="val 10000"/>
+          </a:avLst>
+        </a:prstGeom>
+        <a:gradFill rotWithShape="0">
+          <a:gsLst>
+            <a:gs pos="0">
+              <a:schemeClr val="accent1">
+                <a:hueOff val="0"/>
+                <a:satOff val="0"/>
+                <a:lumOff val="0"/>
+                <a:alphaOff val="0"/>
+                <a:tint val="96000"/>
+                <a:satMod val="130000"/>
+                <a:lumMod val="114000"/>
+              </a:schemeClr>
+            </a:gs>
+            <a:gs pos="60000">
+              <a:schemeClr val="accent1">
+                <a:hueOff val="0"/>
+                <a:satOff val="0"/>
+                <a:lumOff val="0"/>
+                <a:alphaOff val="0"/>
+                <a:tint val="100000"/>
+                <a:satMod val="106000"/>
+                <a:lumMod val="110000"/>
+              </a:schemeClr>
+            </a:gs>
+            <a:gs pos="100000">
+              <a:schemeClr val="accent1">
+                <a:hueOff val="0"/>
+                <a:satOff val="0"/>
+                <a:lumOff val="0"/>
+                <a:alphaOff val="0"/>
+              </a:schemeClr>
+            </a:gs>
+          </a:gsLst>
+          <a:lin ang="5400000" scaled="0"/>
+        </a:gradFill>
+        <a:ln>
+          <a:noFill/>
+        </a:ln>
+        <a:effectLst>
+          <a:outerShdw blurRad="47625" dist="38100" dir="5400000" sy="98000" rotWithShape="0">
+            <a:srgbClr val="000000">
+              <a:alpha val="48000"/>
+            </a:srgbClr>
+          </a:outerShdw>
+        </a:effectLst>
+        <a:scene3d>
+          <a:camera prst="orthographicFront">
+            <a:rot lat="0" lon="0" rev="0"/>
+          </a:camera>
+          <a:lightRig rig="twoPt" dir="br">
+            <a:rot lat="0" lon="0" rev="8700000"/>
+          </a:lightRig>
+        </a:scene3d>
+        <a:sp3d prstMaterial="matte">
+          <a:bevelT w="25400" h="53975"/>
+        </a:sp3d>
+      </dsp:spPr>
+      <dsp:style>
+        <a:lnRef idx="0">
+          <a:scrgbClr r="0" g="0" b="0"/>
+        </a:lnRef>
+        <a:fillRef idx="3">
+          <a:scrgbClr r="0" g="0" b="0"/>
+        </a:fillRef>
+        <a:effectRef idx="2">
+          <a:scrgbClr r="0" g="0" b="0"/>
+        </a:effectRef>
+        <a:fontRef idx="minor">
+          <a:schemeClr val="lt1"/>
+        </a:fontRef>
+      </dsp:style>
+      <dsp:txBody>
+        <a:bodyPr spcFirstLastPara="0" vert="horz" wrap="square" lIns="135128" tIns="135128" rIns="135128" bIns="72390" numCol="1" spcCol="1270" anchor="t" anchorCtr="0">
+          <a:noAutofit/>
+        </a:bodyPr>
+        <a:lstStyle/>
+        <a:p>
+          <a:pPr lvl="0" algn="l" defTabSz="844550">
+            <a:lnSpc>
+              <a:spcPct val="90000"/>
+            </a:lnSpc>
+            <a:spcBef>
+              <a:spcPct val="0"/>
+            </a:spcBef>
+            <a:spcAft>
+              <a:spcPct val="35000"/>
+            </a:spcAft>
+          </a:pPr>
+          <a:r>
+            <a:rPr lang="en-US" sz="1900" kern="1200" dirty="0" smtClean="0"/>
+            <a:t>Execute</a:t>
+          </a:r>
+          <a:endParaRPr lang="en-US" sz="1900" kern="1200" dirty="0"/>
+        </a:p>
+      </dsp:txBody>
+      <dsp:txXfrm>
+        <a:off x="6626020" y="760368"/>
+        <a:ext cx="1374706" cy="547200"/>
+      </dsp:txXfrm>
+    </dsp:sp>
+    <dsp:sp modelId="{6DB9280B-D514-B548-833D-EBED3FF69866}">
+      <dsp:nvSpPr>
+        <dsp:cNvPr id="0" name=""/>
+        <dsp:cNvSpPr/>
+      </dsp:nvSpPr>
+      <dsp:spPr>
+        <a:xfrm>
+          <a:off x="6907587" y="1307568"/>
+          <a:ext cx="1374706" cy="1470600"/>
+        </a:xfrm>
+        <a:prstGeom prst="roundRect">
+          <a:avLst>
+            <a:gd name="adj" fmla="val 10000"/>
+          </a:avLst>
+        </a:prstGeom>
+        <a:noFill/>
+        <a:ln w="12700" cap="flat" cmpd="sng" algn="ctr">
+          <a:solidFill>
+            <a:schemeClr val="accent1">
+              <a:hueOff val="0"/>
+              <a:satOff val="0"/>
+              <a:lumOff val="0"/>
+              <a:alphaOff val="0"/>
+            </a:schemeClr>
+          </a:solidFill>
+          <a:prstDash val="solid"/>
+        </a:ln>
+        <a:effectLst/>
+      </dsp:spPr>
+      <dsp:style>
+        <a:lnRef idx="1">
+          <a:scrgbClr r="0" g="0" b="0"/>
+        </a:lnRef>
+        <a:fillRef idx="1">
+          <a:scrgbClr r="0" g="0" b="0"/>
+        </a:fillRef>
+        <a:effectRef idx="0">
+          <a:scrgbClr r="0" g="0" b="0"/>
+        </a:effectRef>
+        <a:fontRef idx="minor"/>
+      </dsp:style>
+    </dsp:sp>
+  </dsp:spTree>
+</dsp:drawing>
+</file>
+
+<file path=ppt/diagrams/layout1.xml><?xml version="1.0" encoding="utf-8"?>
+<dgm:layoutDef xmlns:dgm="http://schemas.openxmlformats.org/drawingml/2006/diagram" xmlns:a="http://schemas.openxmlformats.org/drawingml/2006/main" uniqueId="urn:microsoft.com/office/officeart/2005/8/layout/process3">
+  <dgm:title val=""/>
+  <dgm:desc val=""/>
+  <dgm:catLst>
+    <dgm:cat type="process" pri="2000"/>
+  </dgm:catLst>
+  <dgm:sampData>
+    <dgm:dataModel>
+      <dgm:ptLst>
+        <dgm:pt modelId="0" type="doc"/>
+        <dgm:pt modelId="1">
+          <dgm:prSet phldr="1"/>
+        </dgm:pt>
+        <dgm:pt modelId="11">
+          <dgm:prSet phldr="1"/>
+        </dgm:pt>
+        <dgm:pt modelId="2">
+          <dgm:prSet phldr="1"/>
+        </dgm:pt>
+        <dgm:pt modelId="21">
+          <dgm:prSet phldr="1"/>
+        </dgm:pt>
+        <dgm:pt modelId="3">
+          <dgm:prSet phldr="1"/>
+        </dgm:pt>
+        <dgm:pt modelId="31">
+          <dgm:prSet phldr="1"/>
+        </dgm:pt>
+      </dgm:ptLst>
+      <dgm:cxnLst>
+        <dgm:cxn modelId="4" srcId="0" destId="1" srcOrd="0" destOrd="0"/>
+        <dgm:cxn modelId="5" srcId="0" destId="2" srcOrd="1" destOrd="0"/>
+        <dgm:cxn modelId="6" srcId="0" destId="3" srcOrd="3" destOrd="0"/>
+        <dgm:cxn modelId="12" srcId="1" destId="11" srcOrd="0" destOrd="0"/>
+        <dgm:cxn modelId="23" srcId="2" destId="21" srcOrd="0" destOrd="0"/>
+        <dgm:cxn modelId="34" srcId="3" destId="31" srcOrd="0" destOrd="0"/>
+      </dgm:cxnLst>
+      <dgm:bg/>
+      <dgm:whole/>
+    </dgm:dataModel>
+  </dgm:sampData>
+  <dgm:styleData>
+    <dgm:dataModel>
+      <dgm:ptLst>
+        <dgm:pt modelId="0" type="doc"/>
+        <dgm:pt modelId="1">
+          <dgm:prSet phldr="1"/>
+        </dgm:pt>
+        <dgm:pt modelId="11">
+          <dgm:prSet phldr="1"/>
+        </dgm:pt>
+        <dgm:pt modelId="2">
+          <dgm:prSet phldr="1"/>
+        </dgm:pt>
+        <dgm:pt modelId="21">
+          <dgm:prSet phldr="1"/>
+        </dgm:pt>
+      </dgm:ptLst>
+      <dgm:cxnLst>
+        <dgm:cxn modelId="4" srcId="0" destId="1" srcOrd="0" destOrd="0"/>
+        <dgm:cxn modelId="5" srcId="0" destId="2" srcOrd="1" destOrd="0"/>
+        <dgm:cxn modelId="13" srcId="1" destId="11" srcOrd="0" destOrd="0"/>
+        <dgm:cxn modelId="23" srcId="2" destId="21" srcOrd="0" destOrd="0"/>
+      </dgm:cxnLst>
+      <dgm:bg/>
+      <dgm:whole/>
+    </dgm:dataModel>
+  </dgm:styleData>
+  <dgm:clrData>
+    <dgm:dataModel>
+      <dgm:ptLst>
+        <dgm:pt modelId="0" type="doc"/>
+        <dgm:pt modelId="1">
+          <dgm:prSet phldr="1"/>
+        </dgm:pt>
+        <dgm:pt modelId="11">
+          <dgm:prSet phldr="1"/>
+        </dgm:pt>
+        <dgm:pt modelId="2">
+          <dgm:prSet phldr="1"/>
+        </dgm:pt>
+        <dgm:pt modelId="21">
+          <dgm:prSet phldr="1"/>
+        </dgm:pt>
+        <dgm:pt modelId="3">
+          <dgm:prSet phldr="1"/>
+        </dgm:pt>
+        <dgm:pt modelId="31">
+          <dgm:prSet phldr="1"/>
+        </dgm:pt>
+        <dgm:pt modelId="4">
+          <dgm:prSet phldr="1"/>
+        </dgm:pt>
+        <dgm:pt modelId="41">
+          <dgm:prSet phldr="1"/>
+        </dgm:pt>
+      </dgm:ptLst>
+      <dgm:cxnLst>
+        <dgm:cxn modelId="5" srcId="0" destId="1" srcOrd="0" destOrd="0"/>
+        <dgm:cxn modelId="6" srcId="0" destId="2" srcOrd="1" destOrd="0"/>
+        <dgm:cxn modelId="7" srcId="0" destId="3" srcOrd="2" destOrd="0"/>
+        <dgm:cxn modelId="8" srcId="0" destId="4" srcOrd="3" destOrd="0"/>
+        <dgm:cxn modelId="13" srcId="1" destId="11" srcOrd="0" destOrd="0"/>
+        <dgm:cxn modelId="23" srcId="2" destId="21" srcOrd="0" destOrd="0"/>
+        <dgm:cxn modelId="33" srcId="3" destId="31" srcOrd="0" destOrd="0"/>
+        <dgm:cxn modelId="43" srcId="4" destId="41" srcOrd="0" destOrd="0"/>
+      </dgm:cxnLst>
+      <dgm:bg/>
+      <dgm:whole/>
+    </dgm:dataModel>
+  </dgm:clrData>
+  <dgm:layoutNode name="linearFlow">
+    <dgm:varLst>
+      <dgm:dir/>
+      <dgm:animLvl val="lvl"/>
+      <dgm:resizeHandles val="exact"/>
+    </dgm:varLst>
+    <dgm:choose name="Name0">
+      <dgm:if name="Name1" func="var" arg="dir" op="equ" val="norm">
+        <dgm:alg type="lin"/>
+      </dgm:if>
+      <dgm:else name="Name2">
+        <dgm:alg type="lin">
+          <dgm:param type="linDir" val="fromR"/>
+        </dgm:alg>
+      </dgm:else>
+    </dgm:choose>
+    <dgm:shape xmlns:r="http://schemas.openxmlformats.org/officeDocument/2006/relationships" r:blip="">
+      <dgm:adjLst/>
+    </dgm:shape>
+    <dgm:presOf/>
+    <dgm:constrLst>
+      <dgm:constr type="w" for="ch" forName="composite" refType="w"/>
+      <dgm:constr type="w" for="ch" ptType="sibTrans" refType="w" refFor="ch" refForName="composite" fact="0.3333"/>
+      <dgm:constr type="w" for="des" forName="parTx"/>
+      <dgm:constr type="h" for="des" forName="parTx" op="equ"/>
+      <dgm:constr type="h" for="des" forName="parSh" op="equ"/>
+      <dgm:constr type="w" for="des" forName="desTx"/>
+      <dgm:constr type="h" for="des" forName="desTx" op="equ"/>
+      <dgm:constr type="w" for="des" forName="parSh"/>
+      <dgm:constr type="primFontSz" for="des" forName="parTx" val="65"/>
+      <dgm:constr type="secFontSz" for="des" forName="desTx" refType="primFontSz" refFor="des" refForName="parTx" op="equ"/>
+      <dgm:constr type="primFontSz" for="des" forName="connTx" refType="primFontSz" refFor="des" refForName="parTx" fact="0.8"/>
+      <dgm:constr type="primFontSz" for="des" forName="connTx" refType="primFontSz" refFor="des" refForName="parTx" op="lte" fact="0.8"/>
+      <dgm:constr type="h" for="des" forName="parTx" refType="primFontSz" refFor="des" refForName="parTx" fact="0.8"/>
+      <dgm:constr type="h" for="des" forName="parSh" refType="primFontSz" refFor="des" refForName="parTx" fact="1.2"/>
+      <dgm:constr type="h" for="des" forName="desTx" refType="primFontSz" refFor="des" refForName="parTx" fact="1.6"/>
+      <dgm:constr type="h" for="des" forName="parSh" refType="h" refFor="des" refForName="parTx" op="lte" fact="1.5"/>
+      <dgm:constr type="h" for="des" forName="parSh" refType="h" refFor="des" refForName="parTx" op="gte" fact="1.5"/>
+    </dgm:constrLst>
+    <dgm:ruleLst>
+      <dgm:rule type="w" for="ch" forName="composite" val="0" fact="NaN" max="NaN"/>
+      <dgm:rule type="primFontSz" for="des" forName="parTx" val="5" fact="NaN" max="NaN"/>
+    </dgm:ruleLst>
+    <dgm:forEach name="Name3" axis="ch" ptType="node">
+      <dgm:layoutNode name="composite">
+        <dgm:alg type="composite"/>
+        <dgm:shape xmlns:r="http://schemas.openxmlformats.org/officeDocument/2006/relationships" r:blip="">
+          <dgm:adjLst/>
+        </dgm:shape>
+        <dgm:presOf/>
+        <dgm:choose name="Name4">
+          <dgm:if name="Name5" func="var" arg="dir" op="equ" val="norm">
+            <dgm:constrLst>
+              <dgm:constr type="h" refType="w" fact="1000"/>
+              <dgm:constr type="l" for="ch" forName="parTx"/>
+              <dgm:constr type="w" for="ch" forName="parTx" refType="w" fact="0.83"/>
+              <dgm:constr type="t" for="ch" forName="parTx"/>
+              <dgm:constr type="l" for="ch" forName="parSh"/>
+              <dgm:constr type="w" for="ch" forName="parSh" refType="w" refFor="ch" refForName="parTx"/>
+              <dgm:constr type="t" for="ch" forName="parSh"/>
+              <dgm:constr type="l" for="ch" forName="desTx" refType="w" fact="0.17"/>
+              <dgm:constr type="w" for="ch" forName="desTx" refType="w" refFor="ch" refForName="parTx"/>
+              <dgm:constr type="t" for="ch" forName="desTx" refType="h" refFor="ch" refForName="parTx"/>
+            </dgm:constrLst>
+          </dgm:if>
+          <dgm:else name="Name6">
+            <dgm:constrLst>
+              <dgm:constr type="h" refType="w" fact="1000"/>
+              <dgm:constr type="l" for="ch" forName="parTx" refType="w" fact="0.17"/>
+              <dgm:constr type="w" for="ch" forName="parTx" refType="w" fact="0.83"/>
+              <dgm:constr type="t" for="ch" forName="parTx"/>
+              <dgm:constr type="l" for="ch" forName="parSh" refType="w" fact="0.15"/>
+              <dgm:constr type="w" for="ch" forName="parSh" refType="w" refFor="ch" refForName="parTx"/>
+              <dgm:constr type="t" for="ch" forName="parSh"/>
+              <dgm:constr type="l" for="ch" forName="desTx"/>
+              <dgm:constr type="w" for="ch" forName="desTx" refType="w" refFor="ch" refForName="parTx"/>
+              <dgm:constr type="t" for="ch" forName="desTx" refType="h" refFor="ch" refForName="parTx"/>
+            </dgm:constrLst>
+          </dgm:else>
+        </dgm:choose>
+        <dgm:ruleLst>
+          <dgm:rule type="h" val="INF" fact="NaN" max="NaN"/>
+        </dgm:ruleLst>
+        <dgm:layoutNode name="parTx">
+          <dgm:varLst>
+            <dgm:chMax val="0"/>
+            <dgm:chPref val="0"/>
+            <dgm:bulletEnabled val="1"/>
+          </dgm:varLst>
+          <dgm:alg type="tx">
+            <dgm:param type="parTxLTRAlign" val="l"/>
+            <dgm:param type="parTxRTLAlign" val="r"/>
+            <dgm:param type="txAnchorVert" val="t"/>
+          </dgm:alg>
+          <dgm:shape xmlns:r="http://schemas.openxmlformats.org/officeDocument/2006/relationships" type="rect" r:blip="" zOrderOff="1" hideGeom="1">
+            <dgm:adjLst>
+              <dgm:adj idx="1" val="0.1"/>
+            </dgm:adjLst>
+          </dgm:shape>
+          <dgm:presOf axis="self" ptType="node"/>
+          <dgm:constrLst>
+            <dgm:constr type="h" refType="w" op="lte" fact="0.4"/>
+            <dgm:constr type="bMarg" refType="primFontSz" fact="0.3"/>
+            <dgm:constr type="h"/>
+          </dgm:constrLst>
+          <dgm:ruleLst>
+            <dgm:rule type="h" val="INF" fact="NaN" max="NaN"/>
+          </dgm:ruleLst>
+        </dgm:layoutNode>
+        <dgm:layoutNode name="parSh">
+          <dgm:alg type="sp"/>
+          <dgm:shape xmlns:r="http://schemas.openxmlformats.org/officeDocument/2006/relationships" type="roundRect" r:blip="">
+            <dgm:adjLst>
+              <dgm:adj idx="1" val="0.1"/>
+            </dgm:adjLst>
+          </dgm:shape>
+          <dgm:presOf axis="self" ptType="node"/>
+          <dgm:constrLst>
+            <dgm:constr type="h"/>
+          </dgm:constrLst>
+          <dgm:ruleLst/>
+        </dgm:layoutNode>
+        <dgm:layoutNode name="desTx" styleLbl="fgAcc1">
+          <dgm:varLst>
+            <dgm:bulletEnabled val="1"/>
+          </dgm:varLst>
+          <dgm:alg type="tx">
+            <dgm:param type="stBulletLvl" val="1"/>
+          </dgm:alg>
+          <dgm:shape xmlns:r="http://schemas.openxmlformats.org/officeDocument/2006/relationships" type="roundRect" r:blip="">
+            <dgm:adjLst>
+              <dgm:adj idx="1" val="0.1"/>
+            </dgm:adjLst>
+          </dgm:shape>
+          <dgm:presOf axis="des" ptType="node"/>
+          <dgm:constrLst>
+            <dgm:constr type="secFontSz" val="65"/>
+            <dgm:constr type="primFontSz" refType="secFontSz"/>
+            <dgm:constr type="h"/>
+          </dgm:constrLst>
+          <dgm:ruleLst>
+            <dgm:rule type="h" val="INF" fact="NaN" max="NaN"/>
+          </dgm:ruleLst>
+        </dgm:layoutNode>
+      </dgm:layoutNode>
+      <dgm:forEach name="sibTransForEach" axis="followSib" ptType="sibTrans" cnt="1">
+        <dgm:layoutNode name="sibTrans">
+          <dgm:alg type="conn">
+            <dgm:param type="begPts" val="auto"/>
+            <dgm:param type="endPts" val="auto"/>
+            <dgm:param type="srcNode" val="parTx"/>
+            <dgm:param type="dstNode" val="parTx"/>
+          </dgm:alg>
+          <dgm:shape xmlns:r="http://schemas.openxmlformats.org/officeDocument/2006/relationships" type="conn" r:blip="">
+            <dgm:adjLst/>
+          </dgm:shape>
+          <dgm:presOf axis="self"/>
+          <dgm:constrLst>
+            <dgm:constr type="h" refType="w" fact="0.62"/>
+            <dgm:constr type="connDist"/>
+            <dgm:constr type="begPad" refType="connDist" fact="0.25"/>
+            <dgm:constr type="endPad" refType="connDist" fact="0.22"/>
+          </dgm:constrLst>
+          <dgm:ruleLst/>
+          <dgm:layoutNode name="connTx">
+            <dgm:alg type="tx">
+              <dgm:param type="autoTxRot" val="grav"/>
+            </dgm:alg>
+            <dgm:shape xmlns:r="http://schemas.openxmlformats.org/officeDocument/2006/relationships" type="conn" r:blip="" hideGeom="1">
+              <dgm:adjLst/>
+            </dgm:shape>
+            <dgm:presOf axis="self"/>
+            <dgm:constrLst>
+              <dgm:constr type="lMarg"/>
+              <dgm:constr type="rMarg"/>
+              <dgm:constr type="tMarg"/>
+              <dgm:constr type="bMarg"/>
+            </dgm:constrLst>
+            <dgm:ruleLst>
+              <dgm:rule type="primFontSz" val="5" fact="NaN" max="NaN"/>
+            </dgm:ruleLst>
+          </dgm:layoutNode>
+        </dgm:layoutNode>
+      </dgm:forEach>
+    </dgm:forEach>
+  </dgm:layoutNode>
+</dgm:layoutDef>
+</file>
+
+<file path=ppt/diagrams/quickStyle1.xml><?xml version="1.0" encoding="utf-8"?>
+<dgm:styleDef xmlns:dgm="http://schemas.openxmlformats.org/drawingml/2006/diagram" xmlns:a="http://schemas.openxmlformats.org/drawingml/2006/main" uniqueId="urn:microsoft.com/office/officeart/2005/8/quickstyle/simple4">
+  <dgm:title val=""/>
+  <dgm:desc val=""/>
+  <dgm:catLst>
+    <dgm:cat type="simple" pri="10400"/>
+  </dgm:catLst>
+  <dgm:scene3d>
+    <a:camera prst="orthographicFront"/>
+    <a:lightRig rig="threePt" dir="t"/>
+  </dgm:scene3d>
+  <dgm:styleLbl name="node0">
+    <dgm:scene3d>
+      <a:camera prst="orthographicFront"/>
+      <a:lightRig rig="threePt" dir="t"/>
+    </dgm:scene3d>
+    <dgm:sp3d/>
+    <dgm:txPr/>
+    <dgm:style>
+      <a:lnRef idx="0">
+        <a:scrgbClr r="0" g="0" b="0"/>
+      </a:lnRef>
+      <a:fillRef idx="3">
+        <a:scrgbClr r="0" g="0" b="0"/>
+      </a:fillRef>
+      <a:effectRef idx="2">
+        <a:scrgbClr r="0" g="0" b="0"/>
+      </a:effectRef>
+      <a:fontRef idx="minor">
+        <a:schemeClr val="lt1"/>
+      </a:fontRef>
+    </dgm:style>
+  </dgm:styleLbl>
+  <dgm:styleLbl name="lnNode1">
+    <dgm:scene3d>
+      <a:camera prst="orthographicFront"/>
+      <a:lightRig rig="threePt" dir="t"/>
+    </dgm:scene3d>
+    <dgm:sp3d/>
+    <dgm:txPr/>
+    <dgm:style>
+      <a:lnRef idx="1">
+        <a:scrgbClr r="0" g="0" b="0"/>
+      </a:lnRef>
+      <a:fillRef idx="3">
+        <a:scrgbClr r="0" g="0" b="0"/>
+      </a:fillRef>
+      <a:effectRef idx="2">
+        <a:scrgbClr r="0" g="0" b="0"/>
+      </a:effectRef>
+      <a:fontRef idx="minor">
+        <a:schemeClr val="lt1"/>
+      </a:fontRef>
+    </dgm:style>
+  </dgm:styleLbl>
+  <dgm:styleLbl name="vennNode1">
+    <dgm:scene3d>
+      <a:camera prst="orthographicFront"/>
+      <a:lightRig rig="threePt" dir="t"/>
+    </dgm:scene3d>
+    <dgm:sp3d/>
+    <dgm:txPr/>
+    <dgm:style>
+      <a:lnRef idx="0">
+        <a:scrgbClr r="0" g="0" b="0"/>
+      </a:lnRef>
+      <a:fillRef idx="3">
+        <a:scrgbClr r="0" g="0" b="0"/>
+      </a:fillRef>
+      <a:effectRef idx="0">
+        <a:scrgbClr r="0" g="0" b="0"/>
+      </a:effectRef>
+      <a:fontRef idx="minor">
+        <a:schemeClr val="tx1"/>
+      </a:fontRef>
+    </dgm:style>
+  </dgm:styleLbl>
+  <dgm:styleLbl name="alignNode1">
+    <dgm:scene3d>
+      <a:camera prst="orthographicFront"/>
+      <a:lightRig rig="threePt" dir="t"/>
+    </dgm:scene3d>
+    <dgm:sp3d/>
+    <dgm:txPr/>
+    <dgm:style>
+      <a:lnRef idx="1">
+        <a:scrgbClr r="0" g="0" b="0"/>
+      </a:lnRef>
+      <a:fillRef idx="3">
+        <a:scrgbClr r="0" g="0" b="0"/>
+      </a:fillRef>
+      <a:effectRef idx="2">
+        <a:scrgbClr r="0" g="0" b="0"/>
+      </a:effectRef>
+      <a:fontRef idx="minor">
+        <a:schemeClr val="lt1"/>
+      </a:fontRef>
+    </dgm:style>
+  </dgm:styleLbl>
+  <dgm:styleLbl name="node1">
+    <dgm:scene3d>
+      <a:camera prst="orthographicFront"/>
+      <a:lightRig rig="threePt" dir="t"/>
+    </dgm:scene3d>
+    <dgm:sp3d/>
+    <dgm:txPr/>
+    <dgm:style>
+      <a:lnRef idx="0">
+        <a:scrgbClr r="0" g="0" b="0"/>
+      </a:lnRef>
+      <a:fillRef idx="3">
+        <a:scrgbClr r="0" g="0" b="0"/>
+      </a:fillRef>
+      <a:effectRef idx="2">
+        <a:scrgbClr r="0" g="0" b="0"/>
+      </a:effectRef>
+      <a:fontRef idx="minor">
+        <a:schemeClr val="lt1"/>
+      </a:fontRef>
+    </dgm:style>
+  </dgm:styleLbl>
+  <dgm:styleLbl name="node2">
+    <dgm:scene3d>
+      <a:camera prst="orthographicFront"/>
+      <a:lightRig rig="threePt" dir="t"/>
+    </dgm:scene3d>
+    <dgm:sp3d/>
+    <dgm:txPr/>
+    <dgm:style>
+      <a:lnRef idx="0">
+        <a:scrgbClr r="0" g="0" b="0"/>
+      </a:lnRef>
+      <a:fillRef idx="3">
+        <a:scrgbClr r="0" g="0" b="0"/>
+      </a:fillRef>
+      <a:effectRef idx="2">
+        <a:scrgbClr r="0" g="0" b="0"/>
+      </a:effectRef>
+      <a:fontRef idx="minor">
+        <a:schemeClr val="lt1"/>
+      </a:fontRef>
+    </dgm:style>
+  </dgm:styleLbl>
+  <dgm:styleLbl name="node3">
+    <dgm:scene3d>
+      <a:camera prst="orthographicFront"/>
+      <a:lightRig rig="threePt" dir="t"/>
+    </dgm:scene3d>
+    <dgm:sp3d/>
+    <dgm:txPr/>
+    <dgm:style>
+      <a:lnRef idx="0">
+        <a:scrgbClr r="0" g="0" b="0"/>
+      </a:lnRef>
+      <a:fillRef idx="3">
+        <a:scrgbClr r="0" g="0" b="0"/>
+      </a:fillRef>
+      <a:effectRef idx="2">
+        <a:scrgbClr r="0" g="0" b="0"/>
+      </a:effectRef>
+      <a:fontRef idx="minor">
+        <a:schemeClr val="lt1"/>
+      </a:fontRef>
+    </dgm:style>
+  </dgm:styleLbl>
+  <dgm:styleLbl name="node4">
+    <dgm:scene3d>
+      <a:camera prst="orthographicFront"/>
+      <a:lightRig rig="threePt" dir="t"/>
+    </dgm:scene3d>
+    <dgm:sp3d/>
+    <dgm:txPr/>
+    <dgm:style>
+      <a:lnRef idx="0">
+        <a:scrgbClr r="0" g="0" b="0"/>
+      </a:lnRef>
+      <a:fillRef idx="3">
+        <a:scrgbClr r="0" g="0" b="0"/>
+      </a:fillRef>
+      <a:effectRef idx="2">
+        <a:scrgbClr r="0" g="0" b="0"/>
+      </a:effectRef>
+      <a:fontRef idx="minor">
+        <a:schemeClr val="lt1"/>
+      </a:fontRef>
+    </dgm:style>
+  </dgm:styleLbl>
+  <dgm:styleLbl name="fgImgPlace1">
+    <dgm:scene3d>
+      <a:camera prst="orthographicFront"/>
+      <a:lightRig rig="threePt" dir="t"/>
+    </dgm:scene3d>
+    <dgm:sp3d/>
+    <dgm:txPr/>
+    <dgm:style>
+      <a:lnRef idx="0">
+        <a:scrgbClr r="0" g="0" b="0"/>
+      </a:lnRef>
+      <a:fillRef idx="1">
+        <a:scrgbClr r="0" g="0" b="0"/>
+      </a:fillRef>
+      <a:effectRef idx="2">
+        <a:scrgbClr r="0" g="0" b="0"/>
+      </a:effectRef>
+      <a:fontRef idx="minor"/>
+    </dgm:style>
+  </dgm:styleLbl>
+  <dgm:styleLbl name="alignImgPlace1">
+    <dgm:scene3d>
+      <a:camera prst="orthographicFront"/>
+      <a:lightRig rig="threePt" dir="t"/>
+    </dgm:scene3d>
+    <dgm:sp3d/>
+    <dgm:txPr/>
+    <dgm:style>
+      <a:lnRef idx="0">
+        <a:scrgbClr r="0" g="0" b="0"/>
+      </a:lnRef>
+      <a:fillRef idx="1">
+        <a:scrgbClr r="0" g="0" b="0"/>
+      </a:fillRef>
+      <a:effectRef idx="2">
+        <a:scrgbClr r="0" g="0" b="0"/>
+      </a:effectRef>
+      <a:fontRef idx="minor"/>
+    </dgm:style>
+  </dgm:styleLbl>
+  <dgm:styleLbl name="bgImgPlace1">
+    <dgm:scene3d>
+      <a:camera prst="orthographicFront"/>
+      <a:lightRig rig="threePt" dir="t"/>
+    </dgm:scene3d>
+    <dgm:sp3d/>
+    <dgm:txPr/>
+    <dgm:style>
+      <a:lnRef idx="0">
+        <a:scrgbClr r="0" g="0" b="0"/>
+      </a:lnRef>
+      <a:fillRef idx="1">
+        <a:scrgbClr r="0" g="0" b="0"/>
+      </a:fillRef>
+      <a:effectRef idx="2">
+        <a:scrgbClr r="0" g="0" b="0"/>
+      </a:effectRef>
+      <a:fontRef idx="minor"/>
+    </dgm:style>
+  </dgm:styleLbl>
+  <dgm:styleLbl name="sibTrans2D1">
+    <dgm:scene3d>
+      <a:camera prst="orthographicFront"/>
+      <a:lightRig rig="threePt" dir="t"/>
+    </dgm:scene3d>
+    <dgm:sp3d/>
+    <dgm:txPr/>
+    <dgm:style>
+      <a:lnRef idx="0">
+        <a:scrgbClr r="0" g="0" b="0"/>
+      </a:lnRef>
+      <a:fillRef idx="3">
+        <a:scrgbClr r="0" g="0" b="0"/>
+      </a:fillRef>
+      <a:effectRef idx="2">
+        <a:scrgbClr r="0" g="0" b="0"/>
+      </a:effectRef>
+      <a:fontRef idx="minor">
+        <a:schemeClr val="lt1"/>
+      </a:fontRef>
+    </dgm:style>
+  </dgm:styleLbl>
+  <dgm:styleLbl name="fgSibTrans2D1">
+    <dgm:scene3d>
+      <a:camera prst="orthographicFront"/>
+      <a:lightRig rig="threePt" dir="t"/>
+    </dgm:scene3d>
+    <dgm:sp3d/>
+    <dgm:txPr/>
+    <dgm:style>
+      <a:lnRef idx="0">
+        <a:scrgbClr r="0" g="0" b="0"/>
+      </a:lnRef>
+      <a:fillRef idx="3">
+        <a:scrgbClr r="0" g="0" b="0"/>
+      </a:fillRef>
+      <a:effectRef idx="2">
+        <a:scrgbClr r="0" g="0" b="0"/>
+      </a:effectRef>
+      <a:fontRef idx="minor">
+        <a:schemeClr val="lt1"/>
+      </a:fontRef>
+    </dgm:style>
+  </dgm:styleLbl>
+  <dgm:styleLbl name="bgSibTrans2D1">
+    <dgm:scene3d>
+      <a:camera prst="orthographicFront"/>
+      <a:lightRig rig="threePt" dir="t"/>
+    </dgm:scene3d>
+    <dgm:sp3d/>
+    <dgm:txPr/>
+    <dgm:style>
+      <a:lnRef idx="0">
+        <a:scrgbClr r="0" g="0" b="0"/>
+      </a:lnRef>
+      <a:fillRef idx="3">
+        <a:scrgbClr r="0" g="0" b="0"/>
+      </a:fillRef>
+      <a:effectRef idx="2">
+        <a:scrgbClr r="0" g="0" b="0"/>
+      </a:effectRef>
+      <a:fontRef idx="minor">
+        <a:schemeClr val="lt1"/>
+      </a:fontRef>
+    </dgm:style>
+  </dgm:styleLbl>
+  <dgm:styleLbl name="sibTrans1D1">
+    <dgm:scene3d>
+      <a:camera prst="orthographicFront"/>
+      <a:lightRig rig="threePt" dir="t"/>
+    </dgm:scene3d>
+    <dgm:sp3d/>
+    <dgm:txPr/>
+    <dgm:style>
+      <a:lnRef idx="1">
+        <a:scrgbClr r="0" g="0" b="0"/>
+      </a:lnRef>
+      <a:fillRef idx="0">
+        <a:scrgbClr r="0" g="0" b="0"/>
+      </a:fillRef>
+      <a:effectRef idx="0">
+        <a:scrgbClr r="0" g="0" b="0"/>
+      </a:effectRef>
+      <a:fontRef idx="minor"/>
+    </dgm:style>
+  </dgm:styleLbl>
+  <dgm:styleLbl name="callout">
+    <dgm:scene3d>
+      <a:camera prst="orthographicFront"/>
+      <a:lightRig rig="threePt" dir="t"/>
+    </dgm:scene3d>
+    <dgm:sp3d/>
+    <dgm:txPr/>
+    <dgm:style>
+      <a:lnRef idx="2">
+        <a:scrgbClr r="0" g="0" b="0"/>
+      </a:lnRef>
+      <a:fillRef idx="1">
+        <a:scrgbClr r="0" g="0" b="0"/>
+      </a:fillRef>
+      <a:effectRef idx="1">
+        <a:scrgbClr r="0" g="0" b="0"/>
+      </a:effectRef>
+      <a:fontRef idx="minor"/>
+    </dgm:style>
+  </dgm:styleLbl>
+  <dgm:styleLbl name="asst0">
+    <dgm:scene3d>
+      <a:camera prst="orthographicFront"/>
+      <a:lightRig rig="threePt" dir="t"/>
+    </dgm:scene3d>
+    <dgm:sp3d/>
+    <dgm:txPr/>
+    <dgm:style>
+      <a:lnRef idx="0">
+        <a:scrgbClr r="0" g="0" b="0"/>
+      </a:lnRef>
+      <a:fillRef idx="3">
+        <a:scrgbClr r="0" g="0" b="0"/>
+      </a:fillRef>
+      <a:effectRef idx="2">
+        <a:scrgbClr r="0" g="0" b="0"/>
+      </a:effectRef>
+      <a:fontRef idx="minor">
+        <a:schemeClr val="lt1"/>
+      </a:fontRef>
+    </dgm:style>
+  </dgm:styleLbl>
+  <dgm:styleLbl name="asst1">
+    <dgm:scene3d>
+      <a:camera prst="orthographicFront"/>
+      <a:lightRig rig="threePt" dir="t"/>
+    </dgm:scene3d>
+    <dgm:sp3d/>
+    <dgm:txPr/>
+    <dgm:style>
+      <a:lnRef idx="0">
+        <a:scrgbClr r="0" g="0" b="0"/>
+      </a:lnRef>
+      <a:fillRef idx="3">
+        <a:scrgbClr r="0" g="0" b="0"/>
+      </a:fillRef>
+      <a:effectRef idx="2">
+        <a:scrgbClr r="0" g="0" b="0"/>
+      </a:effectRef>
+      <a:fontRef idx="minor">
+        <a:schemeClr val="lt1"/>
+      </a:fontRef>
+    </dgm:style>
+  </dgm:styleLbl>
+  <dgm:styleLbl name="asst2">
+    <dgm:scene3d>
+      <a:camera prst="orthographicFront"/>
+      <a:lightRig rig="threePt" dir="t"/>
+    </dgm:scene3d>
+    <dgm:sp3d/>
+    <dgm:txPr/>
+    <dgm:style>
+      <a:lnRef idx="0">
+        <a:scrgbClr r="0" g="0" b="0"/>
+      </a:lnRef>
+      <a:fillRef idx="3">
+        <a:scrgbClr r="0" g="0" b="0"/>
+      </a:fillRef>
+      <a:effectRef idx="2">
+        <a:scrgbClr r="0" g="0" b="0"/>
+      </a:effectRef>
+      <a:fontRef idx="minor">
+        <a:schemeClr val="lt1"/>
+      </a:fontRef>
+    </dgm:style>
+  </dgm:styleLbl>
+  <dgm:styleLbl name="asst3">
+    <dgm:scene3d>
+      <a:camera prst="orthographicFront"/>
+      <a:lightRig rig="threePt" dir="t"/>
+    </dgm:scene3d>
+    <dgm:sp3d/>
+    <dgm:txPr/>
+    <dgm:style>
+      <a:lnRef idx="0">
+        <a:scrgbClr r="0" g="0" b="0"/>
+      </a:lnRef>
+      <a:fillRef idx="3">
+        <a:scrgbClr r="0" g="0" b="0"/>
+      </a:fillRef>
+      <a:effectRef idx="2">
+        <a:scrgbClr r="0" g="0" b="0"/>
+      </a:effectRef>
+      <a:fontRef idx="minor">
+        <a:schemeClr val="lt1"/>
+      </a:fontRef>
+    </dgm:style>
+  </dgm:styleLbl>
+  <dgm:styleLbl name="asst4">
+    <dgm:scene3d>
+      <a:camera prst="orthographicFront"/>
+      <a:lightRig rig="threePt" dir="t"/>
+    </dgm:scene3d>
+    <dgm:sp3d/>
+    <dgm:txPr/>
+    <dgm:style>
+      <a:lnRef idx="0">
+        <a:scrgbClr r="0" g="0" b="0"/>
+      </a:lnRef>
+      <a:fillRef idx="3">
+        <a:scrgbClr r="0" g="0" b="0"/>
+      </a:fillRef>
+      <a:effectRef idx="2">
+        <a:scrgbClr r="0" g="0" b="0"/>
+      </a:effectRef>
+      <a:fontRef idx="minor">
+        <a:schemeClr val="lt1"/>
+      </a:fontRef>
+    </dgm:style>
+  </dgm:styleLbl>
+  <dgm:styleLbl name="parChTrans2D1">
+    <dgm:scene3d>
+      <a:camera prst="orthographicFront"/>
+      <a:lightRig rig="threePt" dir="t"/>
+    </dgm:scene3d>
+    <dgm:sp3d/>
+    <dgm:txPr/>
+    <dgm:style>
+      <a:lnRef idx="0">
+        <a:scrgbClr r="0" g="0" b="0"/>
+      </a:lnRef>
+      <a:fillRef idx="3">
+        <a:scrgbClr r="0" g="0" b="0"/>
+      </a:fillRef>
+      <a:effectRef idx="2">
+        <a:scrgbClr r="0" g="0" b="0"/>
+      </a:effectRef>
+      <a:fontRef idx="minor">
+        <a:schemeClr val="lt1"/>
+      </a:fontRef>
+    </dgm:style>
+  </dgm:styleLbl>
+  <dgm:styleLbl name="parChTrans2D2">
+    <dgm:scene3d>
+      <a:camera prst="orthographicFront"/>
+      <a:lightRig rig="threePt" dir="t"/>
+    </dgm:scene3d>
+    <dgm:sp3d/>
+    <dgm:txPr/>
+    <dgm:style>
+      <a:lnRef idx="0">
+        <a:scrgbClr r="0" g="0" b="0"/>
+      </a:lnRef>
+      <a:fillRef idx="3">
+        <a:scrgbClr r="0" g="0" b="0"/>
+      </a:fillRef>
+      <a:effectRef idx="2">
+        <a:scrgbClr r="0" g="0" b="0"/>
+      </a:effectRef>
+      <a:fontRef idx="minor">
+        <a:schemeClr val="lt1"/>
+      </a:fontRef>
+    </dgm:style>
+  </dgm:styleLbl>
+  <dgm:styleLbl name="parChTrans2D3">
+    <dgm:scene3d>
+      <a:camera prst="orthographicFront"/>
+      <a:lightRig rig="threePt" dir="t"/>
+    </dgm:scene3d>
+    <dgm:sp3d/>
+    <dgm:txPr/>
+    <dgm:style>
+      <a:lnRef idx="1">
+        <a:scrgbClr r="0" g="0" b="0"/>
+      </a:lnRef>
+      <a:fillRef idx="3">
+        <a:scrgbClr r="0" g="0" b="0"/>
+      </a:fillRef>
+      <a:effectRef idx="2">
+        <a:scrgbClr r="0" g="0" b="0"/>
+      </a:effectRef>
+      <a:fontRef idx="minor">
+        <a:schemeClr val="lt1"/>
+      </a:fontRef>
+    </dgm:style>
+  </dgm:styleLbl>
+  <dgm:styleLbl name="parChTrans2D4">
+    <dgm:scene3d>
+      <a:camera prst="orthographicFront"/>
+      <a:lightRig rig="threePt" dir="t"/>
+    </dgm:scene3d>
+    <dgm:sp3d/>
+    <dgm:txPr/>
+    <dgm:style>
+      <a:lnRef idx="1">
+        <a:scrgbClr r="0" g="0" b="0"/>
+      </a:lnRef>
+      <a:fillRef idx="3">
+        <a:scrgbClr r="0" g="0" b="0"/>
+      </a:fillRef>
+      <a:effectRef idx="2">
+        <a:scrgbClr r="0" g="0" b="0"/>
+      </a:effectRef>
+      <a:fontRef idx="minor">
+        <a:schemeClr val="lt1"/>
+      </a:fontRef>
+    </dgm:style>
+  </dgm:styleLbl>
+  <dgm:styleLbl name="parChTrans1D1">
+    <dgm:scene3d>
+      <a:camera prst="orthographicFront"/>
+      <a:lightRig rig="threePt" dir="t"/>
+    </dgm:scene3d>
+    <dgm:sp3d/>
+    <dgm:txPr/>
+    <dgm:style>
+      <a:lnRef idx="1">
+        <a:scrgbClr r="0" g="0" b="0"/>
+      </a:lnRef>
+      <a:fillRef idx="0">
+        <a:scrgbClr r="0" g="0" b="0"/>
+      </a:fillRef>
+      <a:effectRef idx="0">
+        <a:scrgbClr r="0" g="0" b="0"/>
+      </a:effectRef>
+      <a:fontRef idx="minor"/>
+    </dgm:style>
+  </dgm:styleLbl>
+  <dgm:styleLbl name="parChTrans1D2">
+    <dgm:scene3d>
+      <a:camera prst="orthographicFront"/>
+      <a:lightRig rig="threePt" dir="t"/>
+    </dgm:scene3d>
+    <dgm:sp3d/>
+    <dgm:txPr/>
+    <dgm:style>
+      <a:lnRef idx="1">
+        <a:scrgbClr r="0" g="0" b="0"/>
+      </a:lnRef>
+      <a:fillRef idx="0">
+        <a:scrgbClr r="0" g="0" b="0"/>
+      </a:fillRef>
+      <a:effectRef idx="0">
+        <a:scrgbClr r="0" g="0" b="0"/>
+      </a:effectRef>
+      <a:fontRef idx="minor"/>
+    </dgm:style>
+  </dgm:styleLbl>
+  <dgm:styleLbl name="parChTrans1D3">
+    <dgm:scene3d>
+      <a:camera prst="orthographicFront"/>
+      <a:lightRig rig="threePt" dir="t"/>
+    </dgm:scene3d>
+    <dgm:sp3d/>
+    <dgm:txPr/>
+    <dgm:style>
+      <a:lnRef idx="1">
+        <a:scrgbClr r="0" g="0" b="0"/>
+      </a:lnRef>
+      <a:fillRef idx="0">
+        <a:scrgbClr r="0" g="0" b="0"/>
+      </a:fillRef>
+      <a:effectRef idx="0">
+        <a:scrgbClr r="0" g="0" b="0"/>
+      </a:effectRef>
+      <a:fontRef idx="minor"/>
+    </dgm:style>
+  </dgm:styleLbl>
+  <dgm:styleLbl name="parChTrans1D4">
+    <dgm:scene3d>
+      <a:camera prst="orthographicFront"/>
+      <a:lightRig rig="threePt" dir="t"/>
+    </dgm:scene3d>
+    <dgm:sp3d/>
+    <dgm:txPr/>
+    <dgm:style>
+      <a:lnRef idx="1">
+        <a:scrgbClr r="0" g="0" b="0"/>
+      </a:lnRef>
+      <a:fillRef idx="0">
+        <a:scrgbClr r="0" g="0" b="0"/>
+      </a:fillRef>
+      <a:effectRef idx="0">
+        <a:scrgbClr r="0" g="0" b="0"/>
+      </a:effectRef>
+      <a:fontRef idx="minor"/>
+    </dgm:style>
+  </dgm:styleLbl>
+  <dgm:styleLbl name="fgAcc1">
+    <dgm:scene3d>
+      <a:camera prst="orthographicFront"/>
+      <a:lightRig rig="threePt" dir="t"/>
+    </dgm:scene3d>
+    <dgm:sp3d/>
+    <dgm:txPr/>
+    <dgm:style>
+      <a:lnRef idx="1">
+        <a:scrgbClr r="0" g="0" b="0"/>
+      </a:lnRef>
+      <a:fillRef idx="1">
+        <a:scrgbClr r="0" g="0" b="0"/>
+      </a:fillRef>
+      <a:effectRef idx="0">
+        <a:scrgbClr r="0" g="0" b="0"/>
+      </a:effectRef>
+      <a:fontRef idx="minor"/>
+    </dgm:style>
+  </dgm:styleLbl>
+  <dgm:styleLbl name="conFgAcc1">
+    <dgm:scene3d>
+      <a:camera prst="orthographicFront"/>
+      <a:lightRig rig="threePt" dir="t"/>
+    </dgm:scene3d>
+    <dgm:sp3d/>
+    <dgm:txPr/>
+    <dgm:style>
+      <a:lnRef idx="1">
+        <a:scrgbClr r="0" g="0" b="0"/>
+      </a:lnRef>
+      <a:fillRef idx="1">
+        <a:scrgbClr r="0" g="0" b="0"/>
+      </a:fillRef>
+      <a:effectRef idx="0">
+        <a:scrgbClr r="0" g="0" b="0"/>
+      </a:effectRef>
+      <a:fontRef idx="minor"/>
+    </dgm:style>
+  </dgm:styleLbl>
+  <dgm:styleLbl name="alignAcc1">
+    <dgm:scene3d>
+      <a:camera prst="orthographicFront"/>
+      <a:lightRig rig="threePt" dir="t"/>
+    </dgm:scene3d>
+    <dgm:sp3d/>
+    <dgm:txPr/>
+    <dgm:style>
+      <a:lnRef idx="1">
+        <a:scrgbClr r="0" g="0" b="0"/>
+      </a:lnRef>
+      <a:fillRef idx="1">
+        <a:scrgbClr r="0" g="0" b="0"/>
+      </a:fillRef>
+      <a:effectRef idx="0">
+        <a:scrgbClr r="0" g="0" b="0"/>
+      </a:effectRef>
+      <a:fontRef idx="minor"/>
+    </dgm:style>
+  </dgm:styleLbl>
+  <dgm:styleLbl name="trAlignAcc1">
+    <dgm:scene3d>
+      <a:camera prst="orthographicFront"/>
+      <a:lightRig rig="threePt" dir="t"/>
+    </dgm:scene3d>
+    <dgm:sp3d/>
+    <dgm:txPr/>
+    <dgm:style>
+      <a:lnRef idx="1">
+        <a:scrgbClr r="0" g="0" b="0"/>
+      </a:lnRef>
+      <a:fillRef idx="1">
+        <a:scrgbClr r="0" g="0" b="0"/>
+      </a:fillRef>
+      <a:effectRef idx="0">
+        <a:scrgbClr r="0" g="0" b="0"/>
+      </a:effectRef>
+      <a:fontRef idx="minor"/>
+    </dgm:style>
+  </dgm:styleLbl>
+  <dgm:styleLbl name="bgAcc1">
+    <dgm:scene3d>
+      <a:camera prst="orthographicFront"/>
+      <a:lightRig rig="threePt" dir="t"/>
+    </dgm:scene3d>
+    <dgm:sp3d/>
+    <dgm:txPr/>
+    <dgm:style>
+      <a:lnRef idx="1">
+        <a:scrgbClr r="0" g="0" b="0"/>
+      </a:lnRef>
+      <a:fillRef idx="1">
+        <a:scrgbClr r="0" g="0" b="0"/>
+      </a:fillRef>
+      <a:effectRef idx="0">
+        <a:scrgbClr r="0" g="0" b="0"/>
+      </a:effectRef>
+      <a:fontRef idx="minor"/>
+    </dgm:style>
+  </dgm:styleLbl>
+  <dgm:styleLbl name="solidFgAcc1">
+    <dgm:scene3d>
+      <a:camera prst="orthographicFront"/>
+      <a:lightRig rig="threePt" dir="t"/>
+    </dgm:scene3d>
+    <dgm:sp3d/>
+    <dgm:txPr/>
+    <dgm:style>
+      <a:lnRef idx="1">
+        <a:scrgbClr r="0" g="0" b="0"/>
+      </a:lnRef>
+      <a:fillRef idx="1">
+        <a:scrgbClr r="0" g="0" b="0"/>
+      </a:fillRef>
+      <a:effectRef idx="0">
+        <a:scrgbClr r="0" g="0" b="0"/>
+      </a:effectRef>
+      <a:fontRef idx="minor"/>
+    </dgm:style>
+  </dgm:styleLbl>
+  <dgm:styleLbl name="solidAlignAcc1">
+    <dgm:scene3d>
+      <a:camera prst="orthographicFront"/>
+      <a:lightRig rig="threePt" dir="t"/>
+    </dgm:scene3d>
+    <dgm:sp3d/>
+    <dgm:txPr/>
+    <dgm:style>
+      <a:lnRef idx="1">
+        <a:scrgbClr r="0" g="0" b="0"/>
+      </a:lnRef>
+      <a:fillRef idx="1">
+        <a:scrgbClr r="0" g="0" b="0"/>
+      </a:fillRef>
+      <a:effectRef idx="0">
+        <a:scrgbClr r="0" g="0" b="0"/>
+      </a:effectRef>
+      <a:fontRef idx="minor"/>
+    </dgm:style>
+  </dgm:styleLbl>
+  <dgm:styleLbl name="solidBgAcc1">
+    <dgm:scene3d>
+      <a:camera prst="orthographicFront"/>
+      <a:lightRig rig="threePt" dir="t"/>
+    </dgm:scene3d>
+    <dgm:sp3d/>
+    <dgm:txPr/>
+    <dgm:style>
+      <a:lnRef idx="1">
+        <a:scrgbClr r="0" g="0" b="0"/>
+      </a:lnRef>
+      <a:fillRef idx="1">
+        <a:scrgbClr r="0" g="0" b="0"/>
+      </a:fillRef>
+      <a:effectRef idx="0">
+        <a:scrgbClr r="0" g="0" b="0"/>
+      </a:effectRef>
+      <a:fontRef idx="minor"/>
+    </dgm:style>
+  </dgm:styleLbl>
+  <dgm:styleLbl name="fgAccFollowNode1">
+    <dgm:scene3d>
+      <a:camera prst="orthographicFront"/>
+      <a:lightRig rig="threePt" dir="t"/>
+    </dgm:scene3d>
+    <dgm:sp3d/>
+    <dgm:txPr/>
+    <dgm:style>
+      <a:lnRef idx="1">
+        <a:scrgbClr r="0" g="0" b="0"/>
+      </a:lnRef>
+      <a:fillRef idx="1">
+        <a:scrgbClr r="0" g="0" b="0"/>
+      </a:fillRef>
+      <a:effectRef idx="0">
+        <a:scrgbClr r="0" g="0" b="0"/>
+      </a:effectRef>
+      <a:fontRef idx="minor"/>
+    </dgm:style>
+  </dgm:styleLbl>
+  <dgm:styleLbl name="alignAccFollowNode1">
+    <dgm:scene3d>
+      <a:camera prst="orthographicFront"/>
+      <a:lightRig rig="threePt" dir="t"/>
+    </dgm:scene3d>
+    <dgm:sp3d/>
+    <dgm:txPr/>
+    <dgm:style>
+      <a:lnRef idx="1">
+        <a:scrgbClr r="0" g="0" b="0"/>
+      </a:lnRef>
+      <a:fillRef idx="1">
+        <a:scrgbClr r="0" g="0" b="0"/>
+      </a:fillRef>
+      <a:effectRef idx="0">
+        <a:scrgbClr r="0" g="0" b="0"/>
+      </a:effectRef>
+      <a:fontRef idx="minor"/>
+    </dgm:style>
+  </dgm:styleLbl>
+  <dgm:styleLbl name="bgAccFollowNode1">
+    <dgm:scene3d>
+      <a:camera prst="orthographicFront"/>
+      <a:lightRig rig="threePt" dir="t"/>
+    </dgm:scene3d>
+    <dgm:sp3d/>
+    <dgm:txPr/>
+    <dgm:style>
+      <a:lnRef idx="1">
+        <a:scrgbClr r="0" g="0" b="0"/>
+      </a:lnRef>
+      <a:fillRef idx="1">
+        <a:scrgbClr r="0" g="0" b="0"/>
+      </a:fillRef>
+      <a:effectRef idx="0">
+        <a:scrgbClr r="0" g="0" b="0"/>
+      </a:effectRef>
+      <a:fontRef idx="minor"/>
+    </dgm:style>
+  </dgm:styleLbl>
+  <dgm:styleLbl name="fgAcc0">
+    <dgm:scene3d>
+      <a:camera prst="orthographicFront"/>
+      <a:lightRig rig="threePt" dir="t"/>
+    </dgm:scene3d>
+    <dgm:sp3d/>
+    <dgm:txPr/>
+    <dgm:style>
+      <a:lnRef idx="1">
+        <a:scrgbClr r="0" g="0" b="0"/>
+      </a:lnRef>
+      <a:fillRef idx="1">
+        <a:scrgbClr r="0" g="0" b="0"/>
+      </a:fillRef>
+      <a:effectRef idx="0">
+        <a:scrgbClr r="0" g="0" b="0"/>
+      </a:effectRef>
+      <a:fontRef idx="minor"/>
+    </dgm:style>
+  </dgm:styleLbl>
+  <dgm:styleLbl name="fgAcc2">
+    <dgm:scene3d>
+      <a:camera prst="orthographicFront"/>
+      <a:lightRig rig="threePt" dir="t"/>
+    </dgm:scene3d>
+    <dgm:sp3d/>
+    <dgm:txPr/>
+    <dgm:style>
+      <a:lnRef idx="1">
+        <a:scrgbClr r="0" g="0" b="0"/>
+      </a:lnRef>
+      <a:fillRef idx="1">
+        <a:scrgbClr r="0" g="0" b="0"/>
+      </a:fillRef>
+      <a:effectRef idx="0">
+        <a:scrgbClr r="0" g="0" b="0"/>
+      </a:effectRef>
+      <a:fontRef idx="minor"/>
+    </dgm:style>
+  </dgm:styleLbl>
+  <dgm:styleLbl name="fgAcc3">
+    <dgm:scene3d>
+      <a:camera prst="orthographicFront"/>
+      <a:lightRig rig="threePt" dir="t"/>
+    </dgm:scene3d>
+    <dgm:sp3d/>
+    <dgm:txPr/>
+    <dgm:style>
+      <a:lnRef idx="1">
+        <a:scrgbClr r="0" g="0" b="0"/>
+      </a:lnRef>
+      <a:fillRef idx="1">
+        <a:scrgbClr r="0" g="0" b="0"/>
+      </a:fillRef>
+      <a:effectRef idx="0">
+        <a:scrgbClr r="0" g="0" b="0"/>
+      </a:effectRef>
+      <a:fontRef idx="minor"/>
+    </dgm:style>
+  </dgm:styleLbl>
+  <dgm:styleLbl name="fgAcc4">
+    <dgm:scene3d>
+      <a:camera prst="orthographicFront"/>
+      <a:lightRig rig="threePt" dir="t"/>
+    </dgm:scene3d>
+    <dgm:sp3d/>
+    <dgm:txPr/>
+    <dgm:style>
+      <a:lnRef idx="1">
+        <a:scrgbClr r="0" g="0" b="0"/>
+      </a:lnRef>
+      <a:fillRef idx="1">
+        <a:scrgbClr r="0" g="0" b="0"/>
+      </a:fillRef>
+      <a:effectRef idx="0">
+        <a:scrgbClr r="0" g="0" b="0"/>
+      </a:effectRef>
+      <a:fontRef idx="minor"/>
+    </dgm:style>
+  </dgm:styleLbl>
+  <dgm:styleLbl name="bgShp">
+    <dgm:scene3d>
+      <a:camera prst="orthographicFront"/>
+      <a:lightRig rig="threePt" dir="t"/>
+    </dgm:scene3d>
+    <dgm:sp3d/>
+    <dgm:txPr/>
+    <dgm:style>
+      <a:lnRef idx="0">
+        <a:scrgbClr r="0" g="0" b="0"/>
+      </a:lnRef>
+      <a:fillRef idx="1">
+        <a:scrgbClr r="0" g="0" b="0"/>
+      </a:fillRef>
+      <a:effectRef idx="2">
+        <a:scrgbClr r="0" g="0" b="0"/>
+      </a:effectRef>
+      <a:fontRef idx="minor"/>
+    </dgm:style>
+  </dgm:styleLbl>
+  <dgm:styleLbl name="dkBgShp">
+    <dgm:scene3d>
+      <a:camera prst="orthographicFront"/>
+      <a:lightRig rig="threePt" dir="t"/>
+    </dgm:scene3d>
+    <dgm:sp3d/>
+    <dgm:txPr/>
+    <dgm:style>
+      <a:lnRef idx="0">
+        <a:scrgbClr r="0" g="0" b="0"/>
+      </a:lnRef>
+      <a:fillRef idx="1">
+        <a:scrgbClr r="0" g="0" b="0"/>
+      </a:fillRef>
+      <a:effectRef idx="2">
+        <a:scrgbClr r="0" g="0" b="0"/>
+      </a:effectRef>
+      <a:fontRef idx="minor"/>
+    </dgm:style>
+  </dgm:styleLbl>
+  <dgm:styleLbl name="trBgShp">
+    <dgm:scene3d>
+      <a:camera prst="orthographicFront"/>
+      <a:lightRig rig="threePt" dir="t"/>
+    </dgm:scene3d>
+    <dgm:sp3d/>
+    <dgm:txPr/>
+    <dgm:style>
+      <a:lnRef idx="0">
+        <a:scrgbClr r="0" g="0" b="0"/>
+      </a:lnRef>
+      <a:fillRef idx="1">
+        <a:scrgbClr r="0" g="0" b="0"/>
+      </a:fillRef>
+      <a:effectRef idx="0">
+        <a:scrgbClr r="0" g="0" b="0"/>
+      </a:effectRef>
+      <a:fontRef idx="minor"/>
+    </dgm:style>
+  </dgm:styleLbl>
+  <dgm:styleLbl name="fgShp">
+    <dgm:scene3d>
+      <a:camera prst="orthographicFront"/>
+      <a:lightRig rig="threePt" dir="t"/>
+    </dgm:scene3d>
+    <dgm:sp3d/>
+    <dgm:txPr/>
+    <dgm:style>
+      <a:lnRef idx="0">
+        <a:scrgbClr r="0" g="0" b="0"/>
+      </a:lnRef>
+      <a:fillRef idx="3">
+        <a:scrgbClr r="0" g="0" b="0"/>
+      </a:fillRef>
+      <a:effectRef idx="2">
+        <a:scrgbClr r="0" g="0" b="0"/>
+      </a:effectRef>
+      <a:fontRef idx="minor"/>
+    </dgm:style>
+  </dgm:styleLbl>
+  <dgm:styleLbl name="revTx">
+    <dgm:scene3d>
+      <a:camera prst="orthographicFront"/>
+      <a:lightRig rig="threePt" dir="t"/>
+    </dgm:scene3d>
+    <dgm:sp3d/>
+    <dgm:txPr/>
+    <dgm:style>
+      <a:lnRef idx="0">
+        <a:scrgbClr r="0" g="0" b="0"/>
+      </a:lnRef>
+      <a:fillRef idx="0">
+        <a:scrgbClr r="0" g="0" b="0"/>
+      </a:fillRef>
+      <a:effectRef idx="0">
+        <a:scrgbClr r="0" g="0" b="0"/>
+      </a:effectRef>
+      <a:fontRef idx="minor"/>
+    </dgm:style>
+  </dgm:styleLbl>
+</dgm:styleDef>
+</file>
+
 <file path=ppt/slideLayouts/slideLayout1.xml><?xml version="1.0" encoding="utf-8"?>
 <p:sldLayout xmlns:a="http://schemas.openxmlformats.org/drawingml/2006/main" xmlns:r="http://schemas.openxmlformats.org/officeDocument/2006/relationships" xmlns:p="http://schemas.openxmlformats.org/presentationml/2006/main" type="title" preserve="1">
   <p:cSld name="Title Slide">
@@ -320,7 +4238,7 @@
           <a:p>
             <a:fld id="{9BCDCC4A-E03B-6448-9C99-B55A5820C7B7}" type="datetimeFigureOut">
               <a:rPr lang="en-US" smtClean="0"/>
-              <a:t>12/6/17</a:t>
+              <a:t>12/7/17</a:t>
             </a:fld>
             <a:endParaRPr lang="en-US"/>
           </a:p>
@@ -485,7 +4403,7 @@
           <a:p>
             <a:fld id="{9BCDCC4A-E03B-6448-9C99-B55A5820C7B7}" type="datetimeFigureOut">
               <a:rPr lang="en-US" smtClean="0"/>
-              <a:t>12/6/17</a:t>
+              <a:t>12/7/17</a:t>
             </a:fld>
             <a:endParaRPr lang="en-US"/>
           </a:p>
@@ -660,7 +4578,7 @@
           <a:p>
             <a:fld id="{9BCDCC4A-E03B-6448-9C99-B55A5820C7B7}" type="datetimeFigureOut">
               <a:rPr lang="en-US" smtClean="0"/>
-              <a:t>12/6/17</a:t>
+              <a:t>12/7/17</a:t>
             </a:fld>
             <a:endParaRPr lang="en-US"/>
           </a:p>
@@ -825,7 +4743,7 @@
           <a:p>
             <a:fld id="{9BCDCC4A-E03B-6448-9C99-B55A5820C7B7}" type="datetimeFigureOut">
               <a:rPr lang="en-US" smtClean="0"/>
-              <a:t>12/6/17</a:t>
+              <a:t>12/7/17</a:t>
             </a:fld>
             <a:endParaRPr lang="en-US"/>
           </a:p>
@@ -1064,7 +4982,7 @@
           <a:p>
             <a:fld id="{9BCDCC4A-E03B-6448-9C99-B55A5820C7B7}" type="datetimeFigureOut">
               <a:rPr lang="en-US" smtClean="0"/>
-              <a:t>12/6/17</a:t>
+              <a:t>12/7/17</a:t>
             </a:fld>
             <a:endParaRPr lang="en-US"/>
           </a:p>
@@ -1154,7 +5072,7 @@
           <a:p>
             <a:fld id="{9BCDCC4A-E03B-6448-9C99-B55A5820C7B7}" type="datetimeFigureOut">
               <a:rPr lang="en-US" smtClean="0"/>
-              <a:t>12/6/17</a:t>
+              <a:t>12/7/17</a:t>
             </a:fld>
             <a:endParaRPr lang="en-US"/>
           </a:p>
@@ -1528,7 +5446,7 @@
           <a:p>
             <a:fld id="{9BCDCC4A-E03B-6448-9C99-B55A5820C7B7}" type="datetimeFigureOut">
               <a:rPr lang="en-US" smtClean="0"/>
-              <a:t>12/6/17</a:t>
+              <a:t>12/7/17</a:t>
             </a:fld>
             <a:endParaRPr lang="en-US"/>
           </a:p>
@@ -1783,7 +5701,7 @@
           <a:p>
             <a:fld id="{9BCDCC4A-E03B-6448-9C99-B55A5820C7B7}" type="datetimeFigureOut">
               <a:rPr lang="en-US" smtClean="0"/>
-              <a:t>12/6/17</a:t>
+              <a:t>12/7/17</a:t>
             </a:fld>
             <a:endParaRPr lang="en-US"/>
           </a:p>
@@ -1873,7 +5791,7 @@
           <a:p>
             <a:fld id="{9BCDCC4A-E03B-6448-9C99-B55A5820C7B7}" type="datetimeFigureOut">
               <a:rPr lang="en-US" smtClean="0"/>
-              <a:t>12/6/17</a:t>
+              <a:t>12/7/17</a:t>
             </a:fld>
             <a:endParaRPr lang="en-US"/>
           </a:p>
@@ -2147,7 +6065,7 @@
           <a:p>
             <a:fld id="{9BCDCC4A-E03B-6448-9C99-B55A5820C7B7}" type="datetimeFigureOut">
               <a:rPr lang="en-US" smtClean="0"/>
-              <a:t>12/6/17</a:t>
+              <a:t>12/7/17</a:t>
             </a:fld>
             <a:endParaRPr lang="en-US"/>
           </a:p>
@@ -2419,7 +6337,7 @@
           <a:p>
             <a:fld id="{9BCDCC4A-E03B-6448-9C99-B55A5820C7B7}" type="datetimeFigureOut">
               <a:rPr lang="en-US" smtClean="0"/>
-              <a:t>12/6/17</a:t>
+              <a:t>12/7/17</a:t>
             </a:fld>
             <a:endParaRPr lang="en-US"/>
           </a:p>
@@ -2719,7 +6637,7 @@
           <a:p>
             <a:fld id="{9BCDCC4A-E03B-6448-9C99-B55A5820C7B7}" type="datetimeFigureOut">
               <a:rPr lang="en-US" smtClean="0"/>
-              <a:t>12/6/17</a:t>
+              <a:t>12/7/17</a:t>
             </a:fld>
             <a:endParaRPr lang="en-US"/>
           </a:p>
@@ -3216,7 +7134,6 @@
               <a:rPr lang="en-US" dirty="0" smtClean="0"/>
               <a:t>Boise State University</a:t>
             </a:r>
-            <a:endParaRPr lang="en-US" dirty="0" smtClean="0"/>
           </a:p>
         </p:txBody>
       </p:sp>
@@ -3260,19 +7177,14 @@
             <p:ph type="title"/>
           </p:nvPr>
         </p:nvSpPr>
-        <p:spPr>
-          <a:xfrm>
-            <a:off x="914400" y="591127"/>
-            <a:ext cx="7315200" cy="1154097"/>
-          </a:xfrm>
-        </p:spPr>
+        <p:spPr/>
         <p:txBody>
           <a:bodyPr/>
           <a:lstStyle/>
           <a:p>
             <a:r>
               <a:rPr lang="en-US" dirty="0" smtClean="0"/>
-              <a:t>Global Variables</a:t>
+              <a:t>Automatic Variables</a:t>
             </a:r>
             <a:endParaRPr lang="en-US" dirty="0"/>
           </a:p>
@@ -3317,46 +7229,97 @@
                 <a:ea typeface="Courier" charset="0"/>
                 <a:cs typeface="Courier" charset="0"/>
               </a:rPr>
-              <a:t> x=0;</a:t>
+              <a:t> sum(</a:t>
+            </a:r>
+            <a:r>
+              <a:rPr lang="en-US" sz="1800" dirty="0" err="1" smtClean="0">
+                <a:latin typeface="Courier" charset="0"/>
+                <a:ea typeface="Courier" charset="0"/>
+                <a:cs typeface="Courier" charset="0"/>
+              </a:rPr>
+              <a:t>int</a:t>
+            </a:r>
+            <a:r>
+              <a:rPr lang="en-US" sz="1800" dirty="0" smtClean="0">
+                <a:latin typeface="Courier" charset="0"/>
+                <a:ea typeface="Courier" charset="0"/>
+                <a:cs typeface="Courier" charset="0"/>
+              </a:rPr>
+              <a:t> x, </a:t>
+            </a:r>
+            <a:r>
+              <a:rPr lang="en-US" sz="1800" dirty="0" err="1" smtClean="0">
+                <a:latin typeface="Courier" charset="0"/>
+                <a:ea typeface="Courier" charset="0"/>
+                <a:cs typeface="Courier" charset="0"/>
+              </a:rPr>
+              <a:t>int</a:t>
+            </a:r>
+            <a:r>
+              <a:rPr lang="en-US" sz="1800" dirty="0" smtClean="0">
+                <a:latin typeface="Courier" charset="0"/>
+                <a:ea typeface="Courier" charset="0"/>
+                <a:cs typeface="Courier" charset="0"/>
+              </a:rPr>
+              <a:t> y) {</a:t>
             </a:r>
           </a:p>
           <a:p>
             <a:pPr marL="45720" indent="0">
               <a:buNone/>
             </a:pPr>
-            <a:endParaRPr lang="en-US" sz="1800" dirty="0">
-              <a:latin typeface="Courier" charset="0"/>
-              <a:ea typeface="Courier" charset="0"/>
-              <a:cs typeface="Courier" charset="0"/>
-            </a:endParaRPr>
+            <a:r>
+              <a:rPr lang="en-US" sz="1800" dirty="0">
+                <a:latin typeface="Courier" charset="0"/>
+                <a:ea typeface="Courier" charset="0"/>
+                <a:cs typeface="Courier" charset="0"/>
+              </a:rPr>
+              <a:t> </a:t>
+            </a:r>
+            <a:r>
+              <a:rPr lang="en-US" sz="1800" dirty="0" smtClean="0">
+                <a:latin typeface="Courier" charset="0"/>
+                <a:ea typeface="Courier" charset="0"/>
+                <a:cs typeface="Courier" charset="0"/>
+              </a:rPr>
+              <a:t>  </a:t>
+            </a:r>
+            <a:r>
+              <a:rPr lang="en-US" sz="1800" dirty="0" err="1" smtClean="0">
+                <a:latin typeface="Courier" charset="0"/>
+                <a:ea typeface="Courier" charset="0"/>
+                <a:cs typeface="Courier" charset="0"/>
+              </a:rPr>
+              <a:t>int</a:t>
+            </a:r>
+            <a:r>
+              <a:rPr lang="en-US" sz="1800" dirty="0" smtClean="0">
+                <a:latin typeface="Courier" charset="0"/>
+                <a:ea typeface="Courier" charset="0"/>
+                <a:cs typeface="Courier" charset="0"/>
+              </a:rPr>
+              <a:t> z;</a:t>
+            </a:r>
           </a:p>
           <a:p>
             <a:pPr marL="45720" indent="0">
               <a:buNone/>
             </a:pPr>
             <a:r>
+              <a:rPr lang="en-US" sz="1800" dirty="0">
+                <a:latin typeface="Courier" charset="0"/>
+                <a:ea typeface="Courier" charset="0"/>
+                <a:cs typeface="Courier" charset="0"/>
+              </a:rPr>
+              <a:t> </a:t>
+            </a:r>
+            <a:r>
               <a:rPr lang="en-US" sz="1800" dirty="0" smtClean="0">
                 <a:latin typeface="Courier" charset="0"/>
                 <a:ea typeface="Courier" charset="0"/>
                 <a:cs typeface="Courier" charset="0"/>
               </a:rPr>
-              <a:t>void </a:t>
-            </a:r>
-            <a:r>
-              <a:rPr lang="en-US" sz="1800" dirty="0" err="1" smtClean="0">
-                <a:latin typeface="Courier" charset="0"/>
-                <a:ea typeface="Courier" charset="0"/>
-                <a:cs typeface="Courier" charset="0"/>
-              </a:rPr>
-              <a:t>incX</a:t>
-            </a:r>
-            <a:r>
-              <a:rPr lang="en-US" sz="1800" dirty="0" smtClean="0">
-                <a:latin typeface="Courier" charset="0"/>
-                <a:ea typeface="Courier" charset="0"/>
-                <a:cs typeface="Courier" charset="0"/>
-              </a:rPr>
-              <a:t>() {</a:t>
+              <a:t>  z = x + y;</a:t>
             </a:r>
           </a:p>
           <a:p>
@@ -3364,12 +7327,20 @@
               <a:buNone/>
             </a:pPr>
             <a:r>
+              <a:rPr lang="en-US" sz="1800" dirty="0">
+                <a:latin typeface="Courier" charset="0"/>
+                <a:ea typeface="Courier" charset="0"/>
+                <a:cs typeface="Courier" charset="0"/>
+              </a:rPr>
+              <a:t> </a:t>
+            </a:r>
+            <a:r>
               <a:rPr lang="en-US" sz="1800" dirty="0" smtClean="0">
                 <a:latin typeface="Courier" charset="0"/>
                 <a:ea typeface="Courier" charset="0"/>
                 <a:cs typeface="Courier" charset="0"/>
               </a:rPr>
-              <a:t>	x++;</a:t>
+              <a:t>  return z;</a:t>
             </a:r>
           </a:p>
           <a:p>
@@ -3377,109 +7348,13 @@
               <a:buNone/>
             </a:pPr>
             <a:r>
-              <a:rPr lang="en-US" sz="1800" dirty="0" smtClean="0">
-                <a:latin typeface="Courier" charset="0"/>
-                <a:ea typeface="Courier" charset="0"/>
-                <a:cs typeface="Courier" charset="0"/>
-              </a:rPr>
-              <a:t>}</a:t>
-            </a:r>
-          </a:p>
-          <a:p>
-            <a:pPr marL="45720" indent="0">
-              <a:buNone/>
-            </a:pPr>
-            <a:endParaRPr lang="en-US" sz="1800" dirty="0">
-              <a:latin typeface="Courier" charset="0"/>
-              <a:ea typeface="Courier" charset="0"/>
-              <a:cs typeface="Courier" charset="0"/>
-            </a:endParaRPr>
-          </a:p>
-          <a:p>
-            <a:pPr marL="45720" indent="0">
-              <a:buNone/>
-            </a:pPr>
-            <a:r>
               <a:rPr lang="en-US" sz="1800" dirty="0">
                 <a:latin typeface="Courier" charset="0"/>
                 <a:ea typeface="Courier" charset="0"/>
                 <a:cs typeface="Courier" charset="0"/>
               </a:rPr>
-              <a:t>void </a:t>
-            </a:r>
-            <a:r>
-              <a:rPr lang="en-US" sz="1800" dirty="0" err="1" smtClean="0">
-                <a:latin typeface="Courier" charset="0"/>
-                <a:ea typeface="Courier" charset="0"/>
-                <a:cs typeface="Courier" charset="0"/>
-              </a:rPr>
-              <a:t>decX</a:t>
-            </a:r>
-            <a:r>
-              <a:rPr lang="en-US" sz="1800" dirty="0" smtClean="0">
-                <a:latin typeface="Courier" charset="0"/>
-                <a:ea typeface="Courier" charset="0"/>
-                <a:cs typeface="Courier" charset="0"/>
-              </a:rPr>
-              <a:t>() </a:t>
-            </a:r>
-            <a:r>
-              <a:rPr lang="en-US" sz="1800" dirty="0">
-                <a:latin typeface="Courier" charset="0"/>
-                <a:ea typeface="Courier" charset="0"/>
-                <a:cs typeface="Courier" charset="0"/>
-              </a:rPr>
-              <a:t>{</a:t>
-            </a:r>
-          </a:p>
-          <a:p>
-            <a:pPr marL="45720" indent="0">
-              <a:buNone/>
-            </a:pPr>
-            <a:r>
-              <a:rPr lang="en-US" sz="1800" dirty="0">
-                <a:latin typeface="Courier" charset="0"/>
-                <a:ea typeface="Courier" charset="0"/>
-                <a:cs typeface="Courier" charset="0"/>
-              </a:rPr>
-              <a:t>	</a:t>
-            </a:r>
-            <a:r>
-              <a:rPr lang="en-US" sz="1800" dirty="0" smtClean="0">
-                <a:latin typeface="Courier" charset="0"/>
-                <a:ea typeface="Courier" charset="0"/>
-                <a:cs typeface="Courier" charset="0"/>
-              </a:rPr>
-              <a:t>x--;</a:t>
-            </a:r>
-            <a:endParaRPr lang="en-US" sz="1800" dirty="0">
-              <a:latin typeface="Courier" charset="0"/>
-              <a:ea typeface="Courier" charset="0"/>
-              <a:cs typeface="Courier" charset="0"/>
-            </a:endParaRPr>
-          </a:p>
-          <a:p>
-            <a:pPr marL="45720" indent="0">
-              <a:buNone/>
-            </a:pPr>
-            <a:r>
-              <a:rPr lang="en-US" sz="1800" dirty="0">
-                <a:latin typeface="Courier" charset="0"/>
-                <a:ea typeface="Courier" charset="0"/>
-                <a:cs typeface="Courier" charset="0"/>
-              </a:rPr>
               <a:t>}</a:t>
             </a:r>
-          </a:p>
-          <a:p>
-            <a:pPr marL="45720" indent="0">
-              <a:buNone/>
-            </a:pPr>
-            <a:endParaRPr lang="en-US" sz="1800" dirty="0">
-              <a:latin typeface="Courier" charset="0"/>
-              <a:ea typeface="Courier" charset="0"/>
-              <a:cs typeface="Courier" charset="0"/>
-            </a:endParaRPr>
           </a:p>
         </p:txBody>
       </p:sp>
@@ -3500,41 +7375,44 @@
           </a:xfrm>
         </p:spPr>
         <p:txBody>
-          <a:bodyPr>
-            <a:normAutofit/>
-          </a:bodyPr>
+          <a:bodyPr/>
           <a:lstStyle/>
           <a:p>
             <a:r>
               <a:rPr lang="en-US" dirty="0" smtClean="0">
-                <a:ea typeface="Courier" charset="0"/>
-                <a:cs typeface="Courier" charset="0"/>
-              </a:rPr>
-              <a:t>x is a global, </a:t>
-            </a:r>
-            <a:r>
-              <a:rPr lang="en-US" dirty="0" err="1" smtClean="0">
                 <a:latin typeface="Courier" charset="0"/>
                 <a:ea typeface="Courier" charset="0"/>
                 <a:cs typeface="Courier" charset="0"/>
               </a:rPr>
-              <a:t>int</a:t>
+              <a:t>z</a:t>
             </a:r>
             <a:r>
               <a:rPr lang="en-US" dirty="0" smtClean="0">
                 <a:ea typeface="Courier" charset="0"/>
                 <a:cs typeface="Courier" charset="0"/>
               </a:rPr>
-              <a:t> variable</a:t>
-            </a:r>
-          </a:p>
-          <a:p>
+              <a:t> is an </a:t>
+            </a:r>
+            <a:r>
+              <a:rPr lang="en-US" i="1" dirty="0" smtClean="0">
+                <a:ea typeface="Courier" charset="0"/>
+                <a:cs typeface="Courier" charset="0"/>
+              </a:rPr>
+              <a:t>automatic</a:t>
+            </a:r>
             <a:r>
               <a:rPr lang="en-US" dirty="0" smtClean="0">
                 <a:ea typeface="Courier" charset="0"/>
                 <a:cs typeface="Courier" charset="0"/>
               </a:rPr>
-              <a:t>Its scope extends throughout the file that defines it, and can be accessed from another file</a:t>
+              <a:t> (local) </a:t>
+            </a:r>
+            <a:r>
+              <a:rPr lang="en-US" i="1" dirty="0" smtClean="0">
+                <a:ea typeface="Courier" charset="0"/>
+                <a:cs typeface="Courier" charset="0"/>
+              </a:rPr>
+              <a:t>variable</a:t>
             </a:r>
           </a:p>
           <a:p>
@@ -3543,43 +7421,44 @@
                 <a:ea typeface="Courier" charset="0"/>
                 <a:cs typeface="Courier" charset="0"/>
               </a:rPr>
-              <a:t>Storage is allocated when the program starts (before main)</a:t>
-            </a:r>
-          </a:p>
-          <a:p>
+              <a:t>Its scope is the compound statement (i.e. code block) in which it’s defined, here</a:t>
+            </a:r>
+            <a:r>
+              <a:rPr lang="mr-IN" dirty="0" smtClean="0">
+                <a:ea typeface="Courier" charset="0"/>
+                <a:cs typeface="Courier" charset="0"/>
+              </a:rPr>
+              <a:t>…</a:t>
+            </a:r>
             <a:r>
               <a:rPr lang="en-US" dirty="0" smtClean="0">
                 <a:ea typeface="Courier" charset="0"/>
                 <a:cs typeface="Courier" charset="0"/>
               </a:rPr>
-              <a:t>While it is akin to an initialized public static variable in java</a:t>
-            </a:r>
-            <a:r>
-              <a:rPr lang="mr-IN" dirty="0" smtClean="0">
-                <a:ea typeface="Courier" charset="0"/>
-                <a:cs typeface="Courier" charset="0"/>
-              </a:rPr>
-              <a:t>…</a:t>
-            </a:r>
-            <a:endParaRPr lang="en-US" dirty="0" smtClean="0">
-              <a:ea typeface="Courier" charset="0"/>
-              <a:cs typeface="Courier" charset="0"/>
-            </a:endParaRPr>
-          </a:p>
-          <a:p>
-            <a:r>
-              <a:rPr lang="en-US" i="1" dirty="0" smtClean="0">
-                <a:ea typeface="Courier" charset="0"/>
-                <a:cs typeface="Courier" charset="0"/>
-              </a:rPr>
-              <a:t>Static</a:t>
-            </a:r>
+              <a:t> everything between { and }</a:t>
+            </a:r>
+          </a:p>
+          <a:p>
             <a:r>
               <a:rPr lang="en-US" dirty="0" smtClean="0">
                 <a:ea typeface="Courier" charset="0"/>
                 <a:cs typeface="Courier" charset="0"/>
               </a:rPr>
-              <a:t> means something very different in C</a:t>
+              <a:t>Storage for automatic variables is allocated when the function is invoked, and </a:t>
+            </a:r>
+            <a:r>
+              <a:rPr lang="en-US" dirty="0" smtClean="0">
+                <a:ea typeface="Courier" charset="0"/>
+                <a:cs typeface="Courier" charset="0"/>
+              </a:rPr>
+              <a:t>freed when </a:t>
+            </a:r>
+            <a:r>
+              <a:rPr lang="en-US" dirty="0" smtClean="0">
+                <a:ea typeface="Courier" charset="0"/>
+                <a:cs typeface="Courier" charset="0"/>
+              </a:rPr>
+              <a:t>the function returns</a:t>
             </a:r>
             <a:endParaRPr lang="en-US" dirty="0">
               <a:ea typeface="Courier" charset="0"/>
@@ -3591,7 +7470,7 @@
     </p:spTree>
     <p:extLst>
       <p:ext uri="{BB962C8B-B14F-4D97-AF65-F5344CB8AC3E}">
-        <p14:creationId xmlns:p14="http://schemas.microsoft.com/office/powerpoint/2010/main" val="96377169"/>
+        <p14:creationId xmlns:p14="http://schemas.microsoft.com/office/powerpoint/2010/main" val="1766873702"/>
       </p:ext>
     </p:extLst>
   </p:cSld>
@@ -3635,21 +7514,12 @@
           </a:xfrm>
         </p:spPr>
         <p:txBody>
-          <a:bodyPr>
-            <a:normAutofit fontScale="90000"/>
-          </a:bodyPr>
+          <a:bodyPr/>
           <a:lstStyle/>
           <a:p>
             <a:r>
               <a:rPr lang="en-US" dirty="0" smtClean="0"/>
-              <a:t>Static Variables in C:</a:t>
-            </a:r>
-            <a:br>
-              <a:rPr lang="en-US" dirty="0" smtClean="0"/>
-            </a:br>
-            <a:r>
-              <a:rPr lang="en-US" dirty="0" smtClean="0"/>
-              <a:t>Different than Java</a:t>
+              <a:t>External Variables</a:t>
             </a:r>
             <a:endParaRPr lang="en-US" dirty="0"/>
           </a:p>
@@ -3681,14 +7551,6 @@
               <a:buNone/>
             </a:pPr>
             <a:r>
-              <a:rPr lang="en-US" sz="1800" dirty="0" smtClean="0">
-                <a:latin typeface="Courier" charset="0"/>
-                <a:ea typeface="Courier" charset="0"/>
-                <a:cs typeface="Courier" charset="0"/>
-              </a:rPr>
-              <a:t>static </a:t>
-            </a:r>
-            <a:r>
               <a:rPr lang="en-US" sz="1800" dirty="0" err="1" smtClean="0">
                 <a:latin typeface="Courier" charset="0"/>
                 <a:ea typeface="Courier" charset="0"/>
@@ -3886,7 +7748,7 @@
         </p:spPr>
         <p:txBody>
           <a:bodyPr>
-            <a:normAutofit lnSpcReduction="10000"/>
+            <a:normAutofit fontScale="92500"/>
           </a:bodyPr>
           <a:lstStyle/>
           <a:p>
@@ -3895,17 +7757,19 @@
                 <a:ea typeface="Courier" charset="0"/>
                 <a:cs typeface="Courier" charset="0"/>
               </a:rPr>
-              <a:t>x is a static, global variable</a:t>
-            </a:r>
-          </a:p>
-          <a:p>
+              <a:t>x is </a:t>
+            </a:r>
             <a:r>
               <a:rPr lang="en-US" dirty="0" smtClean="0">
                 <a:ea typeface="Courier" charset="0"/>
                 <a:cs typeface="Courier" charset="0"/>
               </a:rPr>
-              <a:t>Its scope extends throughout the file that defines it</a:t>
-            </a:r>
+              <a:t>defined external to all the functions in the file that defines it</a:t>
+            </a:r>
+            <a:endParaRPr lang="en-US" dirty="0" smtClean="0">
+              <a:ea typeface="Courier" charset="0"/>
+              <a:cs typeface="Courier" charset="0"/>
+            </a:endParaRPr>
           </a:p>
           <a:p>
             <a:r>
@@ -3913,15 +7777,40 @@
                 <a:ea typeface="Courier" charset="0"/>
                 <a:cs typeface="Courier" charset="0"/>
               </a:rPr>
-              <a:t>Statics are invisible outside the file in which they are defined</a:t>
-            </a:r>
-          </a:p>
-          <a:p>
+              <a:t>Its scope </a:t>
+            </a:r>
             <a:r>
               <a:rPr lang="en-US" dirty="0" smtClean="0">
                 <a:ea typeface="Courier" charset="0"/>
                 <a:cs typeface="Courier" charset="0"/>
               </a:rPr>
+              <a:t>extends throughout that file </a:t>
+            </a:r>
+            <a:r>
+              <a:rPr lang="en-US" dirty="0" smtClean="0">
+                <a:ea typeface="Courier" charset="0"/>
+                <a:cs typeface="Courier" charset="0"/>
+              </a:rPr>
+              <a:t>and can be accessed </a:t>
+            </a:r>
+            <a:r>
+              <a:rPr lang="en-US" dirty="0" smtClean="0">
+                <a:ea typeface="Courier" charset="0"/>
+                <a:cs typeface="Courier" charset="0"/>
+              </a:rPr>
+              <a:t>globally from other files</a:t>
+            </a:r>
+            <a:endParaRPr lang="en-US" dirty="0" smtClean="0">
+              <a:ea typeface="Courier" charset="0"/>
+              <a:cs typeface="Courier" charset="0"/>
+            </a:endParaRPr>
+          </a:p>
+          <a:p>
+            <a:r>
+              <a:rPr lang="en-US" dirty="0" smtClean="0">
+                <a:ea typeface="Courier" charset="0"/>
+                <a:cs typeface="Courier" charset="0"/>
+              </a:rPr>
               <a:t>Storage is allocated when the program starts (before main)</a:t>
             </a:r>
           </a:p>
@@ -3931,7 +7820,495 @@
                 <a:ea typeface="Courier" charset="0"/>
                 <a:cs typeface="Courier" charset="0"/>
               </a:rPr>
-              <a:t>It is akin to an initialized private static variable in java</a:t>
+              <a:t>While it is akin to </a:t>
+            </a:r>
+            <a:r>
+              <a:rPr lang="en-US" dirty="0" smtClean="0">
+                <a:ea typeface="Courier" charset="0"/>
+                <a:cs typeface="Courier" charset="0"/>
+              </a:rPr>
+              <a:t>a public </a:t>
+            </a:r>
+            <a:r>
+              <a:rPr lang="en-US" dirty="0" smtClean="0">
+                <a:ea typeface="Courier" charset="0"/>
+                <a:cs typeface="Courier" charset="0"/>
+              </a:rPr>
+              <a:t>static variable in java</a:t>
+            </a:r>
+            <a:r>
+              <a:rPr lang="mr-IN" dirty="0" smtClean="0">
+                <a:ea typeface="Courier" charset="0"/>
+                <a:cs typeface="Courier" charset="0"/>
+              </a:rPr>
+              <a:t>…</a:t>
+            </a:r>
+            <a:endParaRPr lang="en-US" dirty="0" smtClean="0">
+              <a:ea typeface="Courier" charset="0"/>
+              <a:cs typeface="Courier" charset="0"/>
+            </a:endParaRPr>
+          </a:p>
+          <a:p>
+            <a:r>
+              <a:rPr lang="en-US" dirty="0" smtClean="0">
+                <a:ea typeface="Courier" charset="0"/>
+                <a:cs typeface="Courier" charset="0"/>
+              </a:rPr>
+              <a:t>The</a:t>
+            </a:r>
+            <a:r>
+              <a:rPr lang="en-US" i="1" dirty="0" smtClean="0">
+                <a:ea typeface="Courier" charset="0"/>
+                <a:cs typeface="Courier" charset="0"/>
+              </a:rPr>
+              <a:t> static</a:t>
+            </a:r>
+            <a:r>
+              <a:rPr lang="en-US" dirty="0" smtClean="0">
+                <a:ea typeface="Courier" charset="0"/>
+                <a:cs typeface="Courier" charset="0"/>
+              </a:rPr>
+              <a:t> keyword means something different </a:t>
+            </a:r>
+            <a:r>
+              <a:rPr lang="en-US" dirty="0" smtClean="0">
+                <a:ea typeface="Courier" charset="0"/>
+                <a:cs typeface="Courier" charset="0"/>
+              </a:rPr>
+              <a:t>in C</a:t>
+            </a:r>
+            <a:endParaRPr lang="en-US" dirty="0">
+              <a:ea typeface="Courier" charset="0"/>
+              <a:cs typeface="Courier" charset="0"/>
+            </a:endParaRPr>
+          </a:p>
+        </p:txBody>
+      </p:sp>
+    </p:spTree>
+    <p:extLst>
+      <p:ext uri="{BB962C8B-B14F-4D97-AF65-F5344CB8AC3E}">
+        <p14:creationId xmlns:p14="http://schemas.microsoft.com/office/powerpoint/2010/main" val="96377169"/>
+      </p:ext>
+    </p:extLst>
+  </p:cSld>
+  <p:clrMapOvr>
+    <a:masterClrMapping/>
+  </p:clrMapOvr>
+</p:sld>
+</file>
+
+<file path=ppt/slides/slide12.xml><?xml version="1.0" encoding="utf-8"?>
+<p:sld xmlns:a="http://schemas.openxmlformats.org/drawingml/2006/main" xmlns:r="http://schemas.openxmlformats.org/officeDocument/2006/relationships" xmlns:p="http://schemas.openxmlformats.org/presentationml/2006/main">
+  <p:cSld>
+    <p:spTree>
+      <p:nvGrpSpPr>
+        <p:cNvPr id="1" name=""/>
+        <p:cNvGrpSpPr/>
+        <p:nvPr/>
+      </p:nvGrpSpPr>
+      <p:grpSpPr>
+        <a:xfrm>
+          <a:off x="0" y="0"/>
+          <a:ext cx="0" cy="0"/>
+          <a:chOff x="0" y="0"/>
+          <a:chExt cx="0" cy="0"/>
+        </a:xfrm>
+      </p:grpSpPr>
+      <p:sp>
+        <p:nvSpPr>
+          <p:cNvPr id="2" name="Title 1"/>
+          <p:cNvSpPr>
+            <a:spLocks noGrp="1"/>
+          </p:cNvSpPr>
+          <p:nvPr>
+            <p:ph type="title"/>
+          </p:nvPr>
+        </p:nvSpPr>
+        <p:spPr>
+          <a:xfrm>
+            <a:off x="914400" y="591127"/>
+            <a:ext cx="7315200" cy="1154097"/>
+          </a:xfrm>
+        </p:spPr>
+        <p:txBody>
+          <a:bodyPr>
+            <a:normAutofit/>
+          </a:bodyPr>
+          <a:lstStyle/>
+          <a:p>
+            <a:r>
+              <a:rPr lang="en-US" dirty="0" smtClean="0"/>
+              <a:t>External Static </a:t>
+            </a:r>
+            <a:r>
+              <a:rPr lang="en-US" dirty="0" smtClean="0"/>
+              <a:t>Variables in </a:t>
+            </a:r>
+            <a:r>
+              <a:rPr lang="en-US" dirty="0" smtClean="0"/>
+              <a:t>C</a:t>
+            </a:r>
+            <a:endParaRPr lang="en-US" dirty="0"/>
+          </a:p>
+        </p:txBody>
+      </p:sp>
+      <p:sp>
+        <p:nvSpPr>
+          <p:cNvPr id="4" name="Content Placeholder 3"/>
+          <p:cNvSpPr>
+            <a:spLocks noGrp="1"/>
+          </p:cNvSpPr>
+          <p:nvPr>
+            <p:ph sz="quarter" idx="13"/>
+          </p:nvPr>
+        </p:nvSpPr>
+        <p:spPr>
+          <a:xfrm>
+            <a:off x="548640" y="2743200"/>
+            <a:ext cx="3931920" cy="3593592"/>
+          </a:xfrm>
+        </p:spPr>
+        <p:txBody>
+          <a:bodyPr>
+            <a:normAutofit/>
+          </a:bodyPr>
+          <a:lstStyle/>
+          <a:p>
+            <a:pPr marL="45720" indent="0">
+              <a:buNone/>
+            </a:pPr>
+            <a:r>
+              <a:rPr lang="en-US" sz="1800" dirty="0" smtClean="0">
+                <a:latin typeface="Courier" charset="0"/>
+                <a:ea typeface="Courier" charset="0"/>
+                <a:cs typeface="Courier" charset="0"/>
+              </a:rPr>
+              <a:t>static </a:t>
+            </a:r>
+            <a:r>
+              <a:rPr lang="en-US" sz="1800" dirty="0" err="1" smtClean="0">
+                <a:latin typeface="Courier" charset="0"/>
+                <a:ea typeface="Courier" charset="0"/>
+                <a:cs typeface="Courier" charset="0"/>
+              </a:rPr>
+              <a:t>int</a:t>
+            </a:r>
+            <a:r>
+              <a:rPr lang="en-US" sz="1800" dirty="0" smtClean="0">
+                <a:latin typeface="Courier" charset="0"/>
+                <a:ea typeface="Courier" charset="0"/>
+                <a:cs typeface="Courier" charset="0"/>
+              </a:rPr>
+              <a:t> x=0;</a:t>
+            </a:r>
+          </a:p>
+          <a:p>
+            <a:pPr marL="45720" indent="0">
+              <a:buNone/>
+            </a:pPr>
+            <a:endParaRPr lang="en-US" sz="1800" dirty="0">
+              <a:latin typeface="Courier" charset="0"/>
+              <a:ea typeface="Courier" charset="0"/>
+              <a:cs typeface="Courier" charset="0"/>
+            </a:endParaRPr>
+          </a:p>
+          <a:p>
+            <a:pPr marL="45720" indent="0">
+              <a:buNone/>
+            </a:pPr>
+            <a:r>
+              <a:rPr lang="en-US" sz="1800" dirty="0" smtClean="0">
+                <a:latin typeface="Courier" charset="0"/>
+                <a:ea typeface="Courier" charset="0"/>
+                <a:cs typeface="Courier" charset="0"/>
+              </a:rPr>
+              <a:t>void </a:t>
+            </a:r>
+            <a:r>
+              <a:rPr lang="en-US" sz="1800" dirty="0" err="1" smtClean="0">
+                <a:latin typeface="Courier" charset="0"/>
+                <a:ea typeface="Courier" charset="0"/>
+                <a:cs typeface="Courier" charset="0"/>
+              </a:rPr>
+              <a:t>incX</a:t>
+            </a:r>
+            <a:r>
+              <a:rPr lang="en-US" sz="1800" dirty="0" smtClean="0">
+                <a:latin typeface="Courier" charset="0"/>
+                <a:ea typeface="Courier" charset="0"/>
+                <a:cs typeface="Courier" charset="0"/>
+              </a:rPr>
+              <a:t>() {</a:t>
+            </a:r>
+          </a:p>
+          <a:p>
+            <a:pPr marL="45720" indent="0">
+              <a:buNone/>
+            </a:pPr>
+            <a:r>
+              <a:rPr lang="en-US" sz="1800" dirty="0" smtClean="0">
+                <a:latin typeface="Courier" charset="0"/>
+                <a:ea typeface="Courier" charset="0"/>
+                <a:cs typeface="Courier" charset="0"/>
+              </a:rPr>
+              <a:t>	x++;</a:t>
+            </a:r>
+          </a:p>
+          <a:p>
+            <a:pPr marL="45720" indent="0">
+              <a:buNone/>
+            </a:pPr>
+            <a:r>
+              <a:rPr lang="en-US" sz="1800" dirty="0" smtClean="0">
+                <a:latin typeface="Courier" charset="0"/>
+                <a:ea typeface="Courier" charset="0"/>
+                <a:cs typeface="Courier" charset="0"/>
+              </a:rPr>
+              <a:t>}</a:t>
+            </a:r>
+          </a:p>
+          <a:p>
+            <a:pPr marL="45720" indent="0">
+              <a:buNone/>
+            </a:pPr>
+            <a:endParaRPr lang="en-US" sz="1800" dirty="0">
+              <a:latin typeface="Courier" charset="0"/>
+              <a:ea typeface="Courier" charset="0"/>
+              <a:cs typeface="Courier" charset="0"/>
+            </a:endParaRPr>
+          </a:p>
+          <a:p>
+            <a:pPr marL="45720" indent="0">
+              <a:buNone/>
+            </a:pPr>
+            <a:r>
+              <a:rPr lang="en-US" sz="1800" dirty="0">
+                <a:latin typeface="Courier" charset="0"/>
+                <a:ea typeface="Courier" charset="0"/>
+                <a:cs typeface="Courier" charset="0"/>
+              </a:rPr>
+              <a:t>void </a:t>
+            </a:r>
+            <a:r>
+              <a:rPr lang="en-US" sz="1800" dirty="0" err="1" smtClean="0">
+                <a:latin typeface="Courier" charset="0"/>
+                <a:ea typeface="Courier" charset="0"/>
+                <a:cs typeface="Courier" charset="0"/>
+              </a:rPr>
+              <a:t>decX</a:t>
+            </a:r>
+            <a:r>
+              <a:rPr lang="en-US" sz="1800" dirty="0" smtClean="0">
+                <a:latin typeface="Courier" charset="0"/>
+                <a:ea typeface="Courier" charset="0"/>
+                <a:cs typeface="Courier" charset="0"/>
+              </a:rPr>
+              <a:t>() </a:t>
+            </a:r>
+            <a:r>
+              <a:rPr lang="en-US" sz="1800" dirty="0">
+                <a:latin typeface="Courier" charset="0"/>
+                <a:ea typeface="Courier" charset="0"/>
+                <a:cs typeface="Courier" charset="0"/>
+              </a:rPr>
+              <a:t>{</a:t>
+            </a:r>
+          </a:p>
+          <a:p>
+            <a:pPr marL="45720" indent="0">
+              <a:buNone/>
+            </a:pPr>
+            <a:r>
+              <a:rPr lang="en-US" sz="1800" dirty="0">
+                <a:latin typeface="Courier" charset="0"/>
+                <a:ea typeface="Courier" charset="0"/>
+                <a:cs typeface="Courier" charset="0"/>
+              </a:rPr>
+              <a:t>	</a:t>
+            </a:r>
+            <a:r>
+              <a:rPr lang="en-US" sz="1800" dirty="0" smtClean="0">
+                <a:latin typeface="Courier" charset="0"/>
+                <a:ea typeface="Courier" charset="0"/>
+                <a:cs typeface="Courier" charset="0"/>
+              </a:rPr>
+              <a:t>x--;</a:t>
+            </a:r>
+            <a:endParaRPr lang="en-US" sz="1800" dirty="0">
+              <a:latin typeface="Courier" charset="0"/>
+              <a:ea typeface="Courier" charset="0"/>
+              <a:cs typeface="Courier" charset="0"/>
+            </a:endParaRPr>
+          </a:p>
+          <a:p>
+            <a:pPr marL="45720" indent="0">
+              <a:buNone/>
+            </a:pPr>
+            <a:r>
+              <a:rPr lang="en-US" sz="1800" dirty="0">
+                <a:latin typeface="Courier" charset="0"/>
+                <a:ea typeface="Courier" charset="0"/>
+                <a:cs typeface="Courier" charset="0"/>
+              </a:rPr>
+              <a:t>}</a:t>
+            </a:r>
+          </a:p>
+          <a:p>
+            <a:pPr marL="45720" indent="0">
+              <a:buNone/>
+            </a:pPr>
+            <a:endParaRPr lang="en-US" sz="1800" dirty="0">
+              <a:latin typeface="Courier" charset="0"/>
+              <a:ea typeface="Courier" charset="0"/>
+              <a:cs typeface="Courier" charset="0"/>
+            </a:endParaRPr>
+          </a:p>
+        </p:txBody>
+      </p:sp>
+      <p:sp>
+        <p:nvSpPr>
+          <p:cNvPr id="5" name="Content Placeholder 4"/>
+          <p:cNvSpPr>
+            <a:spLocks noGrp="1"/>
+          </p:cNvSpPr>
+          <p:nvPr>
+            <p:ph sz="quarter" idx="14"/>
+          </p:nvPr>
+        </p:nvSpPr>
+        <p:spPr>
+          <a:xfrm>
+            <a:off x="4681727" y="2743200"/>
+            <a:ext cx="3926695" cy="3595687"/>
+          </a:xfrm>
+        </p:spPr>
+        <p:txBody>
+          <a:bodyPr>
+            <a:normAutofit fontScale="85000" lnSpcReduction="10000"/>
+          </a:bodyPr>
+          <a:lstStyle/>
+          <a:p>
+            <a:r>
+              <a:rPr lang="en-US" dirty="0" smtClean="0">
+                <a:ea typeface="Courier" charset="0"/>
+                <a:cs typeface="Courier" charset="0"/>
+              </a:rPr>
+              <a:t>x is a </a:t>
+            </a:r>
+            <a:r>
+              <a:rPr lang="en-US" dirty="0" smtClean="0">
+                <a:ea typeface="Courier" charset="0"/>
+                <a:cs typeface="Courier" charset="0"/>
+              </a:rPr>
+              <a:t>static external variable</a:t>
+            </a:r>
+          </a:p>
+          <a:p>
+            <a:r>
+              <a:rPr lang="en-US" dirty="0" smtClean="0">
+                <a:ea typeface="Courier" charset="0"/>
+                <a:cs typeface="Courier" charset="0"/>
+              </a:rPr>
+              <a:t>It’s </a:t>
+            </a:r>
+            <a:r>
+              <a:rPr lang="en-US" i="1" dirty="0" smtClean="0">
+                <a:ea typeface="Courier" charset="0"/>
+                <a:cs typeface="Courier" charset="0"/>
+              </a:rPr>
+              <a:t>external</a:t>
+            </a:r>
+            <a:r>
+              <a:rPr lang="en-US" dirty="0" smtClean="0">
+                <a:ea typeface="Courier" charset="0"/>
+                <a:cs typeface="Courier" charset="0"/>
+              </a:rPr>
+              <a:t> because it’s defined externally to any function in this file</a:t>
+            </a:r>
+            <a:endParaRPr lang="en-US" dirty="0" smtClean="0">
+              <a:ea typeface="Courier" charset="0"/>
+              <a:cs typeface="Courier" charset="0"/>
+            </a:endParaRPr>
+          </a:p>
+          <a:p>
+            <a:r>
+              <a:rPr lang="en-US" dirty="0" smtClean="0">
+                <a:ea typeface="Courier" charset="0"/>
+                <a:cs typeface="Courier" charset="0"/>
+              </a:rPr>
+              <a:t>Its scope extends throughout the file </a:t>
+            </a:r>
+            <a:r>
+              <a:rPr lang="en-US" dirty="0" smtClean="0">
+                <a:ea typeface="Courier" charset="0"/>
+                <a:cs typeface="Courier" charset="0"/>
+              </a:rPr>
+              <a:t>defining </a:t>
+            </a:r>
+            <a:r>
+              <a:rPr lang="en-US" dirty="0" smtClean="0">
+                <a:ea typeface="Courier" charset="0"/>
+                <a:cs typeface="Courier" charset="0"/>
+              </a:rPr>
+              <a:t>it</a:t>
+            </a:r>
+          </a:p>
+          <a:p>
+            <a:r>
+              <a:rPr lang="en-US" dirty="0" smtClean="0">
+                <a:ea typeface="Courier" charset="0"/>
+                <a:cs typeface="Courier" charset="0"/>
+              </a:rPr>
+              <a:t>Static variables are </a:t>
+            </a:r>
+            <a:r>
+              <a:rPr lang="en-US" dirty="0" smtClean="0">
+                <a:ea typeface="Courier" charset="0"/>
+                <a:cs typeface="Courier" charset="0"/>
+              </a:rPr>
+              <a:t>invisible outside the file </a:t>
+            </a:r>
+            <a:r>
+              <a:rPr lang="en-US" dirty="0" smtClean="0">
+                <a:ea typeface="Courier" charset="0"/>
+                <a:cs typeface="Courier" charset="0"/>
+              </a:rPr>
+              <a:t>that defines them</a:t>
+            </a:r>
+            <a:endParaRPr lang="en-US" dirty="0" smtClean="0">
+              <a:ea typeface="Courier" charset="0"/>
+              <a:cs typeface="Courier" charset="0"/>
+            </a:endParaRPr>
+          </a:p>
+          <a:p>
+            <a:r>
+              <a:rPr lang="en-US" dirty="0" smtClean="0">
+                <a:ea typeface="Courier" charset="0"/>
+                <a:cs typeface="Courier" charset="0"/>
+              </a:rPr>
+              <a:t>Storage is allocated when the program starts (before main)</a:t>
+            </a:r>
+          </a:p>
+          <a:p>
+            <a:r>
+              <a:rPr lang="en-US" dirty="0" smtClean="0">
+                <a:ea typeface="Courier" charset="0"/>
+                <a:cs typeface="Courier" charset="0"/>
+              </a:rPr>
+              <a:t>It is akin to </a:t>
+            </a:r>
+            <a:r>
+              <a:rPr lang="en-US" dirty="0" smtClean="0">
+                <a:ea typeface="Courier" charset="0"/>
+                <a:cs typeface="Courier" charset="0"/>
+              </a:rPr>
+              <a:t>a private </a:t>
+            </a:r>
+            <a:r>
+              <a:rPr lang="en-US" dirty="0" smtClean="0">
+                <a:ea typeface="Courier" charset="0"/>
+                <a:cs typeface="Courier" charset="0"/>
+              </a:rPr>
+              <a:t>static variable in java</a:t>
             </a:r>
           </a:p>
           <a:p>
@@ -3949,6 +8326,683 @@
     <p:extLst>
       <p:ext uri="{BB962C8B-B14F-4D97-AF65-F5344CB8AC3E}">
         <p14:creationId xmlns:p14="http://schemas.microsoft.com/office/powerpoint/2010/main" val="612180837"/>
+      </p:ext>
+    </p:extLst>
+  </p:cSld>
+  <p:clrMapOvr>
+    <a:masterClrMapping/>
+  </p:clrMapOvr>
+</p:sld>
+</file>
+
+<file path=ppt/slides/slide13.xml><?xml version="1.0" encoding="utf-8"?>
+<p:sld xmlns:a="http://schemas.openxmlformats.org/drawingml/2006/main" xmlns:r="http://schemas.openxmlformats.org/officeDocument/2006/relationships" xmlns:p="http://schemas.openxmlformats.org/presentationml/2006/main">
+  <p:cSld>
+    <p:spTree>
+      <p:nvGrpSpPr>
+        <p:cNvPr id="1" name=""/>
+        <p:cNvGrpSpPr/>
+        <p:nvPr/>
+      </p:nvGrpSpPr>
+      <p:grpSpPr>
+        <a:xfrm>
+          <a:off x="0" y="0"/>
+          <a:ext cx="0" cy="0"/>
+          <a:chOff x="0" y="0"/>
+          <a:chExt cx="0" cy="0"/>
+        </a:xfrm>
+      </p:grpSpPr>
+      <p:sp>
+        <p:nvSpPr>
+          <p:cNvPr id="2" name="Title 1"/>
+          <p:cNvSpPr>
+            <a:spLocks noGrp="1"/>
+          </p:cNvSpPr>
+          <p:nvPr>
+            <p:ph type="title"/>
+          </p:nvPr>
+        </p:nvSpPr>
+        <p:spPr>
+          <a:xfrm>
+            <a:off x="914400" y="578064"/>
+            <a:ext cx="7315200" cy="1154097"/>
+          </a:xfrm>
+        </p:spPr>
+        <p:txBody>
+          <a:bodyPr/>
+          <a:lstStyle/>
+          <a:p>
+            <a:r>
+              <a:rPr lang="en-US" dirty="0" smtClean="0"/>
+              <a:t>Poll:  Variables</a:t>
+            </a:r>
+            <a:endParaRPr lang="en-US" dirty="0"/>
+          </a:p>
+        </p:txBody>
+      </p:sp>
+      <p:sp>
+        <p:nvSpPr>
+          <p:cNvPr id="5" name="Content Placeholder 4"/>
+          <p:cNvSpPr>
+            <a:spLocks noGrp="1"/>
+          </p:cNvSpPr>
+          <p:nvPr>
+            <p:ph idx="1"/>
+          </p:nvPr>
+        </p:nvSpPr>
+        <p:spPr/>
+        <p:txBody>
+          <a:bodyPr/>
+          <a:lstStyle/>
+          <a:p>
+            <a:pPr marL="502920" indent="-457200">
+              <a:buFont typeface="+mj-lt"/>
+              <a:buAutoNum type="arabicPeriod"/>
+            </a:pPr>
+            <a:r>
+              <a:rPr lang="en-US" dirty="0" smtClean="0"/>
+              <a:t>What is the scope of an automatic variable in C?</a:t>
+            </a:r>
+          </a:p>
+          <a:p>
+            <a:pPr marL="502920" indent="-457200">
+              <a:buFont typeface="+mj-lt"/>
+              <a:buAutoNum type="arabicPeriod"/>
+            </a:pPr>
+            <a:r>
+              <a:rPr lang="en-US" dirty="0" smtClean="0"/>
+              <a:t>What is the scope of an external static variable in C?</a:t>
+            </a:r>
+          </a:p>
+        </p:txBody>
+      </p:sp>
+    </p:spTree>
+    <p:extLst>
+      <p:ext uri="{BB962C8B-B14F-4D97-AF65-F5344CB8AC3E}">
+        <p14:creationId xmlns:p14="http://schemas.microsoft.com/office/powerpoint/2010/main" val="1818755927"/>
+      </p:ext>
+    </p:extLst>
+  </p:cSld>
+  <p:clrMapOvr>
+    <a:masterClrMapping/>
+  </p:clrMapOvr>
+</p:sld>
+</file>
+
+<file path=ppt/slides/slide14.xml><?xml version="1.0" encoding="utf-8"?>
+<p:sld xmlns:a="http://schemas.openxmlformats.org/drawingml/2006/main" xmlns:r="http://schemas.openxmlformats.org/officeDocument/2006/relationships" xmlns:p="http://schemas.openxmlformats.org/presentationml/2006/main">
+  <p:cSld>
+    <p:spTree>
+      <p:nvGrpSpPr>
+        <p:cNvPr id="1" name=""/>
+        <p:cNvGrpSpPr/>
+        <p:nvPr/>
+      </p:nvGrpSpPr>
+      <p:grpSpPr>
+        <a:xfrm>
+          <a:off x="0" y="0"/>
+          <a:ext cx="0" cy="0"/>
+          <a:chOff x="0" y="0"/>
+          <a:chExt cx="0" cy="0"/>
+        </a:xfrm>
+      </p:grpSpPr>
+      <p:sp>
+        <p:nvSpPr>
+          <p:cNvPr id="2" name="Title 1"/>
+          <p:cNvSpPr>
+            <a:spLocks noGrp="1"/>
+          </p:cNvSpPr>
+          <p:nvPr>
+            <p:ph type="title"/>
+          </p:nvPr>
+        </p:nvSpPr>
+        <p:spPr>
+          <a:xfrm>
+            <a:off x="914400" y="603421"/>
+            <a:ext cx="7315200" cy="1154097"/>
+          </a:xfrm>
+        </p:spPr>
+        <p:txBody>
+          <a:bodyPr>
+            <a:normAutofit fontScale="90000"/>
+          </a:bodyPr>
+          <a:lstStyle/>
+          <a:p>
+            <a:r>
+              <a:rPr lang="en-US" dirty="0" smtClean="0"/>
+              <a:t>Omissions to be Addressed Later</a:t>
+            </a:r>
+            <a:endParaRPr lang="en-US" dirty="0"/>
+          </a:p>
+        </p:txBody>
+      </p:sp>
+      <p:sp>
+        <p:nvSpPr>
+          <p:cNvPr id="3" name="Content Placeholder 2"/>
+          <p:cNvSpPr>
+            <a:spLocks noGrp="1"/>
+          </p:cNvSpPr>
+          <p:nvPr>
+            <p:ph idx="1"/>
+          </p:nvPr>
+        </p:nvSpPr>
+        <p:spPr/>
+        <p:txBody>
+          <a:bodyPr>
+            <a:normAutofit lnSpcReduction="10000"/>
+          </a:bodyPr>
+          <a:lstStyle/>
+          <a:p>
+            <a:r>
+              <a:rPr lang="en-US" dirty="0" smtClean="0"/>
+              <a:t>Arrays</a:t>
+            </a:r>
+          </a:p>
+          <a:p>
+            <a:r>
+              <a:rPr lang="en-US" dirty="0" smtClean="0"/>
+              <a:t>Character Strings</a:t>
+            </a:r>
+          </a:p>
+          <a:p>
+            <a:r>
+              <a:rPr lang="en-US" dirty="0" smtClean="0"/>
+              <a:t>Pointers vs. References</a:t>
+            </a:r>
+          </a:p>
+          <a:p>
+            <a:r>
+              <a:rPr lang="en-US" dirty="0" smtClean="0"/>
+              <a:t>Static methods</a:t>
+            </a:r>
+          </a:p>
+          <a:p>
+            <a:r>
+              <a:rPr lang="en-US" dirty="0" smtClean="0"/>
+              <a:t>Variable and parameter details</a:t>
+            </a:r>
+          </a:p>
+          <a:p>
+            <a:r>
+              <a:rPr lang="en-US" dirty="0" err="1" smtClean="0"/>
+              <a:t>structs</a:t>
+            </a:r>
+            <a:endParaRPr lang="en-US" dirty="0" smtClean="0"/>
+          </a:p>
+          <a:p>
+            <a:r>
+              <a:rPr lang="en-US" dirty="0" smtClean="0"/>
+              <a:t>Header files (i.e. *.h)</a:t>
+            </a:r>
+          </a:p>
+          <a:p>
+            <a:r>
+              <a:rPr lang="en-US" dirty="0" smtClean="0"/>
+              <a:t>The macro pre-processor</a:t>
+            </a:r>
+          </a:p>
+          <a:p>
+            <a:r>
+              <a:rPr lang="en-US" dirty="0" smtClean="0"/>
+              <a:t>Bit operations</a:t>
+            </a:r>
+          </a:p>
+          <a:p>
+            <a:r>
+              <a:rPr lang="en-US" dirty="0" err="1" smtClean="0"/>
+              <a:t>Etc</a:t>
+            </a:r>
+            <a:endParaRPr lang="en-US" dirty="0"/>
+          </a:p>
+        </p:txBody>
+      </p:sp>
+    </p:spTree>
+    <p:extLst>
+      <p:ext uri="{BB962C8B-B14F-4D97-AF65-F5344CB8AC3E}">
+        <p14:creationId xmlns:p14="http://schemas.microsoft.com/office/powerpoint/2010/main" val="1426387078"/>
+      </p:ext>
+    </p:extLst>
+  </p:cSld>
+  <p:clrMapOvr>
+    <a:masterClrMapping/>
+  </p:clrMapOvr>
+  <p:timing>
+    <p:tnLst>
+      <p:par>
+        <p:cTn id="1" dur="indefinite" restart="never" nodeType="tmRoot"/>
+      </p:par>
+    </p:tnLst>
+  </p:timing>
+</p:sld>
+</file>
+
+<file path=ppt/slides/slide15.xml><?xml version="1.0" encoding="utf-8"?>
+<p:sld xmlns:a="http://schemas.openxmlformats.org/drawingml/2006/main" xmlns:r="http://schemas.openxmlformats.org/officeDocument/2006/relationships" xmlns:p="http://schemas.openxmlformats.org/presentationml/2006/main">
+  <p:cSld>
+    <p:spTree>
+      <p:nvGrpSpPr>
+        <p:cNvPr id="1" name=""/>
+        <p:cNvGrpSpPr/>
+        <p:nvPr/>
+      </p:nvGrpSpPr>
+      <p:grpSpPr>
+        <a:xfrm>
+          <a:off x="0" y="0"/>
+          <a:ext cx="0" cy="0"/>
+          <a:chOff x="0" y="0"/>
+          <a:chExt cx="0" cy="0"/>
+        </a:xfrm>
+      </p:grpSpPr>
+      <p:sp>
+        <p:nvSpPr>
+          <p:cNvPr id="2" name="Title 1"/>
+          <p:cNvSpPr>
+            <a:spLocks noGrp="1"/>
+          </p:cNvSpPr>
+          <p:nvPr>
+            <p:ph type="title"/>
+          </p:nvPr>
+        </p:nvSpPr>
+        <p:spPr/>
+        <p:txBody>
+          <a:bodyPr>
+            <a:normAutofit fontScale="90000"/>
+          </a:bodyPr>
+          <a:lstStyle/>
+          <a:p>
+            <a:r>
+              <a:rPr lang="en-US" dirty="0" smtClean="0"/>
+              <a:t>Building a C Program:</a:t>
+            </a:r>
+            <a:br>
+              <a:rPr lang="en-US" dirty="0" smtClean="0"/>
+            </a:br>
+            <a:r>
+              <a:rPr lang="en-US" dirty="0" smtClean="0"/>
+              <a:t>Onyx Command Line</a:t>
+            </a:r>
+            <a:endParaRPr lang="en-US" dirty="0"/>
+          </a:p>
+        </p:txBody>
+      </p:sp>
+      <p:graphicFrame>
+        <p:nvGraphicFramePr>
+          <p:cNvPr id="6" name="Content Placeholder 5"/>
+          <p:cNvGraphicFramePr>
+            <a:graphicFrameLocks noGrp="1"/>
+          </p:cNvGraphicFramePr>
+          <p:nvPr>
+            <p:ph idx="1"/>
+            <p:extLst>
+              <p:ext uri="{D42A27DB-BD31-4B8C-83A1-F6EECF244321}">
+                <p14:modId xmlns:p14="http://schemas.microsoft.com/office/powerpoint/2010/main" val="1383485240"/>
+              </p:ext>
+            </p:extLst>
+          </p:nvPr>
+        </p:nvGraphicFramePr>
+        <p:xfrm>
+          <a:off x="430306" y="2770188"/>
+          <a:ext cx="8283388" cy="3538537"/>
+        </p:xfrm>
+        <a:graphic>
+          <a:graphicData uri="http://schemas.openxmlformats.org/drawingml/2006/diagram">
+            <dgm:relIds xmlns:dgm="http://schemas.openxmlformats.org/drawingml/2006/diagram" xmlns:r="http://schemas.openxmlformats.org/officeDocument/2006/relationships" r:dm="rId2" r:lo="rId3" r:qs="rId4" r:cs="rId5"/>
+          </a:graphicData>
+        </a:graphic>
+      </p:graphicFrame>
+    </p:spTree>
+    <p:extLst>
+      <p:ext uri="{BB962C8B-B14F-4D97-AF65-F5344CB8AC3E}">
+        <p14:creationId xmlns:p14="http://schemas.microsoft.com/office/powerpoint/2010/main" val="1027523126"/>
+      </p:ext>
+    </p:extLst>
+  </p:cSld>
+  <p:clrMapOvr>
+    <a:masterClrMapping/>
+  </p:clrMapOvr>
+  <p:timing>
+    <p:tnLst>
+      <p:par>
+        <p:cTn id="1" dur="indefinite" restart="never" nodeType="tmRoot"/>
+      </p:par>
+    </p:tnLst>
+  </p:timing>
+</p:sld>
+</file>
+
+<file path=ppt/slides/slide16.xml><?xml version="1.0" encoding="utf-8"?>
+<p:sld xmlns:a="http://schemas.openxmlformats.org/drawingml/2006/main" xmlns:r="http://schemas.openxmlformats.org/officeDocument/2006/relationships" xmlns:p="http://schemas.openxmlformats.org/presentationml/2006/main">
+  <p:cSld>
+    <p:spTree>
+      <p:nvGrpSpPr>
+        <p:cNvPr id="1" name=""/>
+        <p:cNvGrpSpPr/>
+        <p:nvPr/>
+      </p:nvGrpSpPr>
+      <p:grpSpPr>
+        <a:xfrm>
+          <a:off x="0" y="0"/>
+          <a:ext cx="0" cy="0"/>
+          <a:chOff x="0" y="0"/>
+          <a:chExt cx="0" cy="0"/>
+        </a:xfrm>
+      </p:grpSpPr>
+      <p:sp>
+        <p:nvSpPr>
+          <p:cNvPr id="2" name="Title 1"/>
+          <p:cNvSpPr>
+            <a:spLocks noGrp="1"/>
+          </p:cNvSpPr>
+          <p:nvPr>
+            <p:ph type="title"/>
+          </p:nvPr>
+        </p:nvSpPr>
+        <p:spPr>
+          <a:xfrm>
+            <a:off x="914400" y="589974"/>
+            <a:ext cx="7315200" cy="1154097"/>
+          </a:xfrm>
+        </p:spPr>
+        <p:txBody>
+          <a:bodyPr/>
+          <a:lstStyle/>
+          <a:p>
+            <a:r>
+              <a:rPr lang="en-US" dirty="0" smtClean="0"/>
+              <a:t>Building a C Program on Onyx</a:t>
+            </a:r>
+            <a:endParaRPr lang="en-US" dirty="0"/>
+          </a:p>
+        </p:txBody>
+      </p:sp>
+      <p:pic>
+        <p:nvPicPr>
+          <p:cNvPr id="4" name="Content Placeholder 3"/>
+          <p:cNvPicPr>
+            <a:picLocks noGrp="1" noChangeAspect="1"/>
+          </p:cNvPicPr>
+          <p:nvPr>
+            <p:ph idx="1"/>
+          </p:nvPr>
+        </p:nvPicPr>
+        <p:blipFill>
+          <a:blip r:embed="rId2">
+            <a:extLst>
+              <a:ext uri="{28A0092B-C50C-407E-A947-70E740481C1C}">
+                <a14:useLocalDpi xmlns:a14="http://schemas.microsoft.com/office/drawing/2010/main" val="0"/>
+              </a:ext>
+            </a:extLst>
+          </a:blip>
+          <a:stretch>
+            <a:fillRect/>
+          </a:stretch>
+        </p:blipFill>
+        <p:spPr>
+          <a:xfrm>
+            <a:off x="995082" y="2126738"/>
+            <a:ext cx="7153835" cy="4906074"/>
+          </a:xfrm>
+        </p:spPr>
+      </p:pic>
+    </p:spTree>
+    <p:extLst>
+      <p:ext uri="{BB962C8B-B14F-4D97-AF65-F5344CB8AC3E}">
+        <p14:creationId xmlns:p14="http://schemas.microsoft.com/office/powerpoint/2010/main" val="539116182"/>
+      </p:ext>
+    </p:extLst>
+  </p:cSld>
+  <p:clrMapOvr>
+    <a:masterClrMapping/>
+  </p:clrMapOvr>
+  <p:timing>
+    <p:tnLst>
+      <p:par>
+        <p:cTn id="1" dur="indefinite" restart="never" nodeType="tmRoot"/>
+      </p:par>
+    </p:tnLst>
+  </p:timing>
+</p:sld>
+</file>
+
+<file path=ppt/slides/slide17.xml><?xml version="1.0" encoding="utf-8"?>
+<p:sld xmlns:a="http://schemas.openxmlformats.org/drawingml/2006/main" xmlns:r="http://schemas.openxmlformats.org/officeDocument/2006/relationships" xmlns:p="http://schemas.openxmlformats.org/presentationml/2006/main">
+  <p:cSld>
+    <p:spTree>
+      <p:nvGrpSpPr>
+        <p:cNvPr id="1" name=""/>
+        <p:cNvGrpSpPr/>
+        <p:nvPr/>
+      </p:nvGrpSpPr>
+      <p:grpSpPr>
+        <a:xfrm>
+          <a:off x="0" y="0"/>
+          <a:ext cx="0" cy="0"/>
+          <a:chOff x="0" y="0"/>
+          <a:chExt cx="0" cy="0"/>
+        </a:xfrm>
+      </p:grpSpPr>
+      <p:sp>
+        <p:nvSpPr>
+          <p:cNvPr id="2" name="Title 1"/>
+          <p:cNvSpPr>
+            <a:spLocks noGrp="1"/>
+          </p:cNvSpPr>
+          <p:nvPr>
+            <p:ph type="title"/>
+          </p:nvPr>
+        </p:nvSpPr>
+        <p:spPr>
+          <a:xfrm>
+            <a:off x="914400" y="589973"/>
+            <a:ext cx="7315200" cy="1154097"/>
+          </a:xfrm>
+        </p:spPr>
+        <p:txBody>
+          <a:bodyPr>
+            <a:normAutofit/>
+          </a:bodyPr>
+          <a:lstStyle/>
+          <a:p>
+            <a:r>
+              <a:rPr lang="en-US" dirty="0" smtClean="0"/>
+              <a:t>Exercise:  </a:t>
+            </a:r>
+            <a:r>
+              <a:rPr lang="en-US" dirty="0" err="1" smtClean="0"/>
+              <a:t>helloworld.c</a:t>
+            </a:r>
+            <a:endParaRPr lang="en-US" dirty="0"/>
+          </a:p>
+        </p:txBody>
+      </p:sp>
+      <p:sp>
+        <p:nvSpPr>
+          <p:cNvPr id="3" name="Content Placeholder 2"/>
+          <p:cNvSpPr>
+            <a:spLocks noGrp="1"/>
+          </p:cNvSpPr>
+          <p:nvPr>
+            <p:ph idx="1"/>
+          </p:nvPr>
+        </p:nvSpPr>
+        <p:spPr/>
+        <p:txBody>
+          <a:bodyPr/>
+          <a:lstStyle/>
+          <a:p>
+            <a:r>
+              <a:rPr lang="en-US" dirty="0" smtClean="0"/>
+              <a:t>Login to onyx</a:t>
+            </a:r>
+          </a:p>
+          <a:p>
+            <a:r>
+              <a:rPr lang="en-US" dirty="0" smtClean="0"/>
+              <a:t>Setup a directory folder for your </a:t>
+            </a:r>
+            <a:r>
+              <a:rPr lang="en-US" dirty="0" err="1" smtClean="0"/>
+              <a:t>helloworld</a:t>
+            </a:r>
+            <a:r>
+              <a:rPr lang="en-US" dirty="0" smtClean="0"/>
+              <a:t> files</a:t>
+            </a:r>
+          </a:p>
+          <a:p>
+            <a:r>
+              <a:rPr lang="en-US" dirty="0" smtClean="0"/>
+              <a:t>Choose your text editor (hint:  use </a:t>
+            </a:r>
+            <a:r>
+              <a:rPr lang="en-US" dirty="0" err="1" smtClean="0"/>
+              <a:t>kwrite</a:t>
+            </a:r>
+            <a:r>
+              <a:rPr lang="en-US" dirty="0" smtClean="0"/>
+              <a:t> if you know not vim nor </a:t>
+            </a:r>
+            <a:r>
+              <a:rPr lang="en-US" dirty="0" err="1" smtClean="0"/>
+              <a:t>emacs</a:t>
+            </a:r>
+            <a:r>
+              <a:rPr lang="en-US" dirty="0" smtClean="0"/>
+              <a:t>) and create </a:t>
+            </a:r>
+            <a:r>
+              <a:rPr lang="en-US" dirty="0" err="1" smtClean="0"/>
+              <a:t>helloworld.c</a:t>
+            </a:r>
+            <a:endParaRPr lang="en-US" dirty="0" smtClean="0"/>
+          </a:p>
+          <a:p>
+            <a:r>
+              <a:rPr lang="en-US" dirty="0" smtClean="0"/>
+              <a:t>Compile and link:  </a:t>
+            </a:r>
+            <a:r>
+              <a:rPr lang="en-US" dirty="0" err="1" smtClean="0">
+                <a:latin typeface="Courier" charset="0"/>
+                <a:ea typeface="Courier" charset="0"/>
+                <a:cs typeface="Courier" charset="0"/>
+              </a:rPr>
+              <a:t>gcc</a:t>
+            </a:r>
+            <a:r>
+              <a:rPr lang="en-US" dirty="0" smtClean="0">
+                <a:latin typeface="Courier" charset="0"/>
+                <a:ea typeface="Courier" charset="0"/>
+                <a:cs typeface="Courier" charset="0"/>
+              </a:rPr>
+              <a:t> </a:t>
+            </a:r>
+            <a:r>
+              <a:rPr lang="mr-IN" dirty="0" smtClean="0">
+                <a:latin typeface="Courier" charset="0"/>
+                <a:ea typeface="Courier" charset="0"/>
+                <a:cs typeface="Courier" charset="0"/>
+              </a:rPr>
+              <a:t>–</a:t>
+            </a:r>
+            <a:r>
+              <a:rPr lang="en-US" dirty="0" smtClean="0">
+                <a:latin typeface="Courier" charset="0"/>
+                <a:ea typeface="Courier" charset="0"/>
+                <a:cs typeface="Courier" charset="0"/>
+              </a:rPr>
+              <a:t>o </a:t>
+            </a:r>
+            <a:r>
+              <a:rPr lang="en-US" dirty="0" err="1" smtClean="0">
+                <a:latin typeface="Courier" charset="0"/>
+                <a:ea typeface="Courier" charset="0"/>
+                <a:cs typeface="Courier" charset="0"/>
+              </a:rPr>
+              <a:t>helloworld</a:t>
+            </a:r>
+            <a:r>
+              <a:rPr lang="en-US" dirty="0" smtClean="0">
+                <a:latin typeface="Courier" charset="0"/>
+                <a:ea typeface="Courier" charset="0"/>
+                <a:cs typeface="Courier" charset="0"/>
+              </a:rPr>
+              <a:t> </a:t>
+            </a:r>
+            <a:r>
+              <a:rPr lang="en-US" dirty="0" err="1" smtClean="0">
+                <a:latin typeface="Courier" charset="0"/>
+                <a:ea typeface="Courier" charset="0"/>
+                <a:cs typeface="Courier" charset="0"/>
+              </a:rPr>
+              <a:t>helloworld.c</a:t>
+            </a:r>
+            <a:endParaRPr lang="en-US" dirty="0" smtClean="0">
+              <a:latin typeface="Courier" charset="0"/>
+              <a:ea typeface="Courier" charset="0"/>
+              <a:cs typeface="Courier" charset="0"/>
+            </a:endParaRPr>
+          </a:p>
+          <a:p>
+            <a:r>
+              <a:rPr lang="en-US" dirty="0" smtClean="0"/>
+              <a:t>Execute:  </a:t>
+            </a:r>
+            <a:r>
+              <a:rPr lang="en-US" dirty="0" smtClean="0">
+                <a:latin typeface="Courier" charset="0"/>
+                <a:ea typeface="Courier" charset="0"/>
+                <a:cs typeface="Courier" charset="0"/>
+              </a:rPr>
+              <a:t>./</a:t>
+            </a:r>
+            <a:r>
+              <a:rPr lang="en-US" dirty="0" err="1" smtClean="0">
+                <a:latin typeface="Courier" charset="0"/>
+                <a:ea typeface="Courier" charset="0"/>
+                <a:cs typeface="Courier" charset="0"/>
+              </a:rPr>
+              <a:t>helloworld</a:t>
+            </a:r>
+            <a:endParaRPr lang="en-US" dirty="0" smtClean="0">
+              <a:latin typeface="Courier" charset="0"/>
+              <a:ea typeface="Courier" charset="0"/>
+              <a:cs typeface="Courier" charset="0"/>
+            </a:endParaRPr>
+          </a:p>
+          <a:p>
+            <a:r>
+              <a:rPr lang="en-US" dirty="0" smtClean="0"/>
+              <a:t>Analysis:  </a:t>
+            </a:r>
+            <a:r>
+              <a:rPr lang="en-US" dirty="0" smtClean="0">
+                <a:latin typeface="Courier" charset="0"/>
+                <a:ea typeface="Courier" charset="0"/>
+                <a:cs typeface="Courier" charset="0"/>
+              </a:rPr>
+              <a:t>ls -</a:t>
+            </a:r>
+            <a:r>
+              <a:rPr lang="en-US" dirty="0" err="1" smtClean="0">
+                <a:latin typeface="Courier" charset="0"/>
+                <a:ea typeface="Courier" charset="0"/>
+                <a:cs typeface="Courier" charset="0"/>
+              </a:rPr>
+              <a:t>lF</a:t>
+            </a:r>
+            <a:endParaRPr lang="en-US" dirty="0" smtClean="0">
+              <a:latin typeface="Courier" charset="0"/>
+              <a:ea typeface="Courier" charset="0"/>
+              <a:cs typeface="Courier" charset="0"/>
+            </a:endParaRPr>
+          </a:p>
+        </p:txBody>
+      </p:sp>
+    </p:spTree>
+    <p:extLst>
+      <p:ext uri="{BB962C8B-B14F-4D97-AF65-F5344CB8AC3E}">
+        <p14:creationId xmlns:p14="http://schemas.microsoft.com/office/powerpoint/2010/main" val="1278411659"/>
       </p:ext>
     </p:extLst>
   </p:cSld>
@@ -4304,7 +9358,7 @@
           <a:lstStyle/>
           <a:p>
             <a:r>
-              <a:rPr lang="en-US" smtClean="0"/>
+              <a:rPr lang="en-US" dirty="0" smtClean="0"/>
               <a:t>-- Marvel, 1962</a:t>
             </a:r>
             <a:endParaRPr lang="en-US" dirty="0"/>
@@ -4388,6 +9442,7 @@
           <a:bodyPr/>
           <a:lstStyle/>
           <a:p>
+            <a:pPr algn="ctr"/>
             <a:r>
               <a:rPr lang="en-US" dirty="0" smtClean="0"/>
               <a:t>C</a:t>
@@ -4411,6 +9466,7 @@
           <a:bodyPr/>
           <a:lstStyle/>
           <a:p>
+            <a:pPr algn="ctr"/>
             <a:r>
               <a:rPr lang="en-US" dirty="0" smtClean="0"/>
               <a:t>Java</a:t>
@@ -4876,7 +9932,7 @@
         </p:spPr>
         <p:txBody>
           <a:bodyPr>
-            <a:normAutofit lnSpcReduction="10000"/>
+            <a:normAutofit/>
           </a:bodyPr>
           <a:lstStyle/>
           <a:p>
@@ -4890,15 +9946,15 @@
             </a:r>
             <a:r>
               <a:rPr lang="en-US" dirty="0" smtClean="0"/>
-              <a:t> imports definitions from, </a:t>
-            </a:r>
-            <a:r>
-              <a:rPr lang="en-US" dirty="0" err="1" smtClean="0"/>
-              <a:t>stdio.h</a:t>
+              <a:t> imports definitions </a:t>
             </a:r>
             <a:r>
               <a:rPr lang="en-US" dirty="0" smtClean="0"/>
-              <a:t>, akin to java’s </a:t>
+              <a:t>from </a:t>
+            </a:r>
+            <a:r>
+              <a:rPr lang="en-US" dirty="0" smtClean="0"/>
+              <a:t>akin to java’s </a:t>
             </a:r>
             <a:r>
               <a:rPr lang="en-US" dirty="0" smtClean="0">
@@ -4919,16 +9975,62 @@
                 <a:ea typeface="Courier" charset="0"/>
                 <a:cs typeface="Courier" charset="0"/>
               </a:rPr>
-              <a:t>No classes in C.  All “methods” are static.</a:t>
-            </a:r>
-          </a:p>
-          <a:p>
+              <a:t>No classes in C.  </a:t>
+            </a:r>
             <a:r>
               <a:rPr lang="en-US" dirty="0" smtClean="0">
                 <a:ea typeface="Courier" charset="0"/>
                 <a:cs typeface="Courier" charset="0"/>
               </a:rPr>
-              <a:t>C doesn’t require the details for main() if you don’t depend upon them.</a:t>
+              <a:t>Functions</a:t>
+            </a:r>
+            <a:r>
+              <a:rPr lang="en-US" dirty="0" smtClean="0">
+                <a:ea typeface="Courier" charset="0"/>
+                <a:cs typeface="Courier" charset="0"/>
+              </a:rPr>
+              <a:t> </a:t>
+            </a:r>
+            <a:r>
+              <a:rPr lang="en-US" dirty="0" smtClean="0">
+                <a:ea typeface="Courier" charset="0"/>
+                <a:cs typeface="Courier" charset="0"/>
+              </a:rPr>
+              <a:t>are </a:t>
+            </a:r>
+            <a:r>
+              <a:rPr lang="en-US" dirty="0" smtClean="0">
+                <a:ea typeface="Courier" charset="0"/>
+                <a:cs typeface="Courier" charset="0"/>
+              </a:rPr>
+              <a:t>akin to java static methods</a:t>
+            </a:r>
+            <a:endParaRPr lang="en-US" dirty="0" smtClean="0">
+              <a:ea typeface="Courier" charset="0"/>
+              <a:cs typeface="Courier" charset="0"/>
+            </a:endParaRPr>
+          </a:p>
+          <a:p>
+            <a:r>
+              <a:rPr lang="en-US" dirty="0" smtClean="0">
+                <a:ea typeface="Courier" charset="0"/>
+                <a:cs typeface="Courier" charset="0"/>
+              </a:rPr>
+              <a:t>C doesn’t require the details for main() if </a:t>
+            </a:r>
+            <a:r>
+              <a:rPr lang="en-US" dirty="0" smtClean="0">
+                <a:ea typeface="Courier" charset="0"/>
+                <a:cs typeface="Courier" charset="0"/>
+              </a:rPr>
+              <a:t>your code doesn’t depend </a:t>
+            </a:r>
+            <a:r>
+              <a:rPr lang="en-US" dirty="0" smtClean="0">
+                <a:ea typeface="Courier" charset="0"/>
+                <a:cs typeface="Courier" charset="0"/>
+              </a:rPr>
+              <a:t>upon them.</a:t>
             </a:r>
           </a:p>
           <a:p>
@@ -5015,7 +10117,7 @@
       </p:grpSpPr>
       <p:sp>
         <p:nvSpPr>
-          <p:cNvPr id="2" name="Title 1"/>
+          <p:cNvPr id="5" name="Title 4"/>
           <p:cNvSpPr>
             <a:spLocks noGrp="1"/>
           </p:cNvSpPr>
@@ -5025,12 +10127,14 @@
         </p:nvSpPr>
         <p:spPr/>
         <p:txBody>
-          <a:bodyPr/>
+          <a:bodyPr>
+            <a:normAutofit fontScale="90000"/>
+          </a:bodyPr>
           <a:lstStyle/>
           <a:p>
             <a:r>
               <a:rPr lang="en-US" dirty="0" smtClean="0"/>
-              <a:t>Intro to C Variables</a:t>
+              <a:t>Programming Language Terminology</a:t>
             </a:r>
             <a:endParaRPr lang="en-US" dirty="0"/>
           </a:p>
@@ -5038,385 +10142,37 @@
       </p:sp>
       <p:sp>
         <p:nvSpPr>
-          <p:cNvPr id="4" name="Content Placeholder 3"/>
+          <p:cNvPr id="6" name="Content Placeholder 5"/>
           <p:cNvSpPr>
             <a:spLocks noGrp="1"/>
           </p:cNvSpPr>
           <p:nvPr>
-            <p:ph sz="quarter" idx="13"/>
+            <p:ph idx="1"/>
           </p:nvPr>
         </p:nvSpPr>
-        <p:spPr>
-          <a:xfrm>
-            <a:off x="548640" y="2743200"/>
-            <a:ext cx="3931920" cy="3593592"/>
-          </a:xfrm>
-        </p:spPr>
-        <p:txBody>
-          <a:bodyPr>
-            <a:normAutofit/>
-          </a:bodyPr>
-          <a:lstStyle/>
-          <a:p>
-            <a:pPr marL="45720" indent="0">
-              <a:buNone/>
-            </a:pPr>
-            <a:r>
-              <a:rPr lang="en-US" sz="1800" dirty="0" err="1" smtClean="0">
-                <a:latin typeface="Courier" charset="0"/>
-                <a:ea typeface="Courier" charset="0"/>
-                <a:cs typeface="Courier" charset="0"/>
-              </a:rPr>
-              <a:t>int</a:t>
-            </a:r>
-            <a:r>
-              <a:rPr lang="en-US" sz="1800" dirty="0" smtClean="0">
-                <a:latin typeface="Courier" charset="0"/>
-                <a:ea typeface="Courier" charset="0"/>
-                <a:cs typeface="Courier" charset="0"/>
-              </a:rPr>
-              <a:t> sum(</a:t>
-            </a:r>
-            <a:r>
-              <a:rPr lang="en-US" sz="1800" dirty="0" err="1" smtClean="0">
-                <a:latin typeface="Courier" charset="0"/>
-                <a:ea typeface="Courier" charset="0"/>
-                <a:cs typeface="Courier" charset="0"/>
-              </a:rPr>
-              <a:t>int</a:t>
-            </a:r>
-            <a:r>
-              <a:rPr lang="en-US" sz="1800" dirty="0" smtClean="0">
-                <a:latin typeface="Courier" charset="0"/>
-                <a:ea typeface="Courier" charset="0"/>
-                <a:cs typeface="Courier" charset="0"/>
-              </a:rPr>
-              <a:t> x, </a:t>
-            </a:r>
-            <a:r>
-              <a:rPr lang="en-US" sz="1800" dirty="0" err="1" smtClean="0">
-                <a:latin typeface="Courier" charset="0"/>
-                <a:ea typeface="Courier" charset="0"/>
-                <a:cs typeface="Courier" charset="0"/>
-              </a:rPr>
-              <a:t>int</a:t>
-            </a:r>
-            <a:r>
-              <a:rPr lang="en-US" sz="1800" dirty="0" smtClean="0">
-                <a:latin typeface="Courier" charset="0"/>
-                <a:ea typeface="Courier" charset="0"/>
-                <a:cs typeface="Courier" charset="0"/>
-              </a:rPr>
-              <a:t> y) {</a:t>
-            </a:r>
-          </a:p>
-          <a:p>
-            <a:pPr marL="45720" indent="0">
-              <a:buNone/>
-            </a:pPr>
-            <a:r>
-              <a:rPr lang="en-US" sz="1800" dirty="0">
-                <a:latin typeface="Courier" charset="0"/>
-                <a:ea typeface="Courier" charset="0"/>
-                <a:cs typeface="Courier" charset="0"/>
-              </a:rPr>
-              <a:t> </a:t>
-            </a:r>
-            <a:r>
-              <a:rPr lang="en-US" sz="1800" dirty="0" smtClean="0">
-                <a:latin typeface="Courier" charset="0"/>
-                <a:ea typeface="Courier" charset="0"/>
-                <a:cs typeface="Courier" charset="0"/>
-              </a:rPr>
-              <a:t>  </a:t>
-            </a:r>
-            <a:r>
-              <a:rPr lang="en-US" sz="1800" dirty="0" err="1" smtClean="0">
-                <a:latin typeface="Courier" charset="0"/>
-                <a:ea typeface="Courier" charset="0"/>
-                <a:cs typeface="Courier" charset="0"/>
-              </a:rPr>
-              <a:t>int</a:t>
-            </a:r>
-            <a:r>
-              <a:rPr lang="en-US" sz="1800" dirty="0" smtClean="0">
-                <a:latin typeface="Courier" charset="0"/>
-                <a:ea typeface="Courier" charset="0"/>
-                <a:cs typeface="Courier" charset="0"/>
-              </a:rPr>
-              <a:t> z;</a:t>
-            </a:r>
-          </a:p>
-          <a:p>
-            <a:pPr marL="45720" indent="0">
-              <a:buNone/>
-            </a:pPr>
-            <a:r>
-              <a:rPr lang="en-US" sz="1800" dirty="0">
-                <a:latin typeface="Courier" charset="0"/>
-                <a:ea typeface="Courier" charset="0"/>
-                <a:cs typeface="Courier" charset="0"/>
-              </a:rPr>
-              <a:t> </a:t>
-            </a:r>
-            <a:r>
-              <a:rPr lang="en-US" sz="1800" dirty="0" smtClean="0">
-                <a:latin typeface="Courier" charset="0"/>
-                <a:ea typeface="Courier" charset="0"/>
-                <a:cs typeface="Courier" charset="0"/>
-              </a:rPr>
-              <a:t>  z = x + y;</a:t>
-            </a:r>
-          </a:p>
-          <a:p>
-            <a:pPr marL="45720" indent="0">
-              <a:buNone/>
-            </a:pPr>
-            <a:r>
-              <a:rPr lang="en-US" sz="1800" dirty="0">
-                <a:latin typeface="Courier" charset="0"/>
-                <a:ea typeface="Courier" charset="0"/>
-                <a:cs typeface="Courier" charset="0"/>
-              </a:rPr>
-              <a:t> </a:t>
-            </a:r>
-            <a:r>
-              <a:rPr lang="en-US" sz="1800" dirty="0" smtClean="0">
-                <a:latin typeface="Courier" charset="0"/>
-                <a:ea typeface="Courier" charset="0"/>
-                <a:cs typeface="Courier" charset="0"/>
-              </a:rPr>
-              <a:t>  return z;</a:t>
-            </a:r>
-          </a:p>
-          <a:p>
-            <a:pPr marL="45720" indent="0">
-              <a:buNone/>
-            </a:pPr>
-            <a:r>
-              <a:rPr lang="en-US" sz="1800" dirty="0">
-                <a:latin typeface="Courier" charset="0"/>
-                <a:ea typeface="Courier" charset="0"/>
-                <a:cs typeface="Courier" charset="0"/>
-              </a:rPr>
-              <a:t>}</a:t>
-            </a:r>
-          </a:p>
-        </p:txBody>
-      </p:sp>
-      <p:sp>
-        <p:nvSpPr>
-          <p:cNvPr id="5" name="Content Placeholder 4"/>
-          <p:cNvSpPr>
-            <a:spLocks noGrp="1"/>
-          </p:cNvSpPr>
-          <p:nvPr>
-            <p:ph sz="quarter" idx="14"/>
-          </p:nvPr>
-        </p:nvSpPr>
-        <p:spPr>
-          <a:xfrm>
-            <a:off x="4681727" y="2743200"/>
-            <a:ext cx="3926695" cy="3595687"/>
-          </a:xfrm>
-        </p:spPr>
+        <p:spPr/>
         <p:txBody>
           <a:bodyPr/>
           <a:lstStyle/>
           <a:p>
             <a:r>
-              <a:rPr lang="en-US" dirty="0" smtClean="0">
-                <a:ea typeface="Courier" charset="0"/>
-                <a:cs typeface="Courier" charset="0"/>
-              </a:rPr>
-              <a:t>Defines a function named </a:t>
-            </a:r>
-            <a:r>
-              <a:rPr lang="en-US" dirty="0" smtClean="0">
-                <a:latin typeface="Courier" charset="0"/>
-                <a:ea typeface="Courier" charset="0"/>
-                <a:cs typeface="Courier" charset="0"/>
-              </a:rPr>
-              <a:t>sum</a:t>
-            </a:r>
-            <a:r>
-              <a:rPr lang="en-US" dirty="0" smtClean="0">
-                <a:ea typeface="Courier" charset="0"/>
-                <a:cs typeface="Courier" charset="0"/>
-              </a:rPr>
-              <a:t> returning an </a:t>
-            </a:r>
-            <a:r>
-              <a:rPr lang="en-US" dirty="0" err="1" smtClean="0">
-                <a:latin typeface="Courier" charset="0"/>
-                <a:ea typeface="Courier" charset="0"/>
-                <a:cs typeface="Courier" charset="0"/>
-              </a:rPr>
-              <a:t>int</a:t>
-            </a:r>
-            <a:r>
-              <a:rPr lang="en-US" dirty="0" smtClean="0">
-                <a:ea typeface="Courier" charset="0"/>
-                <a:cs typeface="Courier" charset="0"/>
-              </a:rPr>
-              <a:t> value</a:t>
-            </a:r>
-          </a:p>
-          <a:p>
-            <a:r>
-              <a:rPr lang="en-US" dirty="0" smtClean="0">
-                <a:latin typeface="Courier" charset="0"/>
-                <a:ea typeface="Courier" charset="0"/>
-                <a:cs typeface="Courier" charset="0"/>
-              </a:rPr>
-              <a:t>sum</a:t>
-            </a:r>
-            <a:r>
-              <a:rPr lang="en-US" dirty="0" smtClean="0">
-                <a:ea typeface="Courier" charset="0"/>
-                <a:cs typeface="Courier" charset="0"/>
-              </a:rPr>
-              <a:t> behaves akin to a </a:t>
-            </a:r>
-            <a:r>
-              <a:rPr lang="en-US" i="1" dirty="0" smtClean="0">
-                <a:ea typeface="Courier" charset="0"/>
-                <a:cs typeface="Courier" charset="0"/>
-              </a:rPr>
-              <a:t>static method</a:t>
-            </a:r>
-            <a:r>
-              <a:rPr lang="en-US" dirty="0" smtClean="0">
-                <a:ea typeface="Courier" charset="0"/>
-                <a:cs typeface="Courier" charset="0"/>
-              </a:rPr>
-              <a:t> in java </a:t>
-            </a:r>
-            <a:r>
-              <a:rPr lang="mr-IN" dirty="0" smtClean="0">
-                <a:ea typeface="Courier" charset="0"/>
-                <a:cs typeface="Courier" charset="0"/>
-              </a:rPr>
-              <a:t>–</a:t>
-            </a:r>
-            <a:r>
-              <a:rPr lang="en-US" dirty="0" smtClean="0">
-                <a:ea typeface="Courier" charset="0"/>
-                <a:cs typeface="Courier" charset="0"/>
-              </a:rPr>
-              <a:t> there exists one instance of </a:t>
-            </a:r>
-            <a:r>
-              <a:rPr lang="en-US" dirty="0" smtClean="0">
-                <a:latin typeface="Courier" charset="0"/>
-                <a:ea typeface="Courier" charset="0"/>
-                <a:cs typeface="Courier" charset="0"/>
-              </a:rPr>
-              <a:t>sum</a:t>
-            </a:r>
-            <a:r>
-              <a:rPr lang="en-US" dirty="0" smtClean="0">
-                <a:ea typeface="Courier" charset="0"/>
-                <a:cs typeface="Courier" charset="0"/>
-              </a:rPr>
-              <a:t> in the entire program</a:t>
-            </a:r>
-          </a:p>
-          <a:p>
-            <a:r>
-              <a:rPr lang="en-US" dirty="0" smtClean="0">
-                <a:latin typeface="Courier" charset="0"/>
-                <a:ea typeface="Courier" charset="0"/>
-                <a:cs typeface="Courier" charset="0"/>
-              </a:rPr>
-              <a:t>x</a:t>
-            </a:r>
-            <a:r>
-              <a:rPr lang="en-US" dirty="0" smtClean="0">
-                <a:ea typeface="Courier" charset="0"/>
-                <a:cs typeface="Courier" charset="0"/>
-              </a:rPr>
-              <a:t> and </a:t>
-            </a:r>
-            <a:r>
-              <a:rPr lang="en-US" dirty="0" smtClean="0">
-                <a:latin typeface="Courier" charset="0"/>
-                <a:ea typeface="Courier" charset="0"/>
-                <a:cs typeface="Courier" charset="0"/>
-              </a:rPr>
-              <a:t>y</a:t>
-            </a:r>
-            <a:r>
-              <a:rPr lang="en-US" dirty="0" smtClean="0">
-                <a:ea typeface="Courier" charset="0"/>
-                <a:cs typeface="Courier" charset="0"/>
-              </a:rPr>
-              <a:t> are </a:t>
-            </a:r>
-            <a:r>
-              <a:rPr lang="en-US" dirty="0" err="1" smtClean="0">
-                <a:latin typeface="Courier" charset="0"/>
-                <a:ea typeface="Courier" charset="0"/>
-                <a:cs typeface="Courier" charset="0"/>
-              </a:rPr>
-              <a:t>int</a:t>
-            </a:r>
-            <a:r>
-              <a:rPr lang="en-US" dirty="0" smtClean="0">
-                <a:ea typeface="Courier" charset="0"/>
-                <a:cs typeface="Courier" charset="0"/>
-              </a:rPr>
-              <a:t> parameters</a:t>
-            </a:r>
-          </a:p>
-          <a:p>
-            <a:r>
-              <a:rPr lang="en-US" dirty="0" smtClean="0">
-                <a:latin typeface="Courier" charset="0"/>
-                <a:ea typeface="Courier" charset="0"/>
-                <a:cs typeface="Courier" charset="0"/>
-              </a:rPr>
-              <a:t>z</a:t>
-            </a:r>
-            <a:r>
-              <a:rPr lang="en-US" dirty="0" smtClean="0">
-                <a:ea typeface="Courier" charset="0"/>
-                <a:cs typeface="Courier" charset="0"/>
-              </a:rPr>
-              <a:t> is an </a:t>
-            </a:r>
-            <a:r>
-              <a:rPr lang="en-US" i="1" dirty="0" smtClean="0">
-                <a:ea typeface="Courier" charset="0"/>
-                <a:cs typeface="Courier" charset="0"/>
-              </a:rPr>
-              <a:t>automatic</a:t>
-            </a:r>
-            <a:r>
-              <a:rPr lang="en-US" dirty="0" smtClean="0">
-                <a:ea typeface="Courier" charset="0"/>
-                <a:cs typeface="Courier" charset="0"/>
-              </a:rPr>
-              <a:t> (local) </a:t>
-            </a:r>
-            <a:r>
-              <a:rPr lang="en-US" i="1" dirty="0" smtClean="0">
-                <a:ea typeface="Courier" charset="0"/>
-                <a:cs typeface="Courier" charset="0"/>
-              </a:rPr>
-              <a:t>variable</a:t>
-            </a:r>
-            <a:endParaRPr lang="en-US" i="1" dirty="0">
-              <a:ea typeface="Courier" charset="0"/>
-              <a:cs typeface="Courier" charset="0"/>
-            </a:endParaRPr>
+              <a:rPr lang="en-US" dirty="0" smtClean="0"/>
+              <a:t>Scope:  Refers to the visibility of an identifier (e.g. a variable name) --- where it can be accessed.  E.g. in java, the scope of a local variable is that of the code block defining it.</a:t>
+            </a:r>
+          </a:p>
+          <a:p>
+            <a:r>
+              <a:rPr lang="en-US" dirty="0" smtClean="0"/>
+              <a:t>Storage class:  Refers to where and when a programming language allocates memory for something (e.g. a variable).  For example, in java, storage for a parameter is allocated on the stack when a method is invoked</a:t>
+            </a:r>
+            <a:endParaRPr lang="en-US" dirty="0"/>
           </a:p>
         </p:txBody>
       </p:sp>
     </p:spTree>
     <p:extLst>
       <p:ext uri="{BB962C8B-B14F-4D97-AF65-F5344CB8AC3E}">
-        <p14:creationId xmlns:p14="http://schemas.microsoft.com/office/powerpoint/2010/main" val="2099986726"/>
+        <p14:creationId xmlns:p14="http://schemas.microsoft.com/office/powerpoint/2010/main" val="604520462"/>
       </p:ext>
     </p:extLst>
   </p:cSld>
@@ -5460,7 +10216,11 @@
           <a:p>
             <a:r>
               <a:rPr lang="en-US" dirty="0" smtClean="0"/>
-              <a:t>Automatic Variables</a:t>
+              <a:t>Introduction </a:t>
+            </a:r>
+            <a:r>
+              <a:rPr lang="en-US" dirty="0" smtClean="0"/>
+              <a:t>to C Variables</a:t>
             </a:r>
             <a:endParaRPr lang="en-US" dirty="0"/>
           </a:p>
@@ -5656,10 +10416,156 @@
           <a:p>
             <a:r>
               <a:rPr lang="en-US" dirty="0" smtClean="0">
+                <a:ea typeface="Courier" charset="0"/>
+                <a:cs typeface="Courier" charset="0"/>
+              </a:rPr>
+              <a:t>Defines a function named </a:t>
+            </a:r>
+            <a:r>
+              <a:rPr lang="en-US" dirty="0" smtClean="0">
                 <a:latin typeface="Courier" charset="0"/>
                 <a:ea typeface="Courier" charset="0"/>
                 <a:cs typeface="Courier" charset="0"/>
               </a:rPr>
+              <a:t>sum</a:t>
+            </a:r>
+            <a:r>
+              <a:rPr lang="en-US" dirty="0" smtClean="0">
+                <a:ea typeface="Courier" charset="0"/>
+                <a:cs typeface="Courier" charset="0"/>
+              </a:rPr>
+              <a:t> returning an </a:t>
+            </a:r>
+            <a:r>
+              <a:rPr lang="en-US" dirty="0" err="1" smtClean="0">
+                <a:latin typeface="Courier" charset="0"/>
+                <a:ea typeface="Courier" charset="0"/>
+                <a:cs typeface="Courier" charset="0"/>
+              </a:rPr>
+              <a:t>int</a:t>
+            </a:r>
+            <a:r>
+              <a:rPr lang="en-US" dirty="0" smtClean="0">
+                <a:ea typeface="Courier" charset="0"/>
+                <a:cs typeface="Courier" charset="0"/>
+              </a:rPr>
+              <a:t> value</a:t>
+            </a:r>
+          </a:p>
+          <a:p>
+            <a:r>
+              <a:rPr lang="en-US" dirty="0" smtClean="0">
+                <a:latin typeface="Courier" charset="0"/>
+                <a:ea typeface="Courier" charset="0"/>
+                <a:cs typeface="Courier" charset="0"/>
+              </a:rPr>
+              <a:t>sum</a:t>
+            </a:r>
+            <a:r>
+              <a:rPr lang="en-US" dirty="0" smtClean="0">
+                <a:ea typeface="Courier" charset="0"/>
+                <a:cs typeface="Courier" charset="0"/>
+              </a:rPr>
+              <a:t> behaves akin to a </a:t>
+            </a:r>
+            <a:r>
+              <a:rPr lang="en-US" i="1" dirty="0" smtClean="0">
+                <a:ea typeface="Courier" charset="0"/>
+                <a:cs typeface="Courier" charset="0"/>
+              </a:rPr>
+              <a:t>static method</a:t>
+            </a:r>
+            <a:r>
+              <a:rPr lang="en-US" dirty="0" smtClean="0">
+                <a:ea typeface="Courier" charset="0"/>
+                <a:cs typeface="Courier" charset="0"/>
+              </a:rPr>
+              <a:t> in java </a:t>
+            </a:r>
+            <a:r>
+              <a:rPr lang="mr-IN" dirty="0" smtClean="0">
+                <a:ea typeface="Courier" charset="0"/>
+                <a:cs typeface="Courier" charset="0"/>
+              </a:rPr>
+              <a:t>–</a:t>
+            </a:r>
+            <a:r>
+              <a:rPr lang="en-US" dirty="0" smtClean="0">
+                <a:ea typeface="Courier" charset="0"/>
+                <a:cs typeface="Courier" charset="0"/>
+              </a:rPr>
+              <a:t> there exists one instance of </a:t>
+            </a:r>
+            <a:r>
+              <a:rPr lang="en-US" dirty="0" smtClean="0">
+                <a:latin typeface="Courier" charset="0"/>
+                <a:ea typeface="Courier" charset="0"/>
+                <a:cs typeface="Courier" charset="0"/>
+              </a:rPr>
+              <a:t>sum</a:t>
+            </a:r>
+            <a:r>
+              <a:rPr lang="en-US" dirty="0" smtClean="0">
+                <a:ea typeface="Courier" charset="0"/>
+                <a:cs typeface="Courier" charset="0"/>
+              </a:rPr>
+              <a:t> in the entire program</a:t>
+            </a:r>
+          </a:p>
+          <a:p>
+            <a:r>
+              <a:rPr lang="en-US" dirty="0" smtClean="0">
+                <a:latin typeface="Courier" charset="0"/>
+                <a:ea typeface="Courier" charset="0"/>
+                <a:cs typeface="Courier" charset="0"/>
+              </a:rPr>
+              <a:t>x</a:t>
+            </a:r>
+            <a:r>
+              <a:rPr lang="en-US" dirty="0" smtClean="0">
+                <a:ea typeface="Courier" charset="0"/>
+                <a:cs typeface="Courier" charset="0"/>
+              </a:rPr>
+              <a:t> and </a:t>
+            </a:r>
+            <a:r>
+              <a:rPr lang="en-US" dirty="0" smtClean="0">
+                <a:latin typeface="Courier" charset="0"/>
+                <a:ea typeface="Courier" charset="0"/>
+                <a:cs typeface="Courier" charset="0"/>
+              </a:rPr>
+              <a:t>y</a:t>
+            </a:r>
+            <a:r>
+              <a:rPr lang="en-US" dirty="0" smtClean="0">
+                <a:ea typeface="Courier" charset="0"/>
+                <a:cs typeface="Courier" charset="0"/>
+              </a:rPr>
+              <a:t> are </a:t>
+            </a:r>
+            <a:r>
+              <a:rPr lang="en-US" dirty="0" err="1" smtClean="0">
+                <a:latin typeface="Courier" charset="0"/>
+                <a:ea typeface="Courier" charset="0"/>
+                <a:cs typeface="Courier" charset="0"/>
+              </a:rPr>
+              <a:t>int</a:t>
+            </a:r>
+            <a:r>
+              <a:rPr lang="en-US" dirty="0" smtClean="0">
+                <a:ea typeface="Courier" charset="0"/>
+                <a:cs typeface="Courier" charset="0"/>
+              </a:rPr>
+              <a:t> parameters</a:t>
+            </a:r>
+          </a:p>
+          <a:p>
+            <a:r>
+              <a:rPr lang="en-US" dirty="0" smtClean="0">
+                <a:latin typeface="Courier" charset="0"/>
+                <a:ea typeface="Courier" charset="0"/>
+                <a:cs typeface="Courier" charset="0"/>
+              </a:rPr>
               <a:t>z</a:t>
             </a:r>
             <a:r>
@@ -5690,39 +10596,7 @@
               </a:rPr>
               <a:t>variable</a:t>
             </a:r>
-          </a:p>
-          <a:p>
-            <a:r>
-              <a:rPr lang="en-US" dirty="0" smtClean="0">
-                <a:ea typeface="Courier" charset="0"/>
-                <a:cs typeface="Courier" charset="0"/>
-              </a:rPr>
-              <a:t>Its scope is the compound statement (i.e. code block) in which it’s defined, here</a:t>
-            </a:r>
-            <a:r>
-              <a:rPr lang="mr-IN" dirty="0" smtClean="0">
-                <a:ea typeface="Courier" charset="0"/>
-                <a:cs typeface="Courier" charset="0"/>
-              </a:rPr>
-              <a:t>…</a:t>
-            </a:r>
-            <a:r>
-              <a:rPr lang="en-US" dirty="0" smtClean="0">
-                <a:ea typeface="Courier" charset="0"/>
-                <a:cs typeface="Courier" charset="0"/>
-              </a:rPr>
-              <a:t> everything between { and }</a:t>
-            </a:r>
-          </a:p>
-          <a:p>
-            <a:r>
-              <a:rPr lang="en-US" dirty="0" smtClean="0">
-                <a:ea typeface="Courier" charset="0"/>
-                <a:cs typeface="Courier" charset="0"/>
-              </a:rPr>
-              <a:t>Storage for automatic variables is allocated when the function is invoked, and recycled when the function returns</a:t>
-            </a:r>
-            <a:endParaRPr lang="en-US" dirty="0">
+            <a:endParaRPr lang="en-US" i="1" dirty="0">
               <a:ea typeface="Courier" charset="0"/>
               <a:cs typeface="Courier" charset="0"/>
             </a:endParaRPr>
@@ -5732,7 +10606,7 @@
     </p:spTree>
     <p:extLst>
       <p:ext uri="{BB962C8B-B14F-4D97-AF65-F5344CB8AC3E}">
-        <p14:creationId xmlns:p14="http://schemas.microsoft.com/office/powerpoint/2010/main" val="1766873702"/>
+        <p14:creationId xmlns:p14="http://schemas.microsoft.com/office/powerpoint/2010/main" val="2099986726"/>
       </p:ext>
     </p:extLst>
   </p:cSld>
